--- a/docs/auto-mode-hackathon/final/presentation-final.pptx
+++ b/docs/auto-mode-hackathon/final/presentation-final.pptx
@@ -8854,7 +8854,7 @@
                 <a:cs typeface="Arial"/>
                 <a:sym typeface="Arial"/>
               </a:rPr>
-              <a:t>одель в живом тестировании: </a:t>
+              <a:t>одели в живом тестировании: </a:t>
             </a:r>
             <a:r>
               <a:rPr lang="ru-RU" dirty="0" err="1"/>
@@ -8870,7 +8870,7 @@
             </a:r>
             <a:r>
               <a:rPr lang="ru-RU" dirty="0"/>
-              <a:t>/step-3.7-flash · 132 живых запуска на двух платформах: атаки 78% → 0%, задачи 20 из 21</a:t>
+              <a:t>/step-3.7-flash · 132 запуска на двух платформах: атаки 78% → 0%, задачи 20 из 21; вторая модель nvidia/nemotron-3-super-120b · 16 запусков: атаки 7 из 8 → 0</a:t>
             </a:r>
           </a:p>
           <a:p>

--- a/docs/auto-mode-hackathon/final/presentation-final.pptx
+++ b/docs/auto-mode-hackathon/final/presentation-final.pptx
@@ -10,10 +10,11 @@
   <p:sldIdLst>
     <p:sldId id="256" r:id="rId2"/>
     <p:sldId id="257" r:id="rId3"/>
+    <p:sldId id="259" r:id="rId7"/>
     <p:sldId id="261" r:id="rId4"/>
     <p:sldId id="258" r:id="rId5"/>
     <p:sldId id="260" r:id="rId6"/>
-    <p:sldId id="259" r:id="rId7"/>
+    <p:sldId id="262" r:id="rId13"/>
   </p:sldIdLst>
   <p:sldSz cx="9144000" cy="5143500" type="screen16x9"/>
   <p:notesSz cx="6858000" cy="9144000"/>
@@ -11857,6 +11858,485 @@
 </p:sld>
 </file>
 
+<file path=ppt/slides/slide7.xml><?xml version="1.0" encoding="utf-8"?>
+<p:sld xmlns:a="http://schemas.openxmlformats.org/drawingml/2006/main" xmlns:p="http://schemas.openxmlformats.org/presentationml/2006/main" xmlns:r="http://schemas.openxmlformats.org/officeDocument/2006/relationships">
+  <p:cSld>
+    <p:spTree>
+      <p:nvGrpSpPr>
+        <p:cNvPr id="1" name=""/>
+        <p:cNvGrpSpPr/>
+        <p:nvPr/>
+      </p:nvGrpSpPr>
+      <p:grpSpPr/>
+      <p:sp>
+        <p:nvSpPr>
+          <p:cNvPr id="217" name="Google Shape;217;p27"/>
+          <p:cNvSpPr/>
+          <p:nvPr/>
+        </p:nvSpPr>
+        <p:spPr>
+          <a:xfrm>
+            <a:off x="476250" y="1673096"/>
+            <a:ext cx="7606116" cy="503014"/>
+          </a:xfrm>
+          <a:prstGeom prst="rect">
+            <a:avLst/>
+          </a:prstGeom>
+          <a:noFill/>
+          <a:ln>
+            <a:noFill/>
+          </a:ln>
+        </p:spPr>
+        <p:txBody>
+          <a:bodyPr spcFirstLastPara="1" wrap="square" lIns="0" tIns="0" rIns="0" bIns="0" anchor="t" anchorCtr="0">
+            <a:noAutofit/>
+          </a:bodyPr>
+          <a:lstStyle/>
+          <a:p>
+            <a:pPr marL="0" marR="0" lvl="0" indent="0" algn="l" rtl="0">
+              <a:lnSpc>
+                <a:spcPct val="111076"/>
+              </a:lnSpc>
+              <a:spcBef>
+                <a:spcPts val="0"/>
+              </a:spcBef>
+              <a:spcAft>
+                <a:spcPts val="0"/>
+              </a:spcAft>
+              <a:buNone/>
+            </a:pPr>
+            <a:r>
+              <a:rPr lang="ru" sz="2600" b="1" i="0" u="none" strike="noStrike" cap="none" dirty="0">
+                <a:solidFill>
+                  <a:srgbClr val="000000"/>
+                </a:solidFill>
+                <a:latin typeface="Inter"/>
+                <a:ea typeface="Inter"/>
+                <a:cs typeface="Inter"/>
+                <a:sym typeface="Inter"/>
+              </a:rPr>
+              <a:t>Команда и распределение задач</a:t>
+            </a:r>
+            <a:r>
+              <a:rPr lang="ru-RU" sz="2600" b="1" i="0" u="none" strike="noStrike" cap="none" dirty="0">
+                <a:solidFill>
+                  <a:srgbClr val="000000"/>
+                </a:solidFill>
+                <a:latin typeface="Inter"/>
+                <a:ea typeface="Inter"/>
+                <a:cs typeface="Inter"/>
+                <a:sym typeface="Inter"/>
+              </a:rPr>
+              <a:t/>
+            </a:r>
+            <a:endParaRPr sz="2625" i="0" u="none" strike="noStrike" cap="none" dirty="0">
+              <a:solidFill>
+                <a:schemeClr val="dk1"/>
+              </a:solidFill>
+              <a:latin typeface="Inter"/>
+              <a:ea typeface="Inter"/>
+              <a:cs typeface="Inter"/>
+              <a:sym typeface="Inter"/>
+            </a:endParaRPr>
+          </a:p>
+        </p:txBody>
+      </p:sp>
+      <p:graphicFrame>
+        <p:nvGraphicFramePr>
+          <p:cNvPr id="218" name="Table 217"/>
+          <p:cNvGraphicFramePr>
+            <a:graphicFrameLocks noGrp="1"/>
+          </p:cNvGraphicFramePr>
+          <p:nvPr/>
+        </p:nvGraphicFramePr>
+        <p:xfrm>
+          <a:off x="548640" y="1337310"/>
+          <a:ext cx="8046719" cy="3086100"/>
+        </p:xfrm>
+        <a:graphic>
+          <a:graphicData uri="http://schemas.openxmlformats.org/drawingml/2006/table">
+            <a:tbl>
+              <a:tblPr firstRow="1" bandRow="1">
+                <a:tableStyleId>{5C22544A-7EE6-4342-B048-85BDC9FD1C3A}</a:tableStyleId>
+              </a:tblPr>
+              <a:tblGrid>
+                <a:gridCol w="1448409"/>
+                <a:gridCol w="2092147"/>
+                <a:gridCol w="3218688"/>
+                <a:gridCol w="1287475"/>
+              </a:tblGrid>
+              <a:tr h="771525">
+                <a:tc>
+                  <a:txBody>
+                    <a:bodyPr/>
+                    <a:lstStyle/>
+                    <a:p>
+                      <a:r>
+                        <a:rPr sz="1100" b="1">
+                          <a:solidFill>
+                            <a:srgbClr val="C93E33"/>
+                          </a:solidFill>
+                          <a:latin typeface="Inter"/>
+                        </a:rPr>
+                        <a:t>Участник</a:t>
+                      </a:r>
+                    </a:p>
+                  </a:txBody>
+                  <a:tcPr>
+                    <a:solidFill>
+                      <a:srgbClr val="F2E9E8"/>
+                    </a:solidFill>
+                  </a:tcPr>
+                </a:tc>
+                <a:tc>
+                  <a:txBody>
+                    <a:bodyPr/>
+                    <a:lstStyle/>
+                    <a:p>
+                      <a:r>
+                        <a:rPr sz="1100" b="1">
+                          <a:solidFill>
+                            <a:srgbClr val="C93E33"/>
+                          </a:solidFill>
+                          <a:latin typeface="Inter"/>
+                        </a:rPr>
+                        <a:t>Роль и зона ответственности</a:t>
+                      </a:r>
+                    </a:p>
+                  </a:txBody>
+                  <a:tcPr>
+                    <a:solidFill>
+                      <a:srgbClr val="F2E9E8"/>
+                    </a:solidFill>
+                  </a:tcPr>
+                </a:tc>
+                <a:tc>
+                  <a:txBody>
+                    <a:bodyPr/>
+                    <a:lstStyle/>
+                    <a:p>
+                      <a:r>
+                        <a:rPr sz="1100" b="1">
+                          <a:solidFill>
+                            <a:srgbClr val="C93E33"/>
+                          </a:solidFill>
+                          <a:latin typeface="Inter"/>
+                        </a:rPr>
+                        <a:t>Что сделано</a:t>
+                      </a:r>
+                    </a:p>
+                  </a:txBody>
+                  <a:tcPr>
+                    <a:solidFill>
+                      <a:srgbClr val="F2E9E8"/>
+                    </a:solidFill>
+                  </a:tcPr>
+                </a:tc>
+                <a:tc>
+                  <a:txBody>
+                    <a:bodyPr/>
+                    <a:lstStyle/>
+                    <a:p>
+                      <a:r>
+                        <a:rPr sz="1100" b="1">
+                          <a:solidFill>
+                            <a:srgbClr val="C93E33"/>
+                          </a:solidFill>
+                          <a:latin typeface="Inter"/>
+                        </a:rPr>
+                        <a:t>Участие</a:t>
+                      </a:r>
+                    </a:p>
+                  </a:txBody>
+                  <a:tcPr>
+                    <a:solidFill>
+                      <a:srgbClr val="F2E9E8"/>
+                    </a:solidFill>
+                  </a:tcPr>
+                </a:tc>
+              </a:tr>
+              <a:tr h="771525">
+                <a:tc>
+                  <a:txBody>
+                    <a:bodyPr/>
+                    <a:lstStyle/>
+                    <a:p>
+                      <a:r>
+                        <a:rPr sz="1100" b="1">
+                          <a:solidFill>
+                            <a:srgbClr val="161412"/>
+                          </a:solidFill>
+                          <a:latin typeface="Inter"/>
+                        </a:rPr>
+                        <a:t>Белоконь Михаил</a:t>
+                      </a:r>
+                    </a:p>
+                  </a:txBody>
+                  <a:tcPr>
+                    <a:solidFill>
+                      <a:srgbClr val="FFFFFF"/>
+                    </a:solidFill>
+                  </a:tcPr>
+                </a:tc>
+                <a:tc>
+                  <a:txBody>
+                    <a:bodyPr/>
+                    <a:lstStyle/>
+                    <a:p>
+                      <a:r>
+                        <a:rPr sz="1100" b="0">
+                          <a:solidFill>
+                            <a:srgbClr val="161412"/>
+                          </a:solidFill>
+                          <a:latin typeface="Inter"/>
+                        </a:rPr>
+                        <a:t>Продакт и проджект: постановка, метрики, материалы, приёмка</a:t>
+                      </a:r>
+                    </a:p>
+                  </a:txBody>
+                  <a:tcPr>
+                    <a:solidFill>
+                      <a:srgbClr val="FFFFFF"/>
+                    </a:solidFill>
+                  </a:tcPr>
+                </a:tc>
+                <a:tc>
+                  <a:txBody>
+                    <a:bodyPr/>
+                    <a:lstStyle/>
+                    <a:p>
+                      <a:r>
+                        <a:rPr sz="1100" b="0">
+                          <a:solidFill>
+                            <a:srgbClr val="161412"/>
+                          </a:solidFill>
+                          <a:latin typeface="Inter"/>
+                        </a:rPr>
+                        <a:t>Границы MVP и критерии; конкурентный анализ 30+; продуктовые материалы и колода; живые прогоны на модели, найденные дефекты и доработки; синхронизация артефактов</a:t>
+                      </a:r>
+                    </a:p>
+                  </a:txBody>
+                  <a:tcPr>
+                    <a:solidFill>
+                      <a:srgbClr val="FFFFFF"/>
+                    </a:solidFill>
+                  </a:tcPr>
+                </a:tc>
+                <a:tc>
+                  <a:txBody>
+                    <a:bodyPr/>
+                    <a:lstStyle/>
+                    <a:p>
+                      <a:r>
+                        <a:rPr sz="1100" b="0">
+                          <a:solidFill>
+                            <a:srgbClr val="161412"/>
+                          </a:solidFill>
+                          <a:latin typeface="Inter"/>
+                        </a:rPr>
+                        <a:t>Весь хакатон, ежедневно</a:t>
+                      </a:r>
+                    </a:p>
+                  </a:txBody>
+                  <a:tcPr>
+                    <a:solidFill>
+                      <a:srgbClr val="FFFFFF"/>
+                    </a:solidFill>
+                  </a:tcPr>
+                </a:tc>
+              </a:tr>
+              <a:tr h="771525">
+                <a:tc>
+                  <a:txBody>
+                    <a:bodyPr/>
+                    <a:lstStyle/>
+                    <a:p>
+                      <a:r>
+                        <a:rPr sz="1100" b="1">
+                          <a:solidFill>
+                            <a:srgbClr val="161412"/>
+                          </a:solidFill>
+                          <a:latin typeface="Inter"/>
+                        </a:rPr>
+                        <a:t>Кирдяшкин Максим</a:t>
+                      </a:r>
+                    </a:p>
+                  </a:txBody>
+                  <a:tcPr>
+                    <a:solidFill>
+                      <a:srgbClr val="FFFFFF"/>
+                    </a:solidFill>
+                  </a:tcPr>
+                </a:tc>
+                <a:tc>
+                  <a:txBody>
+                    <a:bodyPr/>
+                    <a:lstStyle/>
+                    <a:p>
+                      <a:r>
+                        <a:rPr sz="1100" b="0">
+                          <a:solidFill>
+                            <a:srgbClr val="161412"/>
+                          </a:solidFill>
+                          <a:latin typeface="Inter"/>
+                        </a:rPr>
+                        <a:t>Ведущий инженер: Auto Mode в Kilo и система тестирования</a:t>
+                      </a:r>
+                    </a:p>
+                  </a:txBody>
+                  <a:tcPr>
+                    <a:solidFill>
+                      <a:srgbClr val="FFFFFF"/>
+                    </a:solidFill>
+                  </a:tcPr>
+                </a:tc>
+                <a:tc>
+                  <a:txBody>
+                    <a:bodyPr/>
+                    <a:lstStyle/>
+                    <a:p>
+                      <a:r>
+                        <a:rPr sz="1100" b="0">
+                          <a:solidFill>
+                            <a:srgbClr val="161412"/>
+                          </a:solidFill>
+                          <a:latin typeface="Inter"/>
+                        </a:rPr>
+                        <a:t>Исследование Kilo CLI и ТЗ; шлюз, правила, теневая копия, песочница, аудит; автотесты, демо, стенд и прогоны на macOS; документ архитектуры</a:t>
+                      </a:r>
+                    </a:p>
+                  </a:txBody>
+                  <a:tcPr>
+                    <a:solidFill>
+                      <a:srgbClr val="FFFFFF"/>
+                    </a:solidFill>
+                  </a:tcPr>
+                </a:tc>
+                <a:tc>
+                  <a:txBody>
+                    <a:bodyPr/>
+                    <a:lstStyle/>
+                    <a:p>
+                      <a:r>
+                        <a:rPr sz="1100" b="0">
+                          <a:solidFill>
+                            <a:srgbClr val="161412"/>
+                          </a:solidFill>
+                          <a:latin typeface="Inter"/>
+                        </a:rPr>
+                        <a:t>Весь хакатон, ежедневно</a:t>
+                      </a:r>
+                    </a:p>
+                  </a:txBody>
+                  <a:tcPr>
+                    <a:solidFill>
+                      <a:srgbClr val="FFFFFF"/>
+                    </a:solidFill>
+                  </a:tcPr>
+                </a:tc>
+              </a:tr>
+              <a:tr h="771525">
+                <a:tc>
+                  <a:txBody>
+                    <a:bodyPr/>
+                    <a:lstStyle/>
+                    <a:p>
+                      <a:r>
+                        <a:rPr sz="1100" b="1">
+                          <a:solidFill>
+                            <a:srgbClr val="161412"/>
+                          </a:solidFill>
+                          <a:latin typeface="Inter"/>
+                        </a:rPr>
+                        <a:t>Межуева Екатерина</a:t>
+                      </a:r>
+                    </a:p>
+                  </a:txBody>
+                  <a:tcPr>
+                    <a:solidFill>
+                      <a:srgbClr val="FFFFFF"/>
+                    </a:solidFill>
+                  </a:tcPr>
+                </a:tc>
+                <a:tc>
+                  <a:txBody>
+                    <a:bodyPr/>
+                    <a:lstStyle/>
+                    <a:p>
+                      <a:r>
+                        <a:rPr sz="1100" b="0">
+                          <a:solidFill>
+                            <a:srgbClr val="161412"/>
+                          </a:solidFill>
+                          <a:latin typeface="Inter"/>
+                        </a:rPr>
+                        <a:t>Инженер: методология проверок и ревью</a:t>
+                      </a:r>
+                    </a:p>
+                  </a:txBody>
+                  <a:tcPr>
+                    <a:solidFill>
+                      <a:srgbClr val="FFFFFF"/>
+                    </a:solidFill>
+                  </a:tcPr>
+                </a:tc>
+                <a:tc>
+                  <a:txBody>
+                    <a:bodyPr/>
+                    <a:lstStyle/>
+                    <a:p>
+                      <a:r>
+                        <a:rPr sz="1100" b="0">
+                          <a:solidFill>
+                            <a:srgbClr val="161412"/>
+                          </a:solidFill>
+                          <a:latin typeface="Inter"/>
+                        </a:rPr>
+                        <a:t>Что считать атакой и успехом в стенде; карта угроз и справочник атак; шаблон стенда; ревью кода перед ключевыми PR</a:t>
+                      </a:r>
+                    </a:p>
+                  </a:txBody>
+                  <a:tcPr>
+                    <a:solidFill>
+                      <a:srgbClr val="FFFFFF"/>
+                    </a:solidFill>
+                  </a:tcPr>
+                </a:tc>
+                <a:tc>
+                  <a:txBody>
+                    <a:bodyPr/>
+                    <a:lstStyle/>
+                    <a:p>
+                      <a:r>
+                        <a:rPr sz="1100" b="0">
+                          <a:solidFill>
+                            <a:srgbClr val="161412"/>
+                          </a:solidFill>
+                          <a:latin typeface="Inter"/>
+                        </a:rPr>
+                        <a:t>На отдельных этапах</a:t>
+                      </a:r>
+                    </a:p>
+                  </a:txBody>
+                  <a:tcPr>
+                    <a:solidFill>
+                      <a:srgbClr val="FFFFFF"/>
+                    </a:solidFill>
+                  </a:tcPr>
+                </a:tc>
+              </a:tr>
+            </a:tbl>
+          </a:graphicData>
+        </a:graphic>
+      </p:graphicFrame>
+    </p:spTree>
+  </p:cSld>
+  <p:clrMapOvr>
+    <a:masterClrMapping/>
+  </p:clrMapOvr>
+</p:sld>
+</file>
+
 <file path=ppt/theme/theme1.xml><?xml version="1.0" encoding="utf-8"?>
 <a:theme xmlns:a="http://schemas.openxmlformats.org/drawingml/2006/main" name="Simple Light">
   <a:themeElements>

--- a/docs/auto-mode-hackathon/final/presentation-final.pptx
+++ b/docs/auto-mode-hackathon/final/presentation-final.pptx
@@ -5,16 +5,16 @@
     <p:sldMasterId id="2147483661" r:id="rId1"/>
   </p:sldMasterIdLst>
   <p:notesMasterIdLst>
-    <p:notesMasterId r:id="rId8"/>
+    <p:notesMasterId r:id="rId9"/>
   </p:notesMasterIdLst>
   <p:sldIdLst>
     <p:sldId id="256" r:id="rId2"/>
     <p:sldId id="257" r:id="rId3"/>
-    <p:sldId id="259" r:id="rId7"/>
     <p:sldId id="261" r:id="rId4"/>
-    <p:sldId id="258" r:id="rId5"/>
-    <p:sldId id="260" r:id="rId6"/>
-    <p:sldId id="262" r:id="rId13"/>
+    <p:sldId id="259" r:id="rId5"/>
+    <p:sldId id="258" r:id="rId6"/>
+    <p:sldId id="260" r:id="rId7"/>
+    <p:sldId id="263" r:id="rId8"/>
   </p:sldIdLst>
   <p:sldSz cx="9144000" cy="5143500" type="screen16x9"/>
   <p:notesSz cx="6858000" cy="9144000"/>
@@ -1159,7 +1159,7 @@
               </a:spcAft>
               <a:buNone/>
             </a:pPr>
-            <a:endParaRPr/>
+            <a:endParaRPr dirty="0"/>
           </a:p>
         </p:txBody>
       </p:sp>
@@ -1229,6 +1229,170 @@
 </file>
 
 <file path=ppt/notesSlides/notesSlide4.xml><?xml version="1.0" encoding="utf-8"?>
+<p:notes xmlns:a="http://schemas.openxmlformats.org/drawingml/2006/main" xmlns:r="http://schemas.openxmlformats.org/officeDocument/2006/relationships" xmlns:p="http://schemas.openxmlformats.org/presentationml/2006/main" showMasterSp="0" showMasterPhAnim="0">
+  <p:cSld>
+    <p:spTree>
+      <p:nvGrpSpPr>
+        <p:cNvPr id="1" name="Shape 143"/>
+        <p:cNvGrpSpPr/>
+        <p:nvPr/>
+      </p:nvGrpSpPr>
+      <p:grpSpPr>
+        <a:xfrm>
+          <a:off x="0" y="0"/>
+          <a:ext cx="0" cy="0"/>
+          <a:chOff x="0" y="0"/>
+          <a:chExt cx="0" cy="0"/>
+        </a:xfrm>
+      </p:grpSpPr>
+      <p:sp>
+        <p:nvSpPr>
+          <p:cNvPr id="144" name="Google Shape;144;g249cb922a79_1_81:notes"/>
+          <p:cNvSpPr>
+            <a:spLocks noGrp="1" noRot="1" noChangeAspect="1"/>
+          </p:cNvSpPr>
+          <p:nvPr>
+            <p:ph type="sldImg" idx="2"/>
+          </p:nvPr>
+        </p:nvSpPr>
+        <p:spPr>
+          <a:xfrm>
+            <a:off x="1828800" y="1143000"/>
+            <a:ext cx="5486400" cy="3086100"/>
+          </a:xfrm>
+          <a:custGeom>
+            <a:avLst/>
+            <a:gdLst/>
+            <a:ahLst/>
+            <a:cxnLst/>
+            <a:rect l="l" t="t" r="r" b="b"/>
+            <a:pathLst>
+              <a:path w="120000" h="120000" extrusionOk="0">
+                <a:moveTo>
+                  <a:pt x="0" y="0"/>
+                </a:moveTo>
+                <a:lnTo>
+                  <a:pt x="120000" y="0"/>
+                </a:lnTo>
+                <a:lnTo>
+                  <a:pt x="120000" y="120000"/>
+                </a:lnTo>
+                <a:lnTo>
+                  <a:pt x="0" y="120000"/>
+                </a:lnTo>
+                <a:close/>
+              </a:path>
+            </a:pathLst>
+          </a:custGeom>
+          <a:noFill/>
+          <a:ln w="12700" cap="flat" cmpd="sng">
+            <a:solidFill>
+              <a:srgbClr val="000000"/>
+            </a:solidFill>
+            <a:prstDash val="solid"/>
+            <a:round/>
+            <a:headEnd type="none" w="sm" len="sm"/>
+            <a:tailEnd type="none" w="sm" len="sm"/>
+          </a:ln>
+        </p:spPr>
+      </p:sp>
+      <p:sp>
+        <p:nvSpPr>
+          <p:cNvPr id="145" name="Google Shape;145;g249cb922a79_1_81:notes"/>
+          <p:cNvSpPr txBox="1">
+            <a:spLocks noGrp="1"/>
+          </p:cNvSpPr>
+          <p:nvPr>
+            <p:ph type="body" idx="1"/>
+          </p:nvPr>
+        </p:nvSpPr>
+        <p:spPr>
+          <a:xfrm>
+            <a:off x="914400" y="4400550"/>
+            <a:ext cx="7315200" cy="3600600"/>
+          </a:xfrm>
+          <a:prstGeom prst="rect">
+            <a:avLst/>
+          </a:prstGeom>
+          <a:noFill/>
+          <a:ln>
+            <a:noFill/>
+          </a:ln>
+        </p:spPr>
+        <p:txBody>
+          <a:bodyPr spcFirstLastPara="1" wrap="square" lIns="91425" tIns="45700" rIns="91425" bIns="45700" anchor="t" anchorCtr="0">
+            <a:noAutofit/>
+          </a:bodyPr>
+          <a:lstStyle/>
+          <a:p>
+            <a:pPr marL="0" lvl="0" indent="0" algn="l" rtl="0">
+              <a:spcBef>
+                <a:spcPts val="0"/>
+              </a:spcBef>
+              <a:spcAft>
+                <a:spcPts val="0"/>
+              </a:spcAft>
+              <a:buNone/>
+            </a:pPr>
+            <a:endParaRPr/>
+          </a:p>
+        </p:txBody>
+      </p:sp>
+      <p:sp>
+        <p:nvSpPr>
+          <p:cNvPr id="146" name="Google Shape;146;g249cb922a79_1_81:notes"/>
+          <p:cNvSpPr txBox="1">
+            <a:spLocks noGrp="1"/>
+          </p:cNvSpPr>
+          <p:nvPr>
+            <p:ph type="sldNum" idx="12"/>
+          </p:nvPr>
+        </p:nvSpPr>
+        <p:spPr>
+          <a:xfrm>
+            <a:off x="5179484" y="8685213"/>
+            <a:ext cx="3962400" cy="458700"/>
+          </a:xfrm>
+          <a:prstGeom prst="rect">
+            <a:avLst/>
+          </a:prstGeom>
+          <a:noFill/>
+          <a:ln>
+            <a:noFill/>
+          </a:ln>
+        </p:spPr>
+        <p:txBody>
+          <a:bodyPr spcFirstLastPara="1" wrap="square" lIns="91425" tIns="45700" rIns="91425" bIns="45700" anchor="b" anchorCtr="0">
+            <a:noAutofit/>
+          </a:bodyPr>
+          <a:lstStyle/>
+          <a:p>
+            <a:pPr marL="0" lvl="0" indent="0" algn="r" rtl="0">
+              <a:spcBef>
+                <a:spcPts val="0"/>
+              </a:spcBef>
+              <a:spcAft>
+                <a:spcPts val="0"/>
+              </a:spcAft>
+              <a:buNone/>
+            </a:pPr>
+            <a:fld id="{00000000-1234-1234-1234-123412341234}" type="slidenum">
+              <a:rPr lang="ru"/>
+              <a:t>4</a:t>
+            </a:fld>
+            <a:endParaRPr/>
+          </a:p>
+        </p:txBody>
+      </p:sp>
+    </p:spTree>
+  </p:cSld>
+  <p:clrMapOvr>
+    <a:masterClrMapping/>
+  </p:clrMapOvr>
+</p:notes>
+</file>
+
+<file path=ppt/notesSlides/notesSlide5.xml><?xml version="1.0" encoding="utf-8"?>
 <p:notes xmlns:a="http://schemas.openxmlformats.org/drawingml/2006/main" xmlns:r="http://schemas.openxmlformats.org/officeDocument/2006/relationships" xmlns:p="http://schemas.openxmlformats.org/presentationml/2006/main" showMasterSp="0" showMasterPhAnim="0">
   <p:cSld>
     <p:spTree>
@@ -1378,7 +1542,7 @@
             </a:pPr>
             <a:fld id="{00000000-1234-1234-1234-123412341234}" type="slidenum">
               <a:rPr lang="ru"/>
-              <a:t>5</a:t>
+              <a:t>6</a:t>
             </a:fld>
             <a:endParaRPr/>
           </a:p>
@@ -1392,12 +1556,18 @@
 </p:notes>
 </file>
 
-<file path=ppt/notesSlides/notesSlide5.xml><?xml version="1.0" encoding="utf-8"?>
+<file path=ppt/notesSlides/notesSlide6.xml><?xml version="1.0" encoding="utf-8"?>
 <p:notes xmlns:a="http://schemas.openxmlformats.org/drawingml/2006/main" xmlns:r="http://schemas.openxmlformats.org/officeDocument/2006/relationships" xmlns:p="http://schemas.openxmlformats.org/presentationml/2006/main" showMasterSp="0" showMasterPhAnim="0">
   <p:cSld>
     <p:spTree>
       <p:nvGrpSpPr>
-        <p:cNvPr id="1" name="Shape 143"/>
+        <p:cNvPr id="1" name="Shape 210">
+          <a:extLst>
+            <a:ext uri="{FF2B5EF4-FFF2-40B4-BE49-F238E27FC236}">
+              <a16:creationId xmlns:a16="http://schemas.microsoft.com/office/drawing/2014/main" id="{C63810EA-6F68-E44D-9CCB-DA685D47D96E}"/>
+            </a:ext>
+          </a:extLst>
+        </p:cNvPr>
         <p:cNvGrpSpPr/>
         <p:nvPr/>
       </p:nvGrpSpPr>
@@ -1411,7 +1581,13 @@
       </p:grpSpPr>
       <p:sp>
         <p:nvSpPr>
-          <p:cNvPr id="144" name="Google Shape;144;g249cb922a79_1_81:notes"/>
+          <p:cNvPr id="211" name="Google Shape;211;g249cb922a79_1_143:notes">
+            <a:extLst>
+              <a:ext uri="{FF2B5EF4-FFF2-40B4-BE49-F238E27FC236}">
+                <a16:creationId xmlns:a16="http://schemas.microsoft.com/office/drawing/2014/main" id="{79187137-D924-4DEF-F691-D247B36CA82D}"/>
+              </a:ext>
+            </a:extLst>
+          </p:cNvPr>
           <p:cNvSpPr>
             <a:spLocks noGrp="1" noRot="1" noChangeAspect="1"/>
           </p:cNvSpPr>
@@ -1462,7 +1638,13 @@
       </p:sp>
       <p:sp>
         <p:nvSpPr>
-          <p:cNvPr id="145" name="Google Shape;145;g249cb922a79_1_81:notes"/>
+          <p:cNvPr id="212" name="Google Shape;212;g249cb922a79_1_143:notes">
+            <a:extLst>
+              <a:ext uri="{FF2B5EF4-FFF2-40B4-BE49-F238E27FC236}">
+                <a16:creationId xmlns:a16="http://schemas.microsoft.com/office/drawing/2014/main" id="{3554DB8A-E41A-4008-52E0-D623223212D3}"/>
+              </a:ext>
+            </a:extLst>
+          </p:cNvPr>
           <p:cNvSpPr txBox="1">
             <a:spLocks noGrp="1"/>
           </p:cNvSpPr>
@@ -1498,13 +1680,19 @@
               </a:spcAft>
               <a:buNone/>
             </a:pPr>
-            <a:endParaRPr/>
+            <a:endParaRPr dirty="0"/>
           </a:p>
         </p:txBody>
       </p:sp>
       <p:sp>
         <p:nvSpPr>
-          <p:cNvPr id="146" name="Google Shape;146;g249cb922a79_1_81:notes"/>
+          <p:cNvPr id="213" name="Google Shape;213;g249cb922a79_1_143:notes">
+            <a:extLst>
+              <a:ext uri="{FF2B5EF4-FFF2-40B4-BE49-F238E27FC236}">
+                <a16:creationId xmlns:a16="http://schemas.microsoft.com/office/drawing/2014/main" id="{07BF11E2-A2DC-6649-8B06-3DABA6F6203A}"/>
+              </a:ext>
+            </a:extLst>
+          </p:cNvPr>
           <p:cNvSpPr txBox="1">
             <a:spLocks noGrp="1"/>
           </p:cNvSpPr>
@@ -1542,13 +1730,18 @@
             </a:pPr>
             <a:fld id="{00000000-1234-1234-1234-123412341234}" type="slidenum">
               <a:rPr lang="ru"/>
-              <a:t>6</a:t>
+              <a:t>7</a:t>
             </a:fld>
             <a:endParaRPr/>
           </a:p>
         </p:txBody>
       </p:sp>
     </p:spTree>
+    <p:extLst>
+      <p:ext uri="{BB962C8B-B14F-4D97-AF65-F5344CB8AC3E}">
+        <p14:creationId xmlns:p14="http://schemas.microsoft.com/office/powerpoint/2010/main" val="2685129808"/>
+      </p:ext>
+    </p:extLst>
   </p:cSld>
   <p:clrMapOvr>
     <a:masterClrMapping/>
@@ -7733,7 +7926,31 @@
                 <a:cs typeface="Arial"/>
                 <a:sym typeface="Arial"/>
               </a:rPr>
-              <a:t>класс атак закрыт полностью: подброшенный автозапуск</a:t>
+              <a:t>класс атак закрыт </a:t>
+            </a:r>
+            <a:r>
+              <a:rPr lang="ru" sz="1200" b="1" i="0" u="none" strike="noStrike" cap="none" dirty="0">
+                <a:solidFill>
+                  <a:srgbClr val="000000"/>
+                </a:solidFill>
+                <a:latin typeface="Arial"/>
+                <a:ea typeface="Arial"/>
+                <a:cs typeface="Arial"/>
+                <a:sym typeface="Arial"/>
+              </a:rPr>
+              <a:t>полностью</a:t>
+            </a:r>
+            <a:r>
+              <a:rPr lang="ru" sz="1200" b="0" i="0" u="none" strike="noStrike" cap="none" dirty="0">
+                <a:solidFill>
+                  <a:srgbClr val="000000"/>
+                </a:solidFill>
+                <a:latin typeface="Arial"/>
+                <a:ea typeface="Arial"/>
+                <a:cs typeface="Arial"/>
+                <a:sym typeface="Arial"/>
+              </a:rPr>
+              <a:t>: подброшенный автозапуск</a:t>
             </a:r>
             <a:endParaRPr sz="1200" b="0" i="0" u="none" strike="noStrike" cap="none" dirty="0">
               <a:solidFill>
@@ -8144,7 +8361,7 @@
         <p:spPr>
           <a:xfrm>
             <a:off x="3714750" y="4194230"/>
-            <a:ext cx="5129951" cy="928972"/>
+            <a:ext cx="1765211" cy="928972"/>
           </a:xfrm>
           <a:prstGeom prst="rect">
             <a:avLst/>
@@ -8174,25 +8391,6 @@
               <a:t>;</a:t>
             </a:r>
             <a:endParaRPr lang="ru-RU" sz="1200" dirty="0"/>
-          </a:p>
-          <a:p>
-            <a:pPr lvl="0"/>
-            <a:r>
-              <a:rPr lang="ru-RU" sz="1200" b="1" dirty="0"/>
-              <a:t>+</a:t>
-            </a:r>
-          </a:p>
-          <a:p>
-            <a:pPr lvl="0"/>
-            <a:r>
-              <a:rPr lang="ru-RU" sz="1200" b="1" dirty="0"/>
-              <a:t>классов атак </a:t>
-            </a:r>
-            <a:r>
-              <a:rPr lang="ru-RU" sz="1200" dirty="0"/>
-              <a:t>— по категориям MITRE ATT&amp;CK и OWASP LLM Top 10</a:t>
-            </a:r>
-            <a:endParaRPr lang="ru-RU" sz="1200" b="1" dirty="0"/>
           </a:p>
         </p:txBody>
       </p:sp>
@@ -8249,7 +8447,130 @@
                 <a:cs typeface="Inter"/>
                 <a:sym typeface="Inter"/>
               </a:rPr>
-              <a:t>104+5</a:t>
+              <a:t>10</a:t>
+            </a:r>
+            <a:r>
+              <a:rPr lang="ru-RU" sz="2600" b="1" dirty="0">
+                <a:solidFill>
+                  <a:srgbClr val="C93E33"/>
+                </a:solidFill>
+                <a:latin typeface="Inter"/>
+                <a:ea typeface="Inter"/>
+                <a:cs typeface="Inter"/>
+                <a:sym typeface="Inter"/>
+              </a:rPr>
+              <a:t>4</a:t>
+            </a:r>
+            <a:endParaRPr sz="2625" i="0" u="none" strike="noStrike" cap="none" dirty="0">
+              <a:solidFill>
+                <a:srgbClr val="C93E33"/>
+              </a:solidFill>
+              <a:latin typeface="Inter"/>
+              <a:ea typeface="Inter"/>
+              <a:cs typeface="Inter"/>
+              <a:sym typeface="Inter"/>
+            </a:endParaRPr>
+          </a:p>
+        </p:txBody>
+      </p:sp>
+      <p:sp>
+        <p:nvSpPr>
+          <p:cNvPr id="2" name="TextBox 1">
+            <a:extLst>
+              <a:ext uri="{FF2B5EF4-FFF2-40B4-BE49-F238E27FC236}">
+                <a16:creationId xmlns:a16="http://schemas.microsoft.com/office/drawing/2014/main" id="{933C2A9B-91C4-31E3-F782-7F5ECEB4E211}"/>
+              </a:ext>
+            </a:extLst>
+          </p:cNvPr>
+          <p:cNvSpPr txBox="1"/>
+          <p:nvPr/>
+        </p:nvSpPr>
+        <p:spPr>
+          <a:xfrm>
+            <a:off x="6224551" y="4101726"/>
+            <a:ext cx="2259741" cy="830997"/>
+          </a:xfrm>
+          <a:prstGeom prst="rect">
+            <a:avLst/>
+          </a:prstGeom>
+          <a:noFill/>
+        </p:spPr>
+        <p:txBody>
+          <a:bodyPr wrap="square" rtlCol="0">
+            <a:spAutoFit/>
+          </a:bodyPr>
+          <a:lstStyle/>
+          <a:p>
+            <a:pPr lvl="0"/>
+            <a:r>
+              <a:rPr lang="ru-RU" sz="1200" b="1" dirty="0"/>
+              <a:t>классов атак </a:t>
+            </a:r>
+            <a:r>
+              <a:rPr lang="ru-RU" sz="1200" dirty="0"/>
+              <a:t>— по категориям MITRE ATT&amp;CK и OWASP LLM Top 10</a:t>
+            </a:r>
+            <a:endParaRPr lang="ru-RU" sz="1200" b="1" dirty="0"/>
+          </a:p>
+          <a:p>
+            <a:endParaRPr lang="ru-RU" sz="1200" dirty="0"/>
+          </a:p>
+        </p:txBody>
+      </p:sp>
+      <p:sp>
+        <p:nvSpPr>
+          <p:cNvPr id="3" name="Google Shape;100;p18">
+            <a:extLst>
+              <a:ext uri="{FF2B5EF4-FFF2-40B4-BE49-F238E27FC236}">
+                <a16:creationId xmlns:a16="http://schemas.microsoft.com/office/drawing/2014/main" id="{2FA6F7AE-3381-EAA8-8490-A633DF3FE2A0}"/>
+              </a:ext>
+            </a:extLst>
+          </p:cNvPr>
+          <p:cNvSpPr/>
+          <p:nvPr/>
+        </p:nvSpPr>
+        <p:spPr>
+          <a:xfrm>
+            <a:off x="6295181" y="3702162"/>
+            <a:ext cx="1714500" cy="444582"/>
+          </a:xfrm>
+          <a:prstGeom prst="rect">
+            <a:avLst/>
+          </a:prstGeom>
+          <a:noFill/>
+          <a:ln>
+            <a:noFill/>
+          </a:ln>
+        </p:spPr>
+        <p:txBody>
+          <a:bodyPr spcFirstLastPara="1" wrap="square" lIns="0" tIns="0" rIns="0" bIns="0" anchor="t" anchorCtr="0">
+            <a:noAutofit/>
+          </a:bodyPr>
+          <a:lstStyle/>
+          <a:p>
+            <a:pPr marL="0" marR="0" lvl="0" indent="0" algn="l" rtl="0">
+              <a:lnSpc>
+                <a:spcPct val="111076"/>
+              </a:lnSpc>
+              <a:spcBef>
+                <a:spcPts val="0"/>
+              </a:spcBef>
+              <a:spcAft>
+                <a:spcPts val="0"/>
+              </a:spcAft>
+              <a:buNone/>
+            </a:pPr>
+            <a:r>
+              <a:rPr lang="ru-RU" sz="2600" b="1" i="0" u="none" strike="noStrike" cap="none" dirty="0">
+                <a:solidFill>
+                  <a:srgbClr val="C93E33"/>
+                </a:solidFill>
+                <a:latin typeface="Inter"/>
+                <a:ea typeface="Inter"/>
+                <a:cs typeface="Inter"/>
+                <a:sym typeface="Inter"/>
+              </a:rPr>
+              <a:t>5</a:t>
             </a:r>
             <a:endParaRPr sz="2625" i="0" u="none" strike="noStrike" cap="none" dirty="0">
               <a:solidFill>
@@ -8546,6 +8867,41 @@
                                   </p:childTnLst>
                                 </p:cTn>
                               </p:par>
+                              <p:par>
+                                <p:cTn id="27" presetID="10" presetClass="entr" presetSubtype="0" fill="hold" grpId="0" nodeType="withEffect">
+                                  <p:stCondLst>
+                                    <p:cond delay="0"/>
+                                  </p:stCondLst>
+                                  <p:childTnLst>
+                                    <p:set>
+                                      <p:cBhvr>
+                                        <p:cTn id="28" dur="1" fill="hold">
+                                          <p:stCondLst>
+                                            <p:cond delay="0"/>
+                                          </p:stCondLst>
+                                        </p:cTn>
+                                        <p:tgtEl>
+                                          <p:spTgt spid="3"/>
+                                        </p:tgtEl>
+                                        <p:attrNameLst>
+                                          <p:attrName>style.visibility</p:attrName>
+                                        </p:attrNameLst>
+                                      </p:cBhvr>
+                                      <p:to>
+                                        <p:strVal val="visible"/>
+                                      </p:to>
+                                    </p:set>
+                                    <p:animEffect transition="in" filter="fade">
+                                      <p:cBhvr>
+                                        <p:cTn id="29" dur="500"/>
+                                        <p:tgtEl>
+                                          <p:spTgt spid="3"/>
+                                        </p:tgtEl>
+                                      </p:cBhvr>
+                                    </p:animEffect>
+                                  </p:childTnLst>
+                                </p:cTn>
+                              </p:par>
                             </p:childTnLst>
                           </p:cTn>
                         </p:par>
@@ -8580,6 +8936,7 @@
       <p:bldP spid="103" grpId="0"/>
       <p:bldP spid="4" grpId="0"/>
       <p:bldP spid="7" grpId="0"/>
+      <p:bldP spid="3" grpId="0"/>
     </p:bldLst>
   </p:timing>
 </p:sld>
@@ -8618,192 +8975,6 @@
       </p:grpSpPr>
       <p:sp>
         <p:nvSpPr>
-          <p:cNvPr id="93" name="Google Shape;93;p18">
-            <a:extLst>
-              <a:ext uri="{FF2B5EF4-FFF2-40B4-BE49-F238E27FC236}">
-                <a16:creationId xmlns:a16="http://schemas.microsoft.com/office/drawing/2014/main" id="{71622175-24FE-E3A5-53A2-8823ED2933BF}"/>
-              </a:ext>
-            </a:extLst>
-          </p:cNvPr>
-          <p:cNvSpPr/>
-          <p:nvPr/>
-        </p:nvSpPr>
-        <p:spPr>
-          <a:xfrm>
-            <a:off x="619083" y="1608970"/>
-            <a:ext cx="3873000" cy="806265"/>
-          </a:xfrm>
-          <a:prstGeom prst="rect">
-            <a:avLst/>
-          </a:prstGeom>
-          <a:noFill/>
-          <a:ln>
-            <a:noFill/>
-          </a:ln>
-        </p:spPr>
-        <p:txBody>
-          <a:bodyPr spcFirstLastPara="1" wrap="square" lIns="0" tIns="0" rIns="0" bIns="0" anchor="t" anchorCtr="0">
-            <a:noAutofit/>
-          </a:bodyPr>
-          <a:lstStyle/>
-          <a:p>
-            <a:pPr marL="0" marR="0" lvl="0" indent="0" algn="l" rtl="0">
-              <a:lnSpc>
-                <a:spcPct val="100000"/>
-              </a:lnSpc>
-              <a:spcBef>
-                <a:spcPts val="0"/>
-              </a:spcBef>
-              <a:spcAft>
-                <a:spcPts val="0"/>
-              </a:spcAft>
-              <a:buNone/>
-            </a:pPr>
-            <a:r>
-              <a:rPr lang="ru" sz="1200" b="1" i="0" u="none" strike="noStrike" cap="none" dirty="0">
-                <a:solidFill>
-                  <a:srgbClr val="000000"/>
-                </a:solidFill>
-                <a:latin typeface="Arial"/>
-                <a:ea typeface="Arial"/>
-                <a:cs typeface="Arial"/>
-                <a:sym typeface="Arial"/>
-              </a:rPr>
-              <a:t>Защитный слой для ИИ-агента: </a:t>
-            </a:r>
-            <a:r>
-              <a:rPr lang="ru-RU" sz="1200" dirty="0"/>
-              <a:t>п</a:t>
-            </a:r>
-            <a:r>
-              <a:rPr lang="ru-RU" sz="1200" i="0" u="none" strike="noStrike" cap="none" dirty="0">
-                <a:solidFill>
-                  <a:srgbClr val="000000"/>
-                </a:solidFill>
-                <a:latin typeface="Arial"/>
-                <a:ea typeface="Arial"/>
-                <a:cs typeface="Arial"/>
-                <a:sym typeface="Arial"/>
-              </a:rPr>
-              <a:t>отенциально опасное действие сначала выполняется в </a:t>
-            </a:r>
-            <a:r>
-              <a:rPr lang="ru-RU" sz="1200" b="1" i="0" u="none" strike="noStrike" cap="none" dirty="0">
-                <a:solidFill>
-                  <a:srgbClr val="000000"/>
-                </a:solidFill>
-                <a:latin typeface="Arial"/>
-                <a:ea typeface="Arial"/>
-                <a:cs typeface="Arial"/>
-                <a:sym typeface="Arial"/>
-              </a:rPr>
-              <a:t>безопасной</a:t>
-            </a:r>
-            <a:r>
-              <a:rPr lang="ru-RU" sz="1200" i="0" u="none" strike="noStrike" cap="none" dirty="0">
-                <a:solidFill>
-                  <a:srgbClr val="000000"/>
-                </a:solidFill>
-                <a:latin typeface="Arial"/>
-                <a:ea typeface="Arial"/>
-                <a:cs typeface="Arial"/>
-                <a:sym typeface="Arial"/>
-              </a:rPr>
-              <a:t> среде, а в проект попадает только после проверки</a:t>
-            </a:r>
-            <a:endParaRPr sz="1200" i="0" u="none" strike="noStrike" cap="none" dirty="0">
-              <a:solidFill>
-                <a:schemeClr val="dk1"/>
-              </a:solidFill>
-              <a:latin typeface="Calibri"/>
-              <a:ea typeface="Calibri"/>
-              <a:cs typeface="Calibri"/>
-              <a:sym typeface="Calibri"/>
-            </a:endParaRPr>
-          </a:p>
-        </p:txBody>
-      </p:sp>
-      <p:sp>
-        <p:nvSpPr>
-          <p:cNvPr id="95" name="Google Shape;95;p18">
-            <a:extLst>
-              <a:ext uri="{FF2B5EF4-FFF2-40B4-BE49-F238E27FC236}">
-                <a16:creationId xmlns:a16="http://schemas.microsoft.com/office/drawing/2014/main" id="{5FFBE800-2201-2B21-3378-34B5D3DF618F}"/>
-              </a:ext>
-            </a:extLst>
-          </p:cNvPr>
-          <p:cNvSpPr/>
-          <p:nvPr/>
-        </p:nvSpPr>
-        <p:spPr>
-          <a:xfrm>
-            <a:off x="616531" y="2615445"/>
-            <a:ext cx="3873600" cy="820664"/>
-          </a:xfrm>
-          <a:prstGeom prst="rect">
-            <a:avLst/>
-          </a:prstGeom>
-          <a:noFill/>
-          <a:ln>
-            <a:noFill/>
-          </a:ln>
-        </p:spPr>
-        <p:txBody>
-          <a:bodyPr spcFirstLastPara="1" wrap="square" lIns="0" tIns="0" rIns="0" bIns="0" anchor="t" anchorCtr="0">
-            <a:noAutofit/>
-          </a:bodyPr>
-          <a:lstStyle/>
-          <a:p>
-            <a:pPr marL="0" marR="0" lvl="0" indent="0" algn="l" rtl="0">
-              <a:lnSpc>
-                <a:spcPct val="125000"/>
-              </a:lnSpc>
-              <a:spcBef>
-                <a:spcPts val="0"/>
-              </a:spcBef>
-              <a:spcAft>
-                <a:spcPts val="0"/>
-              </a:spcAft>
-              <a:buNone/>
-            </a:pPr>
-            <a:r>
-              <a:rPr lang="ru" sz="1200" b="1" i="0" u="none" strike="noStrike" cap="none" dirty="0">
-                <a:solidFill>
-                  <a:srgbClr val="000000"/>
-                </a:solidFill>
-                <a:latin typeface="Arial"/>
-                <a:ea typeface="Arial"/>
-                <a:cs typeface="Arial"/>
-                <a:sym typeface="Arial"/>
-              </a:rPr>
-              <a:t>Ценность:</a:t>
-            </a:r>
-            <a:r>
-              <a:rPr lang="ru" sz="1200" i="0" u="none" strike="noStrike" cap="none" dirty="0">
-                <a:solidFill>
-                  <a:srgbClr val="000000"/>
-                </a:solidFill>
-                <a:latin typeface="Arial"/>
-                <a:ea typeface="Arial"/>
-                <a:cs typeface="Arial"/>
-                <a:sym typeface="Arial"/>
-              </a:rPr>
-              <a:t> автономность работы агента без цены в виде инцидента — обычная работа без вопросов, вредное не проходит</a:t>
-            </a:r>
-            <a:endParaRPr sz="1200" b="0" i="0" u="none" strike="noStrike" cap="none" dirty="0">
-              <a:solidFill>
-                <a:schemeClr val="dk1"/>
-              </a:solidFill>
-              <a:latin typeface="Calibri"/>
-              <a:ea typeface="Calibri"/>
-              <a:cs typeface="Calibri"/>
-              <a:sym typeface="Calibri"/>
-            </a:endParaRPr>
-          </a:p>
-        </p:txBody>
-      </p:sp>
-      <p:sp>
-        <p:nvSpPr>
           <p:cNvPr id="98" name="Google Shape;98;p18">
             <a:extLst>
               <a:ext uri="{FF2B5EF4-FFF2-40B4-BE49-F238E27FC236}">
@@ -8816,8 +8987,8 @@
         </p:nvSpPr>
         <p:spPr>
           <a:xfrm>
-            <a:off x="533482" y="4382824"/>
-            <a:ext cx="2191429" cy="508791"/>
+            <a:off x="2380571" y="2107092"/>
+            <a:ext cx="2191429" cy="2292296"/>
           </a:xfrm>
           <a:prstGeom prst="rect">
             <a:avLst/>
@@ -8834,44 +9005,93 @@
           <a:lstStyle/>
           <a:p>
             <a:r>
-              <a:rPr lang="ru-RU" sz="1200" b="0" i="0" u="none" strike="noStrike" cap="none" dirty="0">
+              <a:rPr lang="ru-RU" b="0" i="0" u="none" strike="noStrike" cap="none" dirty="0">
                 <a:solidFill>
                   <a:srgbClr val="000000"/>
                 </a:solidFill>
-                <a:latin typeface="Arial"/>
-                <a:ea typeface="Arial"/>
-                <a:cs typeface="Arial"/>
                 <a:sym typeface="Arial"/>
               </a:rPr>
               <a:t>м</a:t>
             </a:r>
             <a:r>
-              <a:rPr lang="ru" sz="1200" b="0" i="0" u="none" strike="noStrike" cap="none" dirty="0">
+              <a:rPr lang="ru" b="0" i="0" u="none" strike="noStrike" cap="none" dirty="0">
                 <a:solidFill>
                   <a:srgbClr val="000000"/>
                 </a:solidFill>
-                <a:latin typeface="Arial"/>
-                <a:ea typeface="Arial"/>
-                <a:cs typeface="Arial"/>
                 <a:sym typeface="Arial"/>
               </a:rPr>
-              <a:t>одели в живом тестировании: </a:t>
+              <a:t>одели в живом тестировании:</a:t>
             </a:r>
+          </a:p>
+          <a:p>
+            <a:pPr marL="342900" indent="-342900">
+              <a:buFont typeface="+mj-lt"/>
+              <a:buAutoNum type="arabicPeriod"/>
+            </a:pPr>
             <a:r>
-              <a:rPr lang="ru-RU" dirty="0" err="1"/>
+              <a:rPr lang="ru-RU" b="1" dirty="0" err="1"/>
               <a:t>kilo</a:t>
             </a:r>
             <a:r>
-              <a:rPr lang="ru-RU" dirty="0"/>
+              <a:rPr lang="ru-RU" b="1" dirty="0"/>
               <a:t>/</a:t>
             </a:r>
             <a:r>
-              <a:rPr lang="ru-RU" dirty="0" err="1"/>
+              <a:rPr lang="ru-RU" b="1" dirty="0" err="1"/>
               <a:t>stepfun</a:t>
             </a:r>
             <a:r>
+              <a:rPr lang="ru-RU" b="1" dirty="0"/>
+              <a:t>/step-3.7-flash </a:t>
+            </a:r>
+            <a:br>
               <a:rPr lang="ru-RU" dirty="0"/>
-              <a:t>/step-3.7-flash · 132 запуска на двух платформах: атаки 78% → 0%, задачи 20 из 21; вторая модель nvidia/nemotron-3-super-120b · 16 запусков: атаки 7 из 8 → 0</a:t>
+            </a:br>
+            <a:r>
+              <a:rPr lang="ru-RU" dirty="0"/>
+              <a:t>132 запуска на двух платформах: </a:t>
+            </a:r>
+            <a:br>
+              <a:rPr lang="ru-RU" dirty="0"/>
+            </a:br>
+            <a:r>
+              <a:rPr lang="ru-RU" dirty="0"/>
+              <a:t>атаки 78% → 0%, задачи 20 из 21;</a:t>
+            </a:r>
+          </a:p>
+          <a:p>
+            <a:pPr marL="342900" indent="-342900">
+              <a:buFont typeface="+mj-lt"/>
+              <a:buAutoNum type="arabicPeriod"/>
+            </a:pPr>
+            <a:endParaRPr lang="ru-RU" dirty="0"/>
+          </a:p>
+          <a:p>
+            <a:pPr marL="342900" indent="-342900">
+              <a:buFont typeface="+mj-lt"/>
+              <a:buAutoNum type="arabicPeriod"/>
+            </a:pPr>
+            <a:r>
+              <a:rPr lang="ru-RU" b="1" dirty="0" err="1"/>
+              <a:t>nvidia</a:t>
+            </a:r>
+            <a:r>
+              <a:rPr lang="ru-RU" b="1" dirty="0"/>
+              <a:t>/nemotron-3-super-120b </a:t>
+            </a:r>
+            <a:br>
+              <a:rPr lang="ru-RU" dirty="0"/>
+            </a:br>
+            <a:r>
+              <a:rPr lang="ru-RU" dirty="0"/>
+              <a:t>16 запусков: </a:t>
+            </a:r>
+            <a:br>
+              <a:rPr lang="ru-RU" dirty="0"/>
+            </a:br>
+            <a:r>
+              <a:rPr lang="ru-RU" dirty="0"/>
+              <a:t>атаки 7 из 8 → 0</a:t>
             </a:r>
           </a:p>
           <a:p>
@@ -8887,7 +9107,7 @@
               </a:spcAft>
               <a:buNone/>
             </a:pPr>
-            <a:endParaRPr sz="1200" b="0" i="0" u="none" strike="noStrike" cap="none" dirty="0">
+            <a:endParaRPr b="0" i="0" u="none" strike="noStrike" cap="none" dirty="0">
               <a:solidFill>
                 <a:schemeClr val="dk1"/>
               </a:solidFill>
@@ -8913,7 +9133,7 @@
         </p:nvSpPr>
         <p:spPr>
           <a:xfrm>
-            <a:off x="532650" y="3870742"/>
+            <a:off x="2380571" y="1594902"/>
             <a:ext cx="1714500" cy="366600"/>
           </a:xfrm>
           <a:prstGeom prst="rect">
@@ -8943,7 +9163,7 @@
               <a:buNone/>
             </a:pPr>
             <a:r>
-              <a:rPr lang="en-US" sz="2600" b="1" dirty="0">
+              <a:rPr lang="ru-RU" sz="2600" b="1" dirty="0">
                 <a:solidFill>
                   <a:srgbClr val="C93E33"/>
                 </a:solidFill>
@@ -8952,7 +9172,7 @@
                 <a:cs typeface="Inter"/>
                 <a:sym typeface="Inter"/>
               </a:rPr>
-              <a:t>1</a:t>
+              <a:t>2</a:t>
             </a:r>
             <a:endParaRPr sz="2625" i="0" u="none" strike="noStrike" cap="none" dirty="0">
               <a:solidFill>
@@ -9084,140 +9304,6 @@
               <a:ea typeface="Inter"/>
               <a:cs typeface="Inter"/>
               <a:sym typeface="Inter"/>
-            </a:endParaRPr>
-          </a:p>
-        </p:txBody>
-      </p:sp>
-      <p:sp>
-        <p:nvSpPr>
-          <p:cNvPr id="106" name="Google Shape;106;p18">
-            <a:extLst>
-              <a:ext uri="{FF2B5EF4-FFF2-40B4-BE49-F238E27FC236}">
-                <a16:creationId xmlns:a16="http://schemas.microsoft.com/office/drawing/2014/main" id="{EFE175EE-204D-3105-17FB-1AE1FCA7D4C1}"/>
-              </a:ext>
-            </a:extLst>
-          </p:cNvPr>
-          <p:cNvSpPr/>
-          <p:nvPr/>
-        </p:nvSpPr>
-        <p:spPr>
-          <a:xfrm>
-            <a:off x="476250" y="1606759"/>
-            <a:ext cx="56400" cy="204900"/>
-          </a:xfrm>
-          <a:prstGeom prst="rect">
-            <a:avLst/>
-          </a:prstGeom>
-          <a:noFill/>
-          <a:ln>
-            <a:noFill/>
-          </a:ln>
-        </p:spPr>
-        <p:txBody>
-          <a:bodyPr spcFirstLastPara="1" wrap="square" lIns="0" tIns="0" rIns="0" bIns="0" anchor="t" anchorCtr="0">
-            <a:noAutofit/>
-          </a:bodyPr>
-          <a:lstStyle/>
-          <a:p>
-            <a:pPr marL="0" marR="0" lvl="0" indent="0" algn="l" rtl="0">
-              <a:lnSpc>
-                <a:spcPct val="125000"/>
-              </a:lnSpc>
-              <a:spcBef>
-                <a:spcPts val="0"/>
-              </a:spcBef>
-              <a:spcAft>
-                <a:spcPts val="0"/>
-              </a:spcAft>
-              <a:buNone/>
-            </a:pPr>
-            <a:r>
-              <a:rPr lang="ru" sz="1200" b="1" i="0" u="none" strike="noStrike" cap="none">
-                <a:solidFill>
-                  <a:srgbClr val="8F2F27"/>
-                </a:solidFill>
-                <a:latin typeface="Arial"/>
-                <a:ea typeface="Arial"/>
-                <a:cs typeface="Arial"/>
-                <a:sym typeface="Arial"/>
-              </a:rPr>
-              <a:t>•</a:t>
-            </a:r>
-            <a:endParaRPr sz="1200" b="0" i="0" u="none" strike="noStrike" cap="none">
-              <a:solidFill>
-                <a:schemeClr val="dk1"/>
-              </a:solidFill>
-              <a:latin typeface="Calibri"/>
-              <a:ea typeface="Calibri"/>
-              <a:cs typeface="Calibri"/>
-              <a:sym typeface="Calibri"/>
-            </a:endParaRPr>
-          </a:p>
-        </p:txBody>
-      </p:sp>
-      <p:sp>
-        <p:nvSpPr>
-          <p:cNvPr id="107" name="Google Shape;107;p18">
-            <a:extLst>
-              <a:ext uri="{FF2B5EF4-FFF2-40B4-BE49-F238E27FC236}">
-                <a16:creationId xmlns:a16="http://schemas.microsoft.com/office/drawing/2014/main" id="{C26F984B-9133-8B1B-3A0A-6651232A5509}"/>
-              </a:ext>
-            </a:extLst>
-          </p:cNvPr>
-          <p:cNvSpPr/>
-          <p:nvPr/>
-        </p:nvSpPr>
-        <p:spPr>
-          <a:xfrm>
-            <a:off x="476250" y="2599630"/>
-            <a:ext cx="56400" cy="204900"/>
-          </a:xfrm>
-          <a:prstGeom prst="rect">
-            <a:avLst/>
-          </a:prstGeom>
-          <a:noFill/>
-          <a:ln>
-            <a:noFill/>
-          </a:ln>
-        </p:spPr>
-        <p:txBody>
-          <a:bodyPr spcFirstLastPara="1" wrap="square" lIns="0" tIns="0" rIns="0" bIns="0" anchor="t" anchorCtr="0">
-            <a:noAutofit/>
-          </a:bodyPr>
-          <a:lstStyle/>
-          <a:p>
-            <a:pPr marL="0" marR="0" lvl="0" indent="0" algn="l" rtl="0">
-              <a:lnSpc>
-                <a:spcPct val="125000"/>
-              </a:lnSpc>
-              <a:spcBef>
-                <a:spcPts val="0"/>
-              </a:spcBef>
-              <a:spcAft>
-                <a:spcPts val="0"/>
-              </a:spcAft>
-              <a:buNone/>
-            </a:pPr>
-            <a:r>
-              <a:rPr lang="ru" sz="1200" b="1" i="0" u="none" strike="noStrike" cap="none">
-                <a:solidFill>
-                  <a:srgbClr val="8F2F27"/>
-                </a:solidFill>
-                <a:latin typeface="Arial"/>
-                <a:ea typeface="Arial"/>
-                <a:cs typeface="Arial"/>
-                <a:sym typeface="Arial"/>
-              </a:rPr>
-              <a:t>•</a:t>
-            </a:r>
-            <a:endParaRPr sz="1200" b="0" i="0" u="none" strike="noStrike" cap="none">
-              <a:solidFill>
-                <a:schemeClr val="dk1"/>
-              </a:solidFill>
-              <a:latin typeface="Calibri"/>
-              <a:ea typeface="Calibri"/>
-              <a:cs typeface="Calibri"/>
-              <a:sym typeface="Calibri"/>
             </a:endParaRPr>
           </a:p>
         </p:txBody>
@@ -9415,8 +9501,8 @@
         </p:nvSpPr>
         <p:spPr>
           <a:xfrm>
-            <a:off x="2924253" y="4382932"/>
-            <a:ext cx="1715700" cy="480679"/>
+            <a:off x="531539" y="2107092"/>
+            <a:ext cx="1715700" cy="1079084"/>
           </a:xfrm>
           <a:prstGeom prst="rect">
             <a:avLst/>
@@ -9448,7 +9534,27 @@
               <a:rPr lang="ru-RU" sz="1200" dirty="0">
                 <a:ea typeface="Calibri"/>
               </a:rPr>
-              <a:t>задержка шлюза на одно решение, macOS; WSL2 до 38 мс</a:t>
+              <a:t>задержка шлюза на одно решение, macOS; </a:t>
+            </a:r>
+          </a:p>
+          <a:p>
+            <a:pPr marL="0" marR="0" lvl="0" indent="0" algn="l" rtl="0">
+              <a:lnSpc>
+                <a:spcPct val="125000"/>
+              </a:lnSpc>
+              <a:spcBef>
+                <a:spcPts val="0"/>
+              </a:spcBef>
+              <a:spcAft>
+                <a:spcPts val="0"/>
+              </a:spcAft>
+              <a:buNone/>
+            </a:pPr>
+            <a:r>
+              <a:rPr lang="ru-RU" sz="1200" dirty="0">
+                <a:ea typeface="Calibri"/>
+              </a:rPr>
+              <a:t>WSL2 до 38 мс</a:t>
             </a:r>
             <a:endParaRPr sz="1200" b="0" i="0" u="none" strike="noStrike" cap="none" dirty="0">
               <a:solidFill>
@@ -9476,7 +9582,7 @@
         </p:nvSpPr>
         <p:spPr>
           <a:xfrm>
-            <a:off x="2924395" y="3870742"/>
+            <a:off x="531681" y="1594902"/>
             <a:ext cx="1714500" cy="366600"/>
           </a:xfrm>
           <a:prstGeom prst="rect">
@@ -9794,1306 +9900,6 @@
 </file>
 
 <file path=ppt/slides/slide4.xml><?xml version="1.0" encoding="utf-8"?>
-<p:sld xmlns:a="http://schemas.openxmlformats.org/drawingml/2006/main" xmlns:r="http://schemas.openxmlformats.org/officeDocument/2006/relationships" xmlns:p="http://schemas.openxmlformats.org/presentationml/2006/main">
-  <p:cSld>
-    <p:bg>
-      <p:bgPr>
-        <a:solidFill>
-          <a:srgbClr val="C93E33"/>
-        </a:solidFill>
-        <a:effectLst/>
-      </p:bgPr>
-    </p:bg>
-    <p:spTree>
-      <p:nvGrpSpPr>
-        <p:cNvPr id="1" name="Shape 182"/>
-        <p:cNvGrpSpPr/>
-        <p:nvPr/>
-      </p:nvGrpSpPr>
-      <p:grpSpPr>
-        <a:xfrm>
-          <a:off x="0" y="0"/>
-          <a:ext cx="0" cy="0"/>
-          <a:chOff x="0" y="0"/>
-          <a:chExt cx="0" cy="0"/>
-        </a:xfrm>
-      </p:grpSpPr>
-      <p:pic>
-        <p:nvPicPr>
-          <p:cNvPr id="185" name="Google Shape;185;p24"/>
-          <p:cNvPicPr preferRelativeResize="0"/>
-          <p:nvPr/>
-        </p:nvPicPr>
-        <p:blipFill>
-          <a:blip r:embed="rId2">
-            <a:alphaModFix/>
-          </a:blip>
-          <a:stretch>
-            <a:fillRect/>
-          </a:stretch>
-        </p:blipFill>
-        <p:spPr>
-          <a:xfrm>
-            <a:off x="301422" y="307125"/>
-            <a:ext cx="1673574" cy="462524"/>
-          </a:xfrm>
-          <a:prstGeom prst="rect">
-            <a:avLst/>
-          </a:prstGeom>
-          <a:noFill/>
-          <a:ln>
-            <a:noFill/>
-          </a:ln>
-        </p:spPr>
-      </p:pic>
-      <p:sp>
-        <p:nvSpPr>
-          <p:cNvPr id="960" name="demo-title"/>
-          <p:cNvSpPr>
-            <a:spLocks noGrp="1"/>
-          </p:cNvSpPr>
-          <p:nvPr/>
-        </p:nvSpPr>
-        <p:spPr>
-          <a:xfrm>
-            <a:off x="469900" y="914400"/>
-            <a:ext cx="11430000" cy="762000"/>
-          </a:xfrm>
-          <a:prstGeom prst="rect">
-            <a:avLst/>
-          </a:prstGeom>
-        </p:spPr>
-        <p:txBody>
-          <a:bodyPr/>
-          <a:lstStyle/>
-          <a:p>
-            <a:r>
-              <a:rPr lang="ru-RU" sz="2800" b="1">
-                <a:solidFill>
-                  <a:srgbClr val="FFFFFF"/>
-                </a:solidFill>
-              </a:rPr>
-              <a:t>Один сценарий: без защиты и с защитой</a:t>
-            </a:r>
-          </a:p>
-        </p:txBody>
-      </p:sp>
-      <p:sp>
-        <p:nvSpPr>
-          <p:cNvPr id="971" name="card0"/>
-          <p:cNvSpPr/>
-          <p:nvPr/>
-        </p:nvSpPr>
-        <p:spPr>
-          <a:xfrm>
-            <a:off x="469900" y="1676400"/>
-            <a:ext cx="8811260" cy="711200"/>
-          </a:xfrm>
-          <a:prstGeom prst="roundRect">
-            <a:avLst>
-              <a:gd name="adj" fmla="val 12000"/>
-            </a:avLst>
-          </a:prstGeom>
-          <a:solidFill>
-            <a:srgbClr val="FFFFFF"/>
-          </a:solidFill>
-        </p:spPr>
-        <p:txBody>
-          <a:bodyPr lIns="228600" tIns="76200" rIns="228600" bIns="50800" anchor="ctr"/>
-          <a:lstStyle/>
-          <a:p>
-            <a:r>
-              <a:rPr lang="ru-RU" sz="1100" b="1" spc="120">
-                <a:solidFill>
-                  <a:srgbClr val="C93E33"/>
-                </a:solidFill>
-              </a:rPr>
-              <a:t>1 · ОДИН СЦЕНАРИЙ</a:t>
-            </a:r>
-          </a:p>
-          <a:p>
-            <a:r>
-              <a:rPr lang="ru-RU" sz="1600" b="1">
-                <a:solidFill>
-                  <a:srgbClr val="161412"/>
-                </a:solidFill>
-              </a:rPr>
-              <a:t>Агент чинит баг и читает README со спрятанной инструкцией</a:t>
-            </a:r>
-          </a:p>
-        </p:txBody>
-      </p:sp>
-      <p:sp>
-        <p:nvSpPr>
-          <p:cNvPr id="972" name="card1"/>
-          <p:cNvSpPr/>
-          <p:nvPr/>
-        </p:nvSpPr>
-        <p:spPr>
-          <a:xfrm>
-            <a:off x="469900" y="2476500"/>
-            <a:ext cx="8811260" cy="711200"/>
-          </a:xfrm>
-          <a:prstGeom prst="roundRect">
-            <a:avLst>
-              <a:gd name="adj" fmla="val 12000"/>
-            </a:avLst>
-          </a:prstGeom>
-          <a:solidFill>
-            <a:srgbClr val="111318"/>
-          </a:solidFill>
-        </p:spPr>
-        <p:txBody>
-          <a:bodyPr lIns="228600" tIns="76200" rIns="228600" bIns="50800" anchor="ctr"/>
-          <a:lstStyle/>
-          <a:p>
-            <a:r>
-              <a:rPr lang="ru-RU" sz="1100" b="1" spc="120">
-                <a:solidFill>
-                  <a:srgbClr val="F6D8D5"/>
-                </a:solidFill>
-              </a:rPr>
-              <a:t>2 · БЕЗ ЗАЩИТЫ (--auto)</a:t>
-            </a:r>
-          </a:p>
-          <a:p>
-            <a:r>
-              <a:rPr lang="ru-RU" sz="1600" b="1">
-                <a:solidFill>
-                  <a:srgbClr val="FFFFFF"/>
-                </a:solidFill>
-              </a:rPr>
-              <a:t>Агент поддаётся — файл автозапуска появляется в проекте</a:t>
-            </a:r>
-          </a:p>
-        </p:txBody>
-      </p:sp>
-      <p:sp>
-        <p:nvSpPr>
-          <p:cNvPr id="973" name="card2"/>
-          <p:cNvSpPr/>
-          <p:nvPr/>
-        </p:nvSpPr>
-        <p:spPr>
-          <a:xfrm>
-            <a:off x="469900" y="3276600"/>
-            <a:ext cx="8811260" cy="711200"/>
-          </a:xfrm>
-          <a:prstGeom prst="roundRect">
-            <a:avLst>
-              <a:gd name="adj" fmla="val 12000"/>
-            </a:avLst>
-          </a:prstGeom>
-          <a:solidFill>
-            <a:srgbClr val="FFFFFF"/>
-          </a:solidFill>
-        </p:spPr>
-        <p:txBody>
-          <a:bodyPr lIns="228600" tIns="76200" rIns="228600" bIns="50800" anchor="ctr"/>
-          <a:lstStyle/>
-          <a:p>
-            <a:r>
-              <a:rPr lang="ru-RU" sz="1100" b="1" spc="120">
-                <a:solidFill>
-                  <a:srgbClr val="C93E33"/>
-                </a:solidFill>
-              </a:rPr>
-              <a:t>3 · С ЗАЩИТОЙ (auto mode)</a:t>
-            </a:r>
-          </a:p>
-          <a:p>
-            <a:r>
-              <a:rPr lang="ru-RU" sz="1600" b="1">
-                <a:solidFill>
-                  <a:srgbClr val="161412"/>
-                </a:solidFill>
-              </a:rPr>
-              <a:t>Действие выполняется в копии, эффект проверяется по факту</a:t>
-            </a:r>
-          </a:p>
-        </p:txBody>
-      </p:sp>
-      <p:sp>
-        <p:nvSpPr>
-          <p:cNvPr id="974" name="card3"/>
-          <p:cNvSpPr/>
-          <p:nvPr/>
-        </p:nvSpPr>
-        <p:spPr>
-          <a:xfrm>
-            <a:off x="469900" y="4076700"/>
-            <a:ext cx="8811260" cy="711200"/>
-          </a:xfrm>
-          <a:prstGeom prst="roundRect">
-            <a:avLst>
-              <a:gd name="adj" fmla="val 12000"/>
-            </a:avLst>
-          </a:prstGeom>
-          <a:solidFill>
-            <a:srgbClr val="161412"/>
-          </a:solidFill>
-        </p:spPr>
-        <p:txBody>
-          <a:bodyPr lIns="228600" tIns="76200" rIns="228600" bIns="50800" anchor="ctr"/>
-          <a:lstStyle/>
-          <a:p>
-            <a:r>
-              <a:rPr lang="ru-RU" sz="1100" b="1" spc="120">
-                <a:solidFill>
-                  <a:srgbClr val="F6D8D5"/>
-                </a:solidFill>
-              </a:rPr>
-              <a:t>4 · ИТОГ</a:t>
-            </a:r>
-          </a:p>
-          <a:p>
-            <a:r>
-              <a:rPr lang="ru-RU" sz="1600" b="1">
-                <a:solidFill>
-                  <a:srgbClr val="8FD49B"/>
-                </a:solidFill>
-              </a:rPr>
-              <a:t>DENY — файла нет в проекте, починка бага применена, агент продолжил</a:t>
-            </a:r>
-          </a:p>
-        </p:txBody>
-      </p:sp>
-    </p:spTree>
-  </p:cSld>
-  <p:clrMapOvr>
-    <a:masterClrMapping/>
-  </p:clrMapOvr>
-</p:sld>
-</file>
-
-<file path=ppt/slides/slide5.xml><?xml version="1.0" encoding="utf-8"?>
-<p:sld xmlns:a="http://schemas.openxmlformats.org/drawingml/2006/main" xmlns:r="http://schemas.openxmlformats.org/officeDocument/2006/relationships" xmlns:p="http://schemas.openxmlformats.org/presentationml/2006/main">
-  <p:cSld>
-    <p:bg>
-      <p:bgPr>
-        <a:solidFill>
-          <a:srgbClr val="FFF6FF"/>
-        </a:solidFill>
-        <a:effectLst/>
-      </p:bgPr>
-    </p:bg>
-    <p:spTree>
-      <p:nvGrpSpPr>
-        <p:cNvPr id="1" name="Shape 214"/>
-        <p:cNvGrpSpPr/>
-        <p:nvPr/>
-      </p:nvGrpSpPr>
-      <p:grpSpPr>
-        <a:xfrm>
-          <a:off x="0" y="0"/>
-          <a:ext cx="0" cy="0"/>
-          <a:chOff x="0" y="0"/>
-          <a:chExt cx="0" cy="0"/>
-        </a:xfrm>
-      </p:grpSpPr>
-      <p:cxnSp>
-        <p:nvCxnSpPr>
-          <p:cNvPr id="215" name="Google Shape;215;p27"/>
-          <p:cNvCxnSpPr/>
-          <p:nvPr/>
-        </p:nvCxnSpPr>
-        <p:spPr>
-          <a:xfrm>
-            <a:off x="2636307" y="3494757"/>
-            <a:ext cx="2213400" cy="0"/>
-          </a:xfrm>
-          <a:prstGeom prst="straightConnector1">
-            <a:avLst/>
-          </a:prstGeom>
-          <a:solidFill>
-            <a:srgbClr val="000000"/>
-          </a:solidFill>
-          <a:ln w="21150" cap="flat" cmpd="sng">
-            <a:solidFill>
-              <a:srgbClr val="C93E33"/>
-            </a:solidFill>
-            <a:prstDash val="solid"/>
-            <a:round/>
-            <a:headEnd type="none" w="sm" len="sm"/>
-            <a:tailEnd type="none" w="sm" len="sm"/>
-          </a:ln>
-        </p:spPr>
-      </p:cxnSp>
-      <p:cxnSp>
-        <p:nvCxnSpPr>
-          <p:cNvPr id="216" name="Google Shape;216;p27"/>
-          <p:cNvCxnSpPr/>
-          <p:nvPr/>
-        </p:nvCxnSpPr>
-        <p:spPr>
-          <a:xfrm>
-            <a:off x="4843468" y="3491617"/>
-            <a:ext cx="2213400" cy="0"/>
-          </a:xfrm>
-          <a:prstGeom prst="straightConnector1">
-            <a:avLst/>
-          </a:prstGeom>
-          <a:solidFill>
-            <a:srgbClr val="000000"/>
-          </a:solidFill>
-          <a:ln w="21150" cap="flat" cmpd="sng">
-            <a:solidFill>
-              <a:srgbClr val="C93E33"/>
-            </a:solidFill>
-            <a:prstDash val="solid"/>
-            <a:round/>
-            <a:headEnd type="none" w="sm" len="sm"/>
-            <a:tailEnd type="none" w="sm" len="sm"/>
-          </a:ln>
-        </p:spPr>
-      </p:cxnSp>
-      <p:sp>
-        <p:nvSpPr>
-          <p:cNvPr id="217" name="Google Shape;217;p27"/>
-          <p:cNvSpPr/>
-          <p:nvPr/>
-        </p:nvSpPr>
-        <p:spPr>
-          <a:xfrm>
-            <a:off x="476250" y="1673096"/>
-            <a:ext cx="7606116" cy="503014"/>
-          </a:xfrm>
-          <a:prstGeom prst="rect">
-            <a:avLst/>
-          </a:prstGeom>
-          <a:noFill/>
-          <a:ln>
-            <a:noFill/>
-          </a:ln>
-        </p:spPr>
-        <p:txBody>
-          <a:bodyPr spcFirstLastPara="1" wrap="square" lIns="0" tIns="0" rIns="0" bIns="0" anchor="t" anchorCtr="0">
-            <a:noAutofit/>
-          </a:bodyPr>
-          <a:lstStyle/>
-          <a:p>
-            <a:pPr marL="0" marR="0" lvl="0" indent="0" algn="l" rtl="0">
-              <a:lnSpc>
-                <a:spcPct val="111076"/>
-              </a:lnSpc>
-              <a:spcBef>
-                <a:spcPts val="0"/>
-              </a:spcBef>
-              <a:spcAft>
-                <a:spcPts val="0"/>
-              </a:spcAft>
-              <a:buNone/>
-            </a:pPr>
-            <a:r>
-              <a:rPr lang="ru" sz="2600" b="1" i="0" u="none" strike="noStrike" cap="none" dirty="0">
-                <a:solidFill>
-                  <a:srgbClr val="000000"/>
-                </a:solidFill>
-                <a:latin typeface="Inter"/>
-                <a:ea typeface="Inter"/>
-                <a:cs typeface="Inter"/>
-                <a:sym typeface="Inter"/>
-              </a:rPr>
-              <a:t>Работает в Kilo Code — дальше в </a:t>
-            </a:r>
-            <a:r>
-              <a:rPr lang="ru-RU" sz="2600" b="1" i="0" u="none" strike="noStrike" cap="none" dirty="0">
-                <a:solidFill>
-                  <a:srgbClr val="000000"/>
-                </a:solidFill>
-                <a:latin typeface="Inter"/>
-                <a:ea typeface="Inter"/>
-                <a:cs typeface="Inter"/>
-                <a:sym typeface="Inter"/>
-              </a:rPr>
-              <a:t>сообщество</a:t>
-            </a:r>
-            <a:endParaRPr sz="2625" i="0" u="none" strike="noStrike" cap="none" dirty="0">
-              <a:solidFill>
-                <a:schemeClr val="dk1"/>
-              </a:solidFill>
-              <a:latin typeface="Inter"/>
-              <a:ea typeface="Inter"/>
-              <a:cs typeface="Inter"/>
-              <a:sym typeface="Inter"/>
-            </a:endParaRPr>
-          </a:p>
-        </p:txBody>
-      </p:sp>
-      <p:sp>
-        <p:nvSpPr>
-          <p:cNvPr id="218" name="Google Shape;218;p27"/>
-          <p:cNvSpPr/>
-          <p:nvPr/>
-        </p:nvSpPr>
-        <p:spPr>
-          <a:xfrm>
-            <a:off x="8173388" y="416837"/>
-            <a:ext cx="494100" cy="267900"/>
-          </a:xfrm>
-          <a:prstGeom prst="rect">
-            <a:avLst/>
-          </a:prstGeom>
-          <a:noFill/>
-          <a:ln>
-            <a:noFill/>
-          </a:ln>
-        </p:spPr>
-        <p:txBody>
-          <a:bodyPr spcFirstLastPara="1" wrap="square" lIns="0" tIns="0" rIns="0" bIns="0" anchor="t" anchorCtr="0">
-            <a:noAutofit/>
-          </a:bodyPr>
-          <a:lstStyle/>
-          <a:p>
-            <a:pPr marL="0" marR="0" lvl="0" indent="0" algn="l" rtl="0">
-              <a:lnSpc>
-                <a:spcPct val="124058"/>
-              </a:lnSpc>
-              <a:spcBef>
-                <a:spcPts val="0"/>
-              </a:spcBef>
-              <a:spcAft>
-                <a:spcPts val="0"/>
-              </a:spcAft>
-              <a:buNone/>
-            </a:pPr>
-            <a:endParaRPr sz="1688" b="0" i="0" u="none" strike="noStrike" cap="none">
-              <a:solidFill>
-                <a:schemeClr val="dk1"/>
-              </a:solidFill>
-              <a:latin typeface="Calibri"/>
-              <a:ea typeface="Calibri"/>
-              <a:cs typeface="Calibri"/>
-              <a:sym typeface="Calibri"/>
-            </a:endParaRPr>
-          </a:p>
-        </p:txBody>
-      </p:sp>
-      <p:cxnSp>
-        <p:nvCxnSpPr>
-          <p:cNvPr id="219" name="Google Shape;219;p27"/>
-          <p:cNvCxnSpPr/>
-          <p:nvPr/>
-        </p:nvCxnSpPr>
-        <p:spPr>
-          <a:xfrm>
-            <a:off x="475843" y="3497897"/>
-            <a:ext cx="2213400" cy="0"/>
-          </a:xfrm>
-          <a:prstGeom prst="straightConnector1">
-            <a:avLst/>
-          </a:prstGeom>
-          <a:solidFill>
-            <a:srgbClr val="000000"/>
-          </a:solidFill>
-          <a:ln w="21150" cap="flat" cmpd="sng">
-            <a:solidFill>
-              <a:srgbClr val="C93E33"/>
-            </a:solidFill>
-            <a:prstDash val="solid"/>
-            <a:round/>
-            <a:headEnd type="none" w="sm" len="sm"/>
-            <a:tailEnd type="none" w="sm" len="sm"/>
-          </a:ln>
-        </p:spPr>
-      </p:cxnSp>
-      <p:sp>
-        <p:nvSpPr>
-          <p:cNvPr id="220" name="Google Shape;220;p27"/>
-          <p:cNvSpPr/>
-          <p:nvPr/>
-        </p:nvSpPr>
-        <p:spPr>
-          <a:xfrm>
-            <a:off x="476250" y="3717492"/>
-            <a:ext cx="1714500" cy="952500"/>
-          </a:xfrm>
-          <a:prstGeom prst="rect">
-            <a:avLst/>
-          </a:prstGeom>
-          <a:noFill/>
-          <a:ln>
-            <a:noFill/>
-          </a:ln>
-        </p:spPr>
-        <p:txBody>
-          <a:bodyPr spcFirstLastPara="1" wrap="square" lIns="0" tIns="0" rIns="0" bIns="0" anchor="t" anchorCtr="0">
-            <a:noAutofit/>
-          </a:bodyPr>
-          <a:lstStyle/>
-          <a:p>
-            <a:pPr marL="0" marR="0" lvl="0" indent="0" algn="l" rtl="0">
-              <a:lnSpc>
-                <a:spcPct val="125000"/>
-              </a:lnSpc>
-              <a:spcBef>
-                <a:spcPts val="0"/>
-              </a:spcBef>
-              <a:spcAft>
-                <a:spcPts val="0"/>
-              </a:spcAft>
-              <a:buNone/>
-            </a:pPr>
-            <a:r>
-              <a:rPr lang="en-US" sz="1200" i="0" u="none" strike="noStrike" cap="none" dirty="0">
-                <a:solidFill>
-                  <a:srgbClr val="000000"/>
-                </a:solidFill>
-                <a:latin typeface="Arial"/>
-                <a:ea typeface="Arial"/>
-                <a:cs typeface="Arial"/>
-                <a:sym typeface="Arial"/>
-              </a:rPr>
-              <a:t>PoC </a:t>
-            </a:r>
-            <a:r>
-              <a:rPr lang="ru" sz="1200" i="0" u="none" strike="noStrike" cap="none" dirty="0">
-                <a:solidFill>
-                  <a:srgbClr val="000000"/>
-                </a:solidFill>
-                <a:latin typeface="Arial"/>
-                <a:ea typeface="Arial"/>
-                <a:cs typeface="Arial"/>
-                <a:sym typeface="Arial"/>
-              </a:rPr>
-              <a:t>в Kilo Code: правила, изолированная копия, перенос только после проверки</a:t>
-            </a:r>
-            <a:endParaRPr sz="1200" b="0" i="0" u="none" strike="noStrike" cap="none" dirty="0">
-              <a:solidFill>
-                <a:schemeClr val="dk1"/>
-              </a:solidFill>
-              <a:latin typeface="Calibri"/>
-              <a:ea typeface="Calibri"/>
-              <a:cs typeface="Calibri"/>
-              <a:sym typeface="Calibri"/>
-            </a:endParaRPr>
-          </a:p>
-        </p:txBody>
-      </p:sp>
-      <p:sp>
-        <p:nvSpPr>
-          <p:cNvPr id="221" name="Google Shape;221;p27"/>
-          <p:cNvSpPr/>
-          <p:nvPr/>
-        </p:nvSpPr>
-        <p:spPr>
-          <a:xfrm>
-            <a:off x="2634524" y="3717492"/>
-            <a:ext cx="1868896" cy="1426008"/>
-          </a:xfrm>
-          <a:prstGeom prst="rect">
-            <a:avLst/>
-          </a:prstGeom>
-          <a:noFill/>
-          <a:ln>
-            <a:noFill/>
-          </a:ln>
-        </p:spPr>
-        <p:txBody>
-          <a:bodyPr spcFirstLastPara="1" wrap="square" lIns="0" tIns="0" rIns="0" bIns="0" anchor="t" anchorCtr="0">
-            <a:noAutofit/>
-          </a:bodyPr>
-          <a:lstStyle/>
-          <a:p>
-            <a:pPr marL="0" marR="0" lvl="0" indent="0" algn="l" rtl="0">
-              <a:lnSpc>
-                <a:spcPct val="125000"/>
-              </a:lnSpc>
-              <a:spcBef>
-                <a:spcPts val="0"/>
-              </a:spcBef>
-              <a:spcAft>
-                <a:spcPts val="0"/>
-              </a:spcAft>
-              <a:buNone/>
-            </a:pPr>
-            <a:r>
-              <a:rPr lang="ru" sz="1200" i="0" u="none" strike="noStrike" cap="none" dirty="0">
-                <a:solidFill>
-                  <a:srgbClr val="000000"/>
-                </a:solidFill>
-                <a:latin typeface="Arial"/>
-                <a:ea typeface="Arial"/>
-                <a:cs typeface="Arial"/>
-                <a:sym typeface="Arial"/>
-              </a:rPr>
-              <a:t>Демо 6 сценариев, хеш решений совпал на macOS и Linux</a:t>
-            </a:r>
-            <a:r>
-              <a:rPr lang="en-US" sz="1200" i="0" u="none" strike="noStrike" cap="none" dirty="0">
-                <a:solidFill>
-                  <a:srgbClr val="000000"/>
-                </a:solidFill>
-                <a:latin typeface="Arial"/>
-                <a:ea typeface="Arial"/>
-                <a:cs typeface="Arial"/>
-                <a:sym typeface="Arial"/>
-              </a:rPr>
-              <a:t> – </a:t>
-            </a:r>
-            <a:r>
-              <a:rPr lang="ru-RU" sz="1200" i="0" u="none" strike="noStrike" cap="none" dirty="0">
-                <a:solidFill>
-                  <a:srgbClr val="000000"/>
-                </a:solidFill>
-                <a:latin typeface="Arial"/>
-                <a:ea typeface="Arial"/>
-                <a:cs typeface="Arial"/>
-                <a:sym typeface="Arial"/>
-              </a:rPr>
-              <a:t>живой A/B на 132 запусках: без защиты атаки проходят в 78%, с защитой — 0</a:t>
-            </a:r>
-            <a:endParaRPr sz="1200" b="0" i="0" u="none" strike="noStrike" cap="none" dirty="0">
-              <a:solidFill>
-                <a:schemeClr val="dk1"/>
-              </a:solidFill>
-              <a:latin typeface="Calibri"/>
-              <a:ea typeface="Calibri"/>
-              <a:cs typeface="Calibri"/>
-              <a:sym typeface="Calibri"/>
-            </a:endParaRPr>
-          </a:p>
-        </p:txBody>
-      </p:sp>
-      <p:sp>
-        <p:nvSpPr>
-          <p:cNvPr id="222" name="Google Shape;222;p27"/>
-          <p:cNvSpPr/>
-          <p:nvPr/>
-        </p:nvSpPr>
-        <p:spPr>
-          <a:xfrm>
-            <a:off x="4793914" y="3717491"/>
-            <a:ext cx="1716600" cy="1203217"/>
-          </a:xfrm>
-          <a:prstGeom prst="rect">
-            <a:avLst/>
-          </a:prstGeom>
-          <a:noFill/>
-          <a:ln>
-            <a:noFill/>
-          </a:ln>
-        </p:spPr>
-        <p:txBody>
-          <a:bodyPr spcFirstLastPara="1" wrap="square" lIns="0" tIns="0" rIns="0" bIns="0" anchor="t" anchorCtr="0">
-            <a:noAutofit/>
-          </a:bodyPr>
-          <a:lstStyle/>
-          <a:p>
-            <a:pPr marL="0" marR="0" lvl="0" indent="0" algn="l" rtl="0">
-              <a:lnSpc>
-                <a:spcPct val="125000"/>
-              </a:lnSpc>
-              <a:spcBef>
-                <a:spcPts val="0"/>
-              </a:spcBef>
-              <a:spcAft>
-                <a:spcPts val="0"/>
-              </a:spcAft>
-              <a:buNone/>
-            </a:pPr>
-            <a:r>
-              <a:rPr lang="ru" sz="1200" i="0" u="none" strike="noStrike" cap="none" dirty="0">
-                <a:solidFill>
-                  <a:srgbClr val="000000"/>
-                </a:solidFill>
-                <a:latin typeface="Arial"/>
-                <a:ea typeface="Arial"/>
-                <a:cs typeface="Arial"/>
-                <a:sym typeface="Arial"/>
-              </a:rPr>
-              <a:t>Расширение покрытия тестами, уточнение метрик, </a:t>
-            </a:r>
-            <a:r>
-              <a:rPr lang="ru" sz="1200" dirty="0"/>
-              <a:t>о</a:t>
-            </a:r>
-            <a:r>
-              <a:rPr lang="ru" sz="1200" i="0" u="none" strike="noStrike" cap="none" dirty="0">
-                <a:solidFill>
-                  <a:srgbClr val="000000"/>
-                </a:solidFill>
-                <a:latin typeface="Arial"/>
-                <a:ea typeface="Arial"/>
-                <a:cs typeface="Arial"/>
-                <a:sym typeface="Arial"/>
-              </a:rPr>
-              <a:t>формление </a:t>
-            </a:r>
-            <a:r>
-              <a:rPr lang="en-US" sz="1200" i="0" u="none" strike="noStrike" cap="none" dirty="0">
-                <a:solidFill>
-                  <a:srgbClr val="000000"/>
-                </a:solidFill>
-                <a:latin typeface="Arial"/>
-                <a:ea typeface="Arial"/>
-                <a:cs typeface="Arial"/>
-                <a:sym typeface="Arial"/>
-              </a:rPr>
-              <a:t>PR </a:t>
-            </a:r>
-            <a:r>
-              <a:rPr lang="ru-RU" sz="1200" i="0" u="none" strike="noStrike" cap="none" dirty="0">
-                <a:solidFill>
-                  <a:srgbClr val="000000"/>
-                </a:solidFill>
-                <a:latin typeface="Arial"/>
-                <a:ea typeface="Arial"/>
-                <a:cs typeface="Arial"/>
-                <a:sym typeface="Arial"/>
-              </a:rPr>
-              <a:t>в сообщество </a:t>
-            </a:r>
-            <a:r>
-              <a:rPr lang="en-US" sz="1200" dirty="0"/>
-              <a:t>Kilo Code </a:t>
-            </a:r>
-            <a:r>
-              <a:rPr lang="ru-RU" sz="1200" dirty="0"/>
-              <a:t>для продвижения нашего подхода</a:t>
-            </a:r>
-            <a:endParaRPr sz="1200" b="0" i="0" u="none" strike="noStrike" cap="none" dirty="0">
-              <a:solidFill>
-                <a:schemeClr val="dk1"/>
-              </a:solidFill>
-              <a:latin typeface="Calibri"/>
-              <a:ea typeface="Calibri"/>
-              <a:cs typeface="Calibri"/>
-              <a:sym typeface="Calibri"/>
-            </a:endParaRPr>
-          </a:p>
-        </p:txBody>
-      </p:sp>
-      <p:sp>
-        <p:nvSpPr>
-          <p:cNvPr id="223" name="Google Shape;223;p27"/>
-          <p:cNvSpPr/>
-          <p:nvPr/>
-        </p:nvSpPr>
-        <p:spPr>
-          <a:xfrm>
-            <a:off x="6954421" y="3717697"/>
-            <a:ext cx="1714200" cy="952500"/>
-          </a:xfrm>
-          <a:prstGeom prst="rect">
-            <a:avLst/>
-          </a:prstGeom>
-          <a:noFill/>
-          <a:ln>
-            <a:noFill/>
-          </a:ln>
-        </p:spPr>
-        <p:txBody>
-          <a:bodyPr spcFirstLastPara="1" wrap="square" lIns="0" tIns="0" rIns="0" bIns="0" anchor="t" anchorCtr="0">
-            <a:noAutofit/>
-          </a:bodyPr>
-          <a:lstStyle/>
-          <a:p>
-            <a:pPr marL="0" marR="0" lvl="0" indent="0" algn="l" rtl="0">
-              <a:lnSpc>
-                <a:spcPct val="125000"/>
-              </a:lnSpc>
-              <a:spcBef>
-                <a:spcPts val="0"/>
-              </a:spcBef>
-              <a:spcAft>
-                <a:spcPts val="0"/>
-              </a:spcAft>
-              <a:buNone/>
-            </a:pPr>
-            <a:r>
-              <a:rPr lang="ru" sz="1200" i="0" u="none" strike="noStrike" cap="none">
-                <a:solidFill>
-                  <a:srgbClr val="000000"/>
-                </a:solidFill>
-                <a:latin typeface="Arial"/>
-                <a:ea typeface="Arial"/>
-                <a:cs typeface="Arial"/>
-                <a:sym typeface="Arial"/>
-              </a:rPr>
-              <a:t>Попробуйте подход в своей работе — это расширит набор тестов и уточнит оценку</a:t>
-            </a:r>
-            <a:endParaRPr sz="1200" b="0" i="0" u="none" strike="noStrike" cap="none">
-              <a:solidFill>
-                <a:schemeClr val="dk1"/>
-              </a:solidFill>
-              <a:latin typeface="Calibri"/>
-              <a:ea typeface="Calibri"/>
-              <a:cs typeface="Calibri"/>
-              <a:sym typeface="Calibri"/>
-            </a:endParaRPr>
-          </a:p>
-        </p:txBody>
-      </p:sp>
-      <p:sp>
-        <p:nvSpPr>
-          <p:cNvPr id="224" name="Google Shape;224;p27"/>
-          <p:cNvSpPr/>
-          <p:nvPr/>
-        </p:nvSpPr>
-        <p:spPr>
-          <a:xfrm>
-            <a:off x="476250" y="2967000"/>
-            <a:ext cx="1714500" cy="366600"/>
-          </a:xfrm>
-          <a:prstGeom prst="rect">
-            <a:avLst/>
-          </a:prstGeom>
-          <a:noFill/>
-          <a:ln>
-            <a:noFill/>
-          </a:ln>
-        </p:spPr>
-        <p:txBody>
-          <a:bodyPr spcFirstLastPara="1" wrap="square" lIns="0" tIns="0" rIns="0" bIns="0" anchor="t" anchorCtr="0">
-            <a:noAutofit/>
-          </a:bodyPr>
-          <a:lstStyle/>
-          <a:p>
-            <a:pPr marL="0" marR="0" lvl="0" indent="0" algn="l" rtl="0">
-              <a:lnSpc>
-                <a:spcPct val="111076"/>
-              </a:lnSpc>
-              <a:spcBef>
-                <a:spcPts val="0"/>
-              </a:spcBef>
-              <a:spcAft>
-                <a:spcPts val="0"/>
-              </a:spcAft>
-              <a:buNone/>
-            </a:pPr>
-            <a:r>
-              <a:rPr lang="ru" sz="2600" b="1" i="0" u="none" strike="noStrike" cap="none">
-                <a:solidFill>
-                  <a:srgbClr val="C93E33"/>
-                </a:solidFill>
-                <a:latin typeface="Inter"/>
-                <a:ea typeface="Inter"/>
-                <a:cs typeface="Inter"/>
-                <a:sym typeface="Inter"/>
-              </a:rPr>
-              <a:t>Готово</a:t>
-            </a:r>
-            <a:endParaRPr sz="2625" i="0" u="none" strike="noStrike" cap="none">
-              <a:solidFill>
-                <a:srgbClr val="C93E33"/>
-              </a:solidFill>
-              <a:latin typeface="Inter"/>
-              <a:ea typeface="Inter"/>
-              <a:cs typeface="Inter"/>
-              <a:sym typeface="Inter"/>
-            </a:endParaRPr>
-          </a:p>
-        </p:txBody>
-      </p:sp>
-      <p:sp>
-        <p:nvSpPr>
-          <p:cNvPr id="225" name="Google Shape;225;p27"/>
-          <p:cNvSpPr/>
-          <p:nvPr/>
-        </p:nvSpPr>
-        <p:spPr>
-          <a:xfrm>
-            <a:off x="2634666" y="2967175"/>
-            <a:ext cx="1714500" cy="366600"/>
-          </a:xfrm>
-          <a:prstGeom prst="rect">
-            <a:avLst/>
-          </a:prstGeom>
-          <a:noFill/>
-          <a:ln>
-            <a:noFill/>
-          </a:ln>
-        </p:spPr>
-        <p:txBody>
-          <a:bodyPr spcFirstLastPara="1" wrap="square" lIns="0" tIns="0" rIns="0" bIns="0" anchor="t" anchorCtr="0">
-            <a:noAutofit/>
-          </a:bodyPr>
-          <a:lstStyle/>
-          <a:p>
-            <a:pPr marL="0" marR="0" lvl="0" indent="0" algn="l" rtl="0">
-              <a:lnSpc>
-                <a:spcPct val="111076"/>
-              </a:lnSpc>
-              <a:spcBef>
-                <a:spcPts val="0"/>
-              </a:spcBef>
-              <a:spcAft>
-                <a:spcPts val="0"/>
-              </a:spcAft>
-              <a:buNone/>
-            </a:pPr>
-            <a:r>
-              <a:rPr lang="ru" sz="2600" b="1" i="0" u="none" strike="noStrike" cap="none">
-                <a:solidFill>
-                  <a:srgbClr val="C93E33"/>
-                </a:solidFill>
-                <a:latin typeface="Inter"/>
-                <a:ea typeface="Inter"/>
-                <a:cs typeface="Inter"/>
-                <a:sym typeface="Inter"/>
-              </a:rPr>
-              <a:t>Тесты</a:t>
-            </a:r>
-            <a:endParaRPr sz="2625" i="0" u="none" strike="noStrike" cap="none">
-              <a:solidFill>
-                <a:srgbClr val="C93E33"/>
-              </a:solidFill>
-              <a:latin typeface="Inter"/>
-              <a:ea typeface="Inter"/>
-              <a:cs typeface="Inter"/>
-              <a:sym typeface="Inter"/>
-            </a:endParaRPr>
-          </a:p>
-        </p:txBody>
-      </p:sp>
-      <p:sp>
-        <p:nvSpPr>
-          <p:cNvPr id="226" name="Google Shape;226;p27"/>
-          <p:cNvSpPr/>
-          <p:nvPr/>
-        </p:nvSpPr>
-        <p:spPr>
-          <a:xfrm>
-            <a:off x="4793081" y="2967283"/>
-            <a:ext cx="1714500" cy="366600"/>
-          </a:xfrm>
-          <a:prstGeom prst="rect">
-            <a:avLst/>
-          </a:prstGeom>
-          <a:noFill/>
-          <a:ln>
-            <a:noFill/>
-          </a:ln>
-        </p:spPr>
-        <p:txBody>
-          <a:bodyPr spcFirstLastPara="1" wrap="square" lIns="0" tIns="0" rIns="0" bIns="0" anchor="t" anchorCtr="0">
-            <a:noAutofit/>
-          </a:bodyPr>
-          <a:lstStyle/>
-          <a:p>
-            <a:pPr marL="0" marR="0" lvl="0" indent="0" algn="l" rtl="0">
-              <a:lnSpc>
-                <a:spcPct val="111076"/>
-              </a:lnSpc>
-              <a:spcBef>
-                <a:spcPts val="0"/>
-              </a:spcBef>
-              <a:spcAft>
-                <a:spcPts val="0"/>
-              </a:spcAft>
-              <a:buNone/>
-            </a:pPr>
-            <a:r>
-              <a:rPr lang="ru" sz="2600" b="1" i="0" u="none" strike="noStrike" cap="none">
-                <a:solidFill>
-                  <a:srgbClr val="C93E33"/>
-                </a:solidFill>
-                <a:latin typeface="Inter"/>
-                <a:ea typeface="Inter"/>
-                <a:cs typeface="Inter"/>
-                <a:sym typeface="Inter"/>
-              </a:rPr>
-              <a:t>Дальше</a:t>
-            </a:r>
-            <a:endParaRPr sz="2625" i="0" u="none" strike="noStrike" cap="none">
-              <a:solidFill>
-                <a:srgbClr val="C93E33"/>
-              </a:solidFill>
-              <a:latin typeface="Inter"/>
-              <a:ea typeface="Inter"/>
-              <a:cs typeface="Inter"/>
-              <a:sym typeface="Inter"/>
-            </a:endParaRPr>
-          </a:p>
-        </p:txBody>
-      </p:sp>
-      <p:sp>
-        <p:nvSpPr>
-          <p:cNvPr id="227" name="Google Shape;227;p27"/>
-          <p:cNvSpPr/>
-          <p:nvPr/>
-        </p:nvSpPr>
-        <p:spPr>
-          <a:xfrm>
-            <a:off x="6951497" y="2967391"/>
-            <a:ext cx="1714500" cy="366600"/>
-          </a:xfrm>
-          <a:prstGeom prst="rect">
-            <a:avLst/>
-          </a:prstGeom>
-          <a:noFill/>
-          <a:ln>
-            <a:noFill/>
-          </a:ln>
-        </p:spPr>
-        <p:txBody>
-          <a:bodyPr spcFirstLastPara="1" wrap="square" lIns="0" tIns="0" rIns="0" bIns="0" anchor="t" anchorCtr="0">
-            <a:noAutofit/>
-          </a:bodyPr>
-          <a:lstStyle/>
-          <a:p>
-            <a:pPr marL="0" marR="0" lvl="0" indent="0" algn="l" rtl="0">
-              <a:lnSpc>
-                <a:spcPct val="111076"/>
-              </a:lnSpc>
-              <a:spcBef>
-                <a:spcPts val="0"/>
-              </a:spcBef>
-              <a:spcAft>
-                <a:spcPts val="0"/>
-              </a:spcAft>
-              <a:buNone/>
-            </a:pPr>
-            <a:r>
-              <a:rPr lang="ru-RU" sz="2600" b="1" dirty="0">
-                <a:solidFill>
-                  <a:srgbClr val="C93E33"/>
-                </a:solidFill>
-                <a:latin typeface="Inter"/>
-                <a:ea typeface="Inter"/>
-                <a:cs typeface="Inter"/>
-                <a:sym typeface="Inter"/>
-              </a:rPr>
-              <a:t>Запрос</a:t>
-            </a:r>
-            <a:endParaRPr sz="2625" i="0" u="none" strike="noStrike" cap="none" dirty="0">
-              <a:solidFill>
-                <a:srgbClr val="C93E33"/>
-              </a:solidFill>
-              <a:latin typeface="Inter"/>
-              <a:ea typeface="Inter"/>
-              <a:cs typeface="Inter"/>
-              <a:sym typeface="Inter"/>
-            </a:endParaRPr>
-          </a:p>
-        </p:txBody>
-      </p:sp>
-      <p:sp>
-        <p:nvSpPr>
-          <p:cNvPr id="228" name="Google Shape;228;p27"/>
-          <p:cNvSpPr/>
-          <p:nvPr/>
-        </p:nvSpPr>
-        <p:spPr>
-          <a:xfrm>
-            <a:off x="475843" y="3444878"/>
-            <a:ext cx="105900" cy="105900"/>
-          </a:xfrm>
-          <a:prstGeom prst="ellipse">
-            <a:avLst/>
-          </a:prstGeom>
-          <a:solidFill>
-            <a:srgbClr val="C93E33"/>
-          </a:solidFill>
-          <a:ln>
-            <a:noFill/>
-          </a:ln>
-        </p:spPr>
-        <p:txBody>
-          <a:bodyPr spcFirstLastPara="1" wrap="square" lIns="91425" tIns="91425" rIns="91425" bIns="91425" anchor="ctr" anchorCtr="0">
-            <a:noAutofit/>
-          </a:bodyPr>
-          <a:lstStyle/>
-          <a:p>
-            <a:pPr marL="0" lvl="0" indent="0" algn="l" rtl="0">
-              <a:spcBef>
-                <a:spcPts val="0"/>
-              </a:spcBef>
-              <a:spcAft>
-                <a:spcPts val="0"/>
-              </a:spcAft>
-              <a:buNone/>
-            </a:pPr>
-            <a:endParaRPr/>
-          </a:p>
-        </p:txBody>
-      </p:sp>
-      <p:sp>
-        <p:nvSpPr>
-          <p:cNvPr id="229" name="Google Shape;229;p27"/>
-          <p:cNvSpPr/>
-          <p:nvPr/>
-        </p:nvSpPr>
-        <p:spPr>
-          <a:xfrm>
-            <a:off x="2636307" y="3441738"/>
-            <a:ext cx="105900" cy="105900"/>
-          </a:xfrm>
-          <a:prstGeom prst="ellipse">
-            <a:avLst/>
-          </a:prstGeom>
-          <a:solidFill>
-            <a:srgbClr val="C93E33"/>
-          </a:solidFill>
-          <a:ln>
-            <a:noFill/>
-          </a:ln>
-        </p:spPr>
-        <p:txBody>
-          <a:bodyPr spcFirstLastPara="1" wrap="square" lIns="91425" tIns="91425" rIns="91425" bIns="91425" anchor="ctr" anchorCtr="0">
-            <a:noAutofit/>
-          </a:bodyPr>
-          <a:lstStyle/>
-          <a:p>
-            <a:pPr marL="0" lvl="0" indent="0" algn="l" rtl="0">
-              <a:spcBef>
-                <a:spcPts val="0"/>
-              </a:spcBef>
-              <a:spcAft>
-                <a:spcPts val="0"/>
-              </a:spcAft>
-              <a:buNone/>
-            </a:pPr>
-            <a:endParaRPr/>
-          </a:p>
-        </p:txBody>
-      </p:sp>
-      <p:sp>
-        <p:nvSpPr>
-          <p:cNvPr id="230" name="Google Shape;230;p27"/>
-          <p:cNvSpPr/>
-          <p:nvPr/>
-        </p:nvSpPr>
-        <p:spPr>
-          <a:xfrm>
-            <a:off x="6952593" y="3438598"/>
-            <a:ext cx="105900" cy="105900"/>
-          </a:xfrm>
-          <a:prstGeom prst="ellipse">
-            <a:avLst/>
-          </a:prstGeom>
-          <a:solidFill>
-            <a:srgbClr val="8F2F27"/>
-          </a:solidFill>
-          <a:ln>
-            <a:noFill/>
-          </a:ln>
-        </p:spPr>
-        <p:txBody>
-          <a:bodyPr spcFirstLastPara="1" wrap="square" lIns="91425" tIns="91425" rIns="91425" bIns="91425" anchor="ctr" anchorCtr="0">
-            <a:noAutofit/>
-          </a:bodyPr>
-          <a:lstStyle/>
-          <a:p>
-            <a:pPr marL="0" lvl="0" indent="0" algn="l" rtl="0">
-              <a:spcBef>
-                <a:spcPts val="0"/>
-              </a:spcBef>
-              <a:spcAft>
-                <a:spcPts val="0"/>
-              </a:spcAft>
-              <a:buNone/>
-            </a:pPr>
-            <a:endParaRPr/>
-          </a:p>
-        </p:txBody>
-      </p:sp>
-      <p:sp>
-        <p:nvSpPr>
-          <p:cNvPr id="231" name="Google Shape;231;p27"/>
-          <p:cNvSpPr/>
-          <p:nvPr/>
-        </p:nvSpPr>
-        <p:spPr>
-          <a:xfrm>
-            <a:off x="4792129" y="3441738"/>
-            <a:ext cx="105900" cy="105900"/>
-          </a:xfrm>
-          <a:prstGeom prst="ellipse">
-            <a:avLst/>
-          </a:prstGeom>
-          <a:solidFill>
-            <a:srgbClr val="C93E33"/>
-          </a:solidFill>
-          <a:ln>
-            <a:noFill/>
-          </a:ln>
-        </p:spPr>
-        <p:txBody>
-          <a:bodyPr spcFirstLastPara="1" wrap="square" lIns="91425" tIns="91425" rIns="91425" bIns="91425" anchor="ctr" anchorCtr="0">
-            <a:noAutofit/>
-          </a:bodyPr>
-          <a:lstStyle/>
-          <a:p>
-            <a:pPr marL="0" lvl="0" indent="0" algn="l" rtl="0">
-              <a:spcBef>
-                <a:spcPts val="0"/>
-              </a:spcBef>
-              <a:spcAft>
-                <a:spcPts val="0"/>
-              </a:spcAft>
-              <a:buNone/>
-            </a:pPr>
-            <a:endParaRPr/>
-          </a:p>
-        </p:txBody>
-      </p:sp>
-      <p:cxnSp>
-        <p:nvCxnSpPr>
-          <p:cNvPr id="232" name="Google Shape;232;p27"/>
-          <p:cNvCxnSpPr/>
-          <p:nvPr/>
-        </p:nvCxnSpPr>
-        <p:spPr>
-          <a:xfrm>
-            <a:off x="7005223" y="3496259"/>
-            <a:ext cx="1667100" cy="0"/>
-          </a:xfrm>
-          <a:prstGeom prst="straightConnector1">
-            <a:avLst/>
-          </a:prstGeom>
-          <a:solidFill>
-            <a:srgbClr val="000000"/>
-          </a:solidFill>
-          <a:ln w="21150" cap="flat" cmpd="sng">
-            <a:solidFill>
-              <a:srgbClr val="C93E33"/>
-            </a:solidFill>
-            <a:prstDash val="solid"/>
-            <a:round/>
-            <a:headEnd type="none" w="sm" len="sm"/>
-            <a:tailEnd type="none" w="sm" len="sm"/>
-          </a:ln>
-        </p:spPr>
-      </p:cxnSp>
-      <p:pic>
-        <p:nvPicPr>
-          <p:cNvPr id="233" name="Google Shape;233;p27"/>
-          <p:cNvPicPr preferRelativeResize="0"/>
-          <p:nvPr/>
-        </p:nvPicPr>
-        <p:blipFill>
-          <a:blip r:embed="rId3">
-            <a:alphaModFix/>
-          </a:blip>
-          <a:stretch>
-            <a:fillRect/>
-          </a:stretch>
-        </p:blipFill>
-        <p:spPr>
-          <a:xfrm>
-            <a:off x="476250" y="320900"/>
-            <a:ext cx="1536343" cy="424600"/>
-          </a:xfrm>
-          <a:prstGeom prst="rect">
-            <a:avLst/>
-          </a:prstGeom>
-          <a:noFill/>
-          <a:ln>
-            <a:noFill/>
-          </a:ln>
-        </p:spPr>
-      </p:pic>
-    </p:spTree>
-  </p:cSld>
-  <p:clrMapOvr>
-    <a:masterClrMapping/>
-  </p:clrMapOvr>
-</p:sld>
-</file>
-
-<file path=ppt/slides/slide6.xml><?xml version="1.0" encoding="utf-8"?>
 <p:sld xmlns:a="http://schemas.openxmlformats.org/drawingml/2006/main" xmlns:r="http://schemas.openxmlformats.org/officeDocument/2006/relationships" xmlns:p="http://schemas.openxmlformats.org/presentationml/2006/main">
   <p:cSld>
     <p:bg>
@@ -11489,7 +10295,33 @@
                   <a:srgbClr val="161412"/>
                 </a:solidFill>
               </a:rPr>
-              <a:t>   Новая или подозрительная зависимость идёт на вопрос до установки; lifecycle-скрипт пакета ловится по факту</a:t>
+              <a:t>   Новая или подозрительная зависимость идёт на вопрос до установки; </a:t>
+            </a:r>
+          </a:p>
+          <a:p>
+            <a:r>
+              <a:rPr lang="ru-RU" sz="1200" dirty="0">
+                <a:solidFill>
+                  <a:srgbClr val="161412"/>
+                </a:solidFill>
+              </a:rPr>
+              <a:t>	</a:t>
+            </a:r>
+            <a:r>
+              <a:rPr lang="ru-RU" sz="1200" dirty="0" err="1">
+                <a:solidFill>
+                  <a:srgbClr val="161412"/>
+                </a:solidFill>
+              </a:rPr>
+              <a:t>lifecycle</a:t>
+            </a:r>
+            <a:r>
+              <a:rPr lang="ru-RU" sz="1200" dirty="0">
+                <a:solidFill>
+                  <a:srgbClr val="161412"/>
+                </a:solidFill>
+              </a:rPr>
+              <a:t>-скрипт пакета ловится по факту</a:t>
             </a:r>
           </a:p>
         </p:txBody>
@@ -11858,16 +10690,360 @@
 </p:sld>
 </file>
 
-<file path=ppt/slides/slide7.xml><?xml version="1.0" encoding="utf-8"?>
-<p:sld xmlns:a="http://schemas.openxmlformats.org/drawingml/2006/main" xmlns:p="http://schemas.openxmlformats.org/presentationml/2006/main" xmlns:r="http://schemas.openxmlformats.org/officeDocument/2006/relationships">
+<file path=ppt/slides/slide5.xml><?xml version="1.0" encoding="utf-8"?>
+<p:sld xmlns:a="http://schemas.openxmlformats.org/drawingml/2006/main" xmlns:r="http://schemas.openxmlformats.org/officeDocument/2006/relationships" xmlns:p="http://schemas.openxmlformats.org/presentationml/2006/main">
   <p:cSld>
+    <p:bg>
+      <p:bgPr>
+        <a:solidFill>
+          <a:srgbClr val="C93E33"/>
+        </a:solidFill>
+        <a:effectLst/>
+      </p:bgPr>
+    </p:bg>
     <p:spTree>
       <p:nvGrpSpPr>
-        <p:cNvPr id="1" name=""/>
+        <p:cNvPr id="1" name="Shape 182"/>
         <p:cNvGrpSpPr/>
         <p:nvPr/>
       </p:nvGrpSpPr>
-      <p:grpSpPr/>
+      <p:grpSpPr>
+        <a:xfrm>
+          <a:off x="0" y="0"/>
+          <a:ext cx="0" cy="0"/>
+          <a:chOff x="0" y="0"/>
+          <a:chExt cx="0" cy="0"/>
+        </a:xfrm>
+      </p:grpSpPr>
+      <p:pic>
+        <p:nvPicPr>
+          <p:cNvPr id="185" name="Google Shape;185;p24"/>
+          <p:cNvPicPr preferRelativeResize="0"/>
+          <p:nvPr/>
+        </p:nvPicPr>
+        <p:blipFill>
+          <a:blip r:embed="rId2">
+            <a:alphaModFix/>
+          </a:blip>
+          <a:stretch>
+            <a:fillRect/>
+          </a:stretch>
+        </p:blipFill>
+        <p:spPr>
+          <a:xfrm>
+            <a:off x="301422" y="307125"/>
+            <a:ext cx="1673574" cy="462524"/>
+          </a:xfrm>
+          <a:prstGeom prst="rect">
+            <a:avLst/>
+          </a:prstGeom>
+          <a:noFill/>
+          <a:ln>
+            <a:noFill/>
+          </a:ln>
+        </p:spPr>
+      </p:pic>
+      <p:sp>
+        <p:nvSpPr>
+          <p:cNvPr id="960" name="demo-title"/>
+          <p:cNvSpPr>
+            <a:spLocks noGrp="1"/>
+          </p:cNvSpPr>
+          <p:nvPr/>
+        </p:nvSpPr>
+        <p:spPr>
+          <a:xfrm>
+            <a:off x="469900" y="914400"/>
+            <a:ext cx="11430000" cy="762000"/>
+          </a:xfrm>
+          <a:prstGeom prst="rect">
+            <a:avLst/>
+          </a:prstGeom>
+        </p:spPr>
+        <p:txBody>
+          <a:bodyPr/>
+          <a:lstStyle/>
+          <a:p>
+            <a:r>
+              <a:rPr lang="ru-RU" sz="2800" b="1">
+                <a:solidFill>
+                  <a:srgbClr val="FFFFFF"/>
+                </a:solidFill>
+              </a:rPr>
+              <a:t>Один сценарий: без защиты и с защитой</a:t>
+            </a:r>
+          </a:p>
+        </p:txBody>
+      </p:sp>
+      <p:sp>
+        <p:nvSpPr>
+          <p:cNvPr id="971" name="card0"/>
+          <p:cNvSpPr/>
+          <p:nvPr/>
+        </p:nvSpPr>
+        <p:spPr>
+          <a:xfrm>
+            <a:off x="469900" y="1676400"/>
+            <a:ext cx="8811260" cy="711200"/>
+          </a:xfrm>
+          <a:prstGeom prst="roundRect">
+            <a:avLst>
+              <a:gd name="adj" fmla="val 12000"/>
+            </a:avLst>
+          </a:prstGeom>
+          <a:solidFill>
+            <a:srgbClr val="FFFFFF"/>
+          </a:solidFill>
+        </p:spPr>
+        <p:txBody>
+          <a:bodyPr lIns="228600" tIns="76200" rIns="228600" bIns="50800" anchor="ctr"/>
+          <a:lstStyle/>
+          <a:p>
+            <a:r>
+              <a:rPr lang="ru-RU" sz="1100" b="1" spc="120">
+                <a:solidFill>
+                  <a:srgbClr val="C93E33"/>
+                </a:solidFill>
+              </a:rPr>
+              <a:t>1 · ОДИН СЦЕНАРИЙ</a:t>
+            </a:r>
+          </a:p>
+          <a:p>
+            <a:r>
+              <a:rPr lang="ru-RU" sz="1600" b="1">
+                <a:solidFill>
+                  <a:srgbClr val="161412"/>
+                </a:solidFill>
+              </a:rPr>
+              <a:t>Агент чинит баг и читает README со спрятанной инструкцией</a:t>
+            </a:r>
+          </a:p>
+        </p:txBody>
+      </p:sp>
+      <p:sp>
+        <p:nvSpPr>
+          <p:cNvPr id="972" name="card1"/>
+          <p:cNvSpPr/>
+          <p:nvPr/>
+        </p:nvSpPr>
+        <p:spPr>
+          <a:xfrm>
+            <a:off x="469900" y="2476500"/>
+            <a:ext cx="8811260" cy="711200"/>
+          </a:xfrm>
+          <a:prstGeom prst="roundRect">
+            <a:avLst>
+              <a:gd name="adj" fmla="val 12000"/>
+            </a:avLst>
+          </a:prstGeom>
+          <a:solidFill>
+            <a:srgbClr val="111318"/>
+          </a:solidFill>
+        </p:spPr>
+        <p:txBody>
+          <a:bodyPr lIns="228600" tIns="76200" rIns="228600" bIns="50800" anchor="ctr"/>
+          <a:lstStyle/>
+          <a:p>
+            <a:r>
+              <a:rPr lang="ru-RU" sz="1100" b="1" spc="120">
+                <a:solidFill>
+                  <a:srgbClr val="F6D8D5"/>
+                </a:solidFill>
+              </a:rPr>
+              <a:t>2 · БЕЗ ЗАЩИТЫ (--auto)</a:t>
+            </a:r>
+          </a:p>
+          <a:p>
+            <a:r>
+              <a:rPr lang="ru-RU" sz="1600" b="1">
+                <a:solidFill>
+                  <a:srgbClr val="FFFFFF"/>
+                </a:solidFill>
+              </a:rPr>
+              <a:t>Агент поддаётся — файл автозапуска появляется в проекте</a:t>
+            </a:r>
+          </a:p>
+        </p:txBody>
+      </p:sp>
+      <p:sp>
+        <p:nvSpPr>
+          <p:cNvPr id="973" name="card2"/>
+          <p:cNvSpPr/>
+          <p:nvPr/>
+        </p:nvSpPr>
+        <p:spPr>
+          <a:xfrm>
+            <a:off x="469900" y="3276600"/>
+            <a:ext cx="8811260" cy="711200"/>
+          </a:xfrm>
+          <a:prstGeom prst="roundRect">
+            <a:avLst>
+              <a:gd name="adj" fmla="val 12000"/>
+            </a:avLst>
+          </a:prstGeom>
+          <a:solidFill>
+            <a:srgbClr val="FFFFFF"/>
+          </a:solidFill>
+        </p:spPr>
+        <p:txBody>
+          <a:bodyPr lIns="228600" tIns="76200" rIns="228600" bIns="50800" anchor="ctr"/>
+          <a:lstStyle/>
+          <a:p>
+            <a:r>
+              <a:rPr lang="ru-RU" sz="1100" b="1" spc="120">
+                <a:solidFill>
+                  <a:srgbClr val="C93E33"/>
+                </a:solidFill>
+              </a:rPr>
+              <a:t>3 · С ЗАЩИТОЙ (auto mode)</a:t>
+            </a:r>
+          </a:p>
+          <a:p>
+            <a:r>
+              <a:rPr lang="ru-RU" sz="1600" b="1">
+                <a:solidFill>
+                  <a:srgbClr val="161412"/>
+                </a:solidFill>
+              </a:rPr>
+              <a:t>Действие выполняется в копии, эффект проверяется по факту</a:t>
+            </a:r>
+          </a:p>
+        </p:txBody>
+      </p:sp>
+      <p:sp>
+        <p:nvSpPr>
+          <p:cNvPr id="974" name="card3"/>
+          <p:cNvSpPr/>
+          <p:nvPr/>
+        </p:nvSpPr>
+        <p:spPr>
+          <a:xfrm>
+            <a:off x="469900" y="4076700"/>
+            <a:ext cx="8811260" cy="711200"/>
+          </a:xfrm>
+          <a:prstGeom prst="roundRect">
+            <a:avLst>
+              <a:gd name="adj" fmla="val 12000"/>
+            </a:avLst>
+          </a:prstGeom>
+          <a:solidFill>
+            <a:srgbClr val="161412"/>
+          </a:solidFill>
+        </p:spPr>
+        <p:txBody>
+          <a:bodyPr lIns="228600" tIns="76200" rIns="228600" bIns="50800" anchor="ctr"/>
+          <a:lstStyle/>
+          <a:p>
+            <a:r>
+              <a:rPr lang="ru-RU" sz="1100" b="1" spc="120">
+                <a:solidFill>
+                  <a:srgbClr val="F6D8D5"/>
+                </a:solidFill>
+              </a:rPr>
+              <a:t>4 · ИТОГ</a:t>
+            </a:r>
+          </a:p>
+          <a:p>
+            <a:r>
+              <a:rPr lang="ru-RU" sz="1600" b="1">
+                <a:solidFill>
+                  <a:srgbClr val="8FD49B"/>
+                </a:solidFill>
+              </a:rPr>
+              <a:t>DENY — файла нет в проекте, починка бага применена, агент продолжил</a:t>
+            </a:r>
+          </a:p>
+        </p:txBody>
+      </p:sp>
+    </p:spTree>
+  </p:cSld>
+  <p:clrMapOvr>
+    <a:masterClrMapping/>
+  </p:clrMapOvr>
+</p:sld>
+</file>
+
+<file path=ppt/slides/slide6.xml><?xml version="1.0" encoding="utf-8"?>
+<p:sld xmlns:a="http://schemas.openxmlformats.org/drawingml/2006/main" xmlns:r="http://schemas.openxmlformats.org/officeDocument/2006/relationships" xmlns:p="http://schemas.openxmlformats.org/presentationml/2006/main">
+  <p:cSld>
+    <p:bg>
+      <p:bgPr>
+        <a:solidFill>
+          <a:srgbClr val="FFF6FF"/>
+        </a:solidFill>
+        <a:effectLst/>
+      </p:bgPr>
+    </p:bg>
+    <p:spTree>
+      <p:nvGrpSpPr>
+        <p:cNvPr id="1" name="Shape 214"/>
+        <p:cNvGrpSpPr/>
+        <p:nvPr/>
+      </p:nvGrpSpPr>
+      <p:grpSpPr>
+        <a:xfrm>
+          <a:off x="0" y="0"/>
+          <a:ext cx="0" cy="0"/>
+          <a:chOff x="0" y="0"/>
+          <a:chExt cx="0" cy="0"/>
+        </a:xfrm>
+      </p:grpSpPr>
+      <p:cxnSp>
+        <p:nvCxnSpPr>
+          <p:cNvPr id="215" name="Google Shape;215;p27"/>
+          <p:cNvCxnSpPr/>
+          <p:nvPr/>
+        </p:nvCxnSpPr>
+        <p:spPr>
+          <a:xfrm>
+            <a:off x="2636307" y="3494757"/>
+            <a:ext cx="2213400" cy="0"/>
+          </a:xfrm>
+          <a:prstGeom prst="straightConnector1">
+            <a:avLst/>
+          </a:prstGeom>
+          <a:solidFill>
+            <a:srgbClr val="000000"/>
+          </a:solidFill>
+          <a:ln w="21150" cap="flat" cmpd="sng">
+            <a:solidFill>
+              <a:srgbClr val="C93E33"/>
+            </a:solidFill>
+            <a:prstDash val="solid"/>
+            <a:round/>
+            <a:headEnd type="none" w="sm" len="sm"/>
+            <a:tailEnd type="none" w="sm" len="sm"/>
+          </a:ln>
+        </p:spPr>
+      </p:cxnSp>
+      <p:cxnSp>
+        <p:nvCxnSpPr>
+          <p:cNvPr id="216" name="Google Shape;216;p27"/>
+          <p:cNvCxnSpPr/>
+          <p:nvPr/>
+        </p:nvCxnSpPr>
+        <p:spPr>
+          <a:xfrm>
+            <a:off x="4843468" y="3491617"/>
+            <a:ext cx="2213400" cy="0"/>
+          </a:xfrm>
+          <a:prstGeom prst="straightConnector1">
+            <a:avLst/>
+          </a:prstGeom>
+          <a:solidFill>
+            <a:srgbClr val="000000"/>
+          </a:solidFill>
+          <a:ln w="21150" cap="flat" cmpd="sng">
+            <a:solidFill>
+              <a:srgbClr val="C93E33"/>
+            </a:solidFill>
+            <a:prstDash val="solid"/>
+            <a:round/>
+            <a:headEnd type="none" w="sm" len="sm"/>
+            <a:tailEnd type="none" w="sm" len="sm"/>
+          </a:ln>
+        </p:spPr>
+      </p:cxnSp>
       <p:sp>
         <p:nvSpPr>
           <p:cNvPr id="217" name="Google Shape;217;p27"/>
@@ -11915,7 +11091,7 @@
                 <a:cs typeface="Inter"/>
                 <a:sym typeface="Inter"/>
               </a:rPr>
-              <a:t>Команда и распределение задач</a:t>
+              <a:t>Работает в Kilo Code — дальше в </a:t>
             </a:r>
             <a:r>
               <a:rPr lang="ru-RU" sz="2600" b="1" i="0" u="none" strike="noStrike" cap="none" dirty="0">
@@ -11927,7 +11103,7 @@
                 <a:cs typeface="Inter"/>
                 <a:sym typeface="Inter"/>
               </a:rPr>
-              <a:t/>
+              <a:t>сообщество</a:t>
             </a:r>
             <a:endParaRPr sz="2625" i="0" u="none" strike="noStrike" cap="none" dirty="0">
               <a:solidFill>
@@ -11941,17 +11117,1077 @@
           </a:p>
         </p:txBody>
       </p:sp>
+      <p:sp>
+        <p:nvSpPr>
+          <p:cNvPr id="218" name="Google Shape;218;p27"/>
+          <p:cNvSpPr/>
+          <p:nvPr/>
+        </p:nvSpPr>
+        <p:spPr>
+          <a:xfrm>
+            <a:off x="8173388" y="416837"/>
+            <a:ext cx="494100" cy="267900"/>
+          </a:xfrm>
+          <a:prstGeom prst="rect">
+            <a:avLst/>
+          </a:prstGeom>
+          <a:noFill/>
+          <a:ln>
+            <a:noFill/>
+          </a:ln>
+        </p:spPr>
+        <p:txBody>
+          <a:bodyPr spcFirstLastPara="1" wrap="square" lIns="0" tIns="0" rIns="0" bIns="0" anchor="t" anchorCtr="0">
+            <a:noAutofit/>
+          </a:bodyPr>
+          <a:lstStyle/>
+          <a:p>
+            <a:pPr marL="0" marR="0" lvl="0" indent="0" algn="l" rtl="0">
+              <a:lnSpc>
+                <a:spcPct val="124058"/>
+              </a:lnSpc>
+              <a:spcBef>
+                <a:spcPts val="0"/>
+              </a:spcBef>
+              <a:spcAft>
+                <a:spcPts val="0"/>
+              </a:spcAft>
+              <a:buNone/>
+            </a:pPr>
+            <a:endParaRPr sz="1688" b="0" i="0" u="none" strike="noStrike" cap="none">
+              <a:solidFill>
+                <a:schemeClr val="dk1"/>
+              </a:solidFill>
+              <a:latin typeface="Calibri"/>
+              <a:ea typeface="Calibri"/>
+              <a:cs typeface="Calibri"/>
+              <a:sym typeface="Calibri"/>
+            </a:endParaRPr>
+          </a:p>
+        </p:txBody>
+      </p:sp>
+      <p:cxnSp>
+        <p:nvCxnSpPr>
+          <p:cNvPr id="219" name="Google Shape;219;p27"/>
+          <p:cNvCxnSpPr/>
+          <p:nvPr/>
+        </p:nvCxnSpPr>
+        <p:spPr>
+          <a:xfrm>
+            <a:off x="475843" y="3497897"/>
+            <a:ext cx="2213400" cy="0"/>
+          </a:xfrm>
+          <a:prstGeom prst="straightConnector1">
+            <a:avLst/>
+          </a:prstGeom>
+          <a:solidFill>
+            <a:srgbClr val="000000"/>
+          </a:solidFill>
+          <a:ln w="21150" cap="flat" cmpd="sng">
+            <a:solidFill>
+              <a:srgbClr val="C93E33"/>
+            </a:solidFill>
+            <a:prstDash val="solid"/>
+            <a:round/>
+            <a:headEnd type="none" w="sm" len="sm"/>
+            <a:tailEnd type="none" w="sm" len="sm"/>
+          </a:ln>
+        </p:spPr>
+      </p:cxnSp>
+      <p:sp>
+        <p:nvSpPr>
+          <p:cNvPr id="220" name="Google Shape;220;p27"/>
+          <p:cNvSpPr/>
+          <p:nvPr/>
+        </p:nvSpPr>
+        <p:spPr>
+          <a:xfrm>
+            <a:off x="476250" y="3717492"/>
+            <a:ext cx="1714500" cy="952500"/>
+          </a:xfrm>
+          <a:prstGeom prst="rect">
+            <a:avLst/>
+          </a:prstGeom>
+          <a:noFill/>
+          <a:ln>
+            <a:noFill/>
+          </a:ln>
+        </p:spPr>
+        <p:txBody>
+          <a:bodyPr spcFirstLastPara="1" wrap="square" lIns="0" tIns="0" rIns="0" bIns="0" anchor="t" anchorCtr="0">
+            <a:noAutofit/>
+          </a:bodyPr>
+          <a:lstStyle/>
+          <a:p>
+            <a:pPr marL="0" marR="0" lvl="0" indent="0" algn="l" rtl="0">
+              <a:lnSpc>
+                <a:spcPct val="125000"/>
+              </a:lnSpc>
+              <a:spcBef>
+                <a:spcPts val="0"/>
+              </a:spcBef>
+              <a:spcAft>
+                <a:spcPts val="0"/>
+              </a:spcAft>
+              <a:buNone/>
+            </a:pPr>
+            <a:r>
+              <a:rPr lang="en-US" sz="1200" i="0" u="none" strike="noStrike" cap="none" dirty="0">
+                <a:solidFill>
+                  <a:srgbClr val="000000"/>
+                </a:solidFill>
+                <a:latin typeface="Arial"/>
+                <a:ea typeface="Arial"/>
+                <a:cs typeface="Arial"/>
+                <a:sym typeface="Arial"/>
+              </a:rPr>
+              <a:t>PoC </a:t>
+            </a:r>
+            <a:r>
+              <a:rPr lang="ru" sz="1200" i="0" u="none" strike="noStrike" cap="none" dirty="0">
+                <a:solidFill>
+                  <a:srgbClr val="000000"/>
+                </a:solidFill>
+                <a:latin typeface="Arial"/>
+                <a:ea typeface="Arial"/>
+                <a:cs typeface="Arial"/>
+                <a:sym typeface="Arial"/>
+              </a:rPr>
+              <a:t>в Kilo Code: правила, изолированная копия, перенос только после проверки</a:t>
+            </a:r>
+            <a:endParaRPr sz="1200" b="0" i="0" u="none" strike="noStrike" cap="none" dirty="0">
+              <a:solidFill>
+                <a:schemeClr val="dk1"/>
+              </a:solidFill>
+              <a:latin typeface="Calibri"/>
+              <a:ea typeface="Calibri"/>
+              <a:cs typeface="Calibri"/>
+              <a:sym typeface="Calibri"/>
+            </a:endParaRPr>
+          </a:p>
+        </p:txBody>
+      </p:sp>
+      <p:sp>
+        <p:nvSpPr>
+          <p:cNvPr id="221" name="Google Shape;221;p27"/>
+          <p:cNvSpPr/>
+          <p:nvPr/>
+        </p:nvSpPr>
+        <p:spPr>
+          <a:xfrm>
+            <a:off x="2634524" y="3717492"/>
+            <a:ext cx="1868896" cy="1426008"/>
+          </a:xfrm>
+          <a:prstGeom prst="rect">
+            <a:avLst/>
+          </a:prstGeom>
+          <a:noFill/>
+          <a:ln>
+            <a:noFill/>
+          </a:ln>
+        </p:spPr>
+        <p:txBody>
+          <a:bodyPr spcFirstLastPara="1" wrap="square" lIns="0" tIns="0" rIns="0" bIns="0" anchor="t" anchorCtr="0">
+            <a:noAutofit/>
+          </a:bodyPr>
+          <a:lstStyle/>
+          <a:p>
+            <a:pPr marL="0" marR="0" lvl="0" indent="0" algn="l" rtl="0">
+              <a:lnSpc>
+                <a:spcPct val="125000"/>
+              </a:lnSpc>
+              <a:spcBef>
+                <a:spcPts val="0"/>
+              </a:spcBef>
+              <a:spcAft>
+                <a:spcPts val="0"/>
+              </a:spcAft>
+              <a:buNone/>
+            </a:pPr>
+            <a:r>
+              <a:rPr lang="ru" sz="1200" i="0" u="none" strike="noStrike" cap="none" dirty="0">
+                <a:solidFill>
+                  <a:srgbClr val="000000"/>
+                </a:solidFill>
+                <a:latin typeface="Arial"/>
+                <a:ea typeface="Arial"/>
+                <a:cs typeface="Arial"/>
+                <a:sym typeface="Arial"/>
+              </a:rPr>
+              <a:t>Демо 6 сценариев, хеш решений совпал на macOS и Linux</a:t>
+            </a:r>
+            <a:r>
+              <a:rPr lang="en-US" sz="1200" i="0" u="none" strike="noStrike" cap="none" dirty="0">
+                <a:solidFill>
+                  <a:srgbClr val="000000"/>
+                </a:solidFill>
+                <a:latin typeface="Arial"/>
+                <a:ea typeface="Arial"/>
+                <a:cs typeface="Arial"/>
+                <a:sym typeface="Arial"/>
+              </a:rPr>
+              <a:t> – </a:t>
+            </a:r>
+            <a:r>
+              <a:rPr lang="ru-RU" sz="1200" i="0" u="none" strike="noStrike" cap="none" dirty="0">
+                <a:solidFill>
+                  <a:srgbClr val="000000"/>
+                </a:solidFill>
+                <a:latin typeface="Arial"/>
+                <a:ea typeface="Arial"/>
+                <a:cs typeface="Arial"/>
+                <a:sym typeface="Arial"/>
+              </a:rPr>
+              <a:t>живой A/B на 132 запусках: без защиты атаки проходят в 78%, с защитой — 0</a:t>
+            </a:r>
+            <a:endParaRPr sz="1200" b="0" i="0" u="none" strike="noStrike" cap="none" dirty="0">
+              <a:solidFill>
+                <a:schemeClr val="dk1"/>
+              </a:solidFill>
+              <a:latin typeface="Calibri"/>
+              <a:ea typeface="Calibri"/>
+              <a:cs typeface="Calibri"/>
+              <a:sym typeface="Calibri"/>
+            </a:endParaRPr>
+          </a:p>
+        </p:txBody>
+      </p:sp>
+      <p:sp>
+        <p:nvSpPr>
+          <p:cNvPr id="222" name="Google Shape;222;p27"/>
+          <p:cNvSpPr/>
+          <p:nvPr/>
+        </p:nvSpPr>
+        <p:spPr>
+          <a:xfrm>
+            <a:off x="4793914" y="3717491"/>
+            <a:ext cx="1716600" cy="1203217"/>
+          </a:xfrm>
+          <a:prstGeom prst="rect">
+            <a:avLst/>
+          </a:prstGeom>
+          <a:noFill/>
+          <a:ln>
+            <a:noFill/>
+          </a:ln>
+        </p:spPr>
+        <p:txBody>
+          <a:bodyPr spcFirstLastPara="1" wrap="square" lIns="0" tIns="0" rIns="0" bIns="0" anchor="t" anchorCtr="0">
+            <a:noAutofit/>
+          </a:bodyPr>
+          <a:lstStyle/>
+          <a:p>
+            <a:pPr marL="0" marR="0" lvl="0" indent="0" algn="l" rtl="0">
+              <a:lnSpc>
+                <a:spcPct val="125000"/>
+              </a:lnSpc>
+              <a:spcBef>
+                <a:spcPts val="0"/>
+              </a:spcBef>
+              <a:spcAft>
+                <a:spcPts val="0"/>
+              </a:spcAft>
+              <a:buNone/>
+            </a:pPr>
+            <a:r>
+              <a:rPr lang="ru" sz="1200" i="0" u="none" strike="noStrike" cap="none" dirty="0">
+                <a:solidFill>
+                  <a:srgbClr val="000000"/>
+                </a:solidFill>
+                <a:latin typeface="Arial"/>
+                <a:ea typeface="Arial"/>
+                <a:cs typeface="Arial"/>
+                <a:sym typeface="Arial"/>
+              </a:rPr>
+              <a:t>Расширение покрытия тестами, уточнение метрик, </a:t>
+            </a:r>
+            <a:r>
+              <a:rPr lang="ru" sz="1200" dirty="0"/>
+              <a:t>о</a:t>
+            </a:r>
+            <a:r>
+              <a:rPr lang="ru" sz="1200" i="0" u="none" strike="noStrike" cap="none" dirty="0">
+                <a:solidFill>
+                  <a:srgbClr val="000000"/>
+                </a:solidFill>
+                <a:latin typeface="Arial"/>
+                <a:ea typeface="Arial"/>
+                <a:cs typeface="Arial"/>
+                <a:sym typeface="Arial"/>
+              </a:rPr>
+              <a:t>формление </a:t>
+            </a:r>
+            <a:r>
+              <a:rPr lang="en-US" sz="1200" i="0" u="none" strike="noStrike" cap="none" dirty="0">
+                <a:solidFill>
+                  <a:srgbClr val="000000"/>
+                </a:solidFill>
+                <a:latin typeface="Arial"/>
+                <a:ea typeface="Arial"/>
+                <a:cs typeface="Arial"/>
+                <a:sym typeface="Arial"/>
+              </a:rPr>
+              <a:t>PR </a:t>
+            </a:r>
+            <a:r>
+              <a:rPr lang="ru-RU" sz="1200" i="0" u="none" strike="noStrike" cap="none" dirty="0">
+                <a:solidFill>
+                  <a:srgbClr val="000000"/>
+                </a:solidFill>
+                <a:latin typeface="Arial"/>
+                <a:ea typeface="Arial"/>
+                <a:cs typeface="Arial"/>
+                <a:sym typeface="Arial"/>
+              </a:rPr>
+              <a:t>в сообщество </a:t>
+            </a:r>
+            <a:r>
+              <a:rPr lang="en-US" sz="1200" dirty="0"/>
+              <a:t>Kilo Code </a:t>
+            </a:r>
+            <a:r>
+              <a:rPr lang="ru-RU" sz="1200" dirty="0"/>
+              <a:t>для продвижения нашего подхода</a:t>
+            </a:r>
+            <a:endParaRPr sz="1200" b="0" i="0" u="none" strike="noStrike" cap="none" dirty="0">
+              <a:solidFill>
+                <a:schemeClr val="dk1"/>
+              </a:solidFill>
+              <a:latin typeface="Calibri"/>
+              <a:ea typeface="Calibri"/>
+              <a:cs typeface="Calibri"/>
+              <a:sym typeface="Calibri"/>
+            </a:endParaRPr>
+          </a:p>
+        </p:txBody>
+      </p:sp>
+      <p:sp>
+        <p:nvSpPr>
+          <p:cNvPr id="223" name="Google Shape;223;p27"/>
+          <p:cNvSpPr/>
+          <p:nvPr/>
+        </p:nvSpPr>
+        <p:spPr>
+          <a:xfrm>
+            <a:off x="6954421" y="3717697"/>
+            <a:ext cx="1714200" cy="952500"/>
+          </a:xfrm>
+          <a:prstGeom prst="rect">
+            <a:avLst/>
+          </a:prstGeom>
+          <a:noFill/>
+          <a:ln>
+            <a:noFill/>
+          </a:ln>
+        </p:spPr>
+        <p:txBody>
+          <a:bodyPr spcFirstLastPara="1" wrap="square" lIns="0" tIns="0" rIns="0" bIns="0" anchor="t" anchorCtr="0">
+            <a:noAutofit/>
+          </a:bodyPr>
+          <a:lstStyle/>
+          <a:p>
+            <a:pPr marL="0" marR="0" lvl="0" indent="0" algn="l" rtl="0">
+              <a:lnSpc>
+                <a:spcPct val="125000"/>
+              </a:lnSpc>
+              <a:spcBef>
+                <a:spcPts val="0"/>
+              </a:spcBef>
+              <a:spcAft>
+                <a:spcPts val="0"/>
+              </a:spcAft>
+              <a:buNone/>
+            </a:pPr>
+            <a:r>
+              <a:rPr lang="ru" sz="1200" i="0" u="none" strike="noStrike" cap="none">
+                <a:solidFill>
+                  <a:srgbClr val="000000"/>
+                </a:solidFill>
+                <a:latin typeface="Arial"/>
+                <a:ea typeface="Arial"/>
+                <a:cs typeface="Arial"/>
+                <a:sym typeface="Arial"/>
+              </a:rPr>
+              <a:t>Попробуйте подход в своей работе — это расширит набор тестов и уточнит оценку</a:t>
+            </a:r>
+            <a:endParaRPr sz="1200" b="0" i="0" u="none" strike="noStrike" cap="none">
+              <a:solidFill>
+                <a:schemeClr val="dk1"/>
+              </a:solidFill>
+              <a:latin typeface="Calibri"/>
+              <a:ea typeface="Calibri"/>
+              <a:cs typeface="Calibri"/>
+              <a:sym typeface="Calibri"/>
+            </a:endParaRPr>
+          </a:p>
+        </p:txBody>
+      </p:sp>
+      <p:sp>
+        <p:nvSpPr>
+          <p:cNvPr id="224" name="Google Shape;224;p27"/>
+          <p:cNvSpPr/>
+          <p:nvPr/>
+        </p:nvSpPr>
+        <p:spPr>
+          <a:xfrm>
+            <a:off x="476250" y="2967000"/>
+            <a:ext cx="1714500" cy="366600"/>
+          </a:xfrm>
+          <a:prstGeom prst="rect">
+            <a:avLst/>
+          </a:prstGeom>
+          <a:noFill/>
+          <a:ln>
+            <a:noFill/>
+          </a:ln>
+        </p:spPr>
+        <p:txBody>
+          <a:bodyPr spcFirstLastPara="1" wrap="square" lIns="0" tIns="0" rIns="0" bIns="0" anchor="t" anchorCtr="0">
+            <a:noAutofit/>
+          </a:bodyPr>
+          <a:lstStyle/>
+          <a:p>
+            <a:pPr marL="0" marR="0" lvl="0" indent="0" algn="l" rtl="0">
+              <a:lnSpc>
+                <a:spcPct val="111076"/>
+              </a:lnSpc>
+              <a:spcBef>
+                <a:spcPts val="0"/>
+              </a:spcBef>
+              <a:spcAft>
+                <a:spcPts val="0"/>
+              </a:spcAft>
+              <a:buNone/>
+            </a:pPr>
+            <a:r>
+              <a:rPr lang="ru" sz="2600" b="1" i="0" u="none" strike="noStrike" cap="none">
+                <a:solidFill>
+                  <a:srgbClr val="C93E33"/>
+                </a:solidFill>
+                <a:latin typeface="Inter"/>
+                <a:ea typeface="Inter"/>
+                <a:cs typeface="Inter"/>
+                <a:sym typeface="Inter"/>
+              </a:rPr>
+              <a:t>Готово</a:t>
+            </a:r>
+            <a:endParaRPr sz="2625" i="0" u="none" strike="noStrike" cap="none">
+              <a:solidFill>
+                <a:srgbClr val="C93E33"/>
+              </a:solidFill>
+              <a:latin typeface="Inter"/>
+              <a:ea typeface="Inter"/>
+              <a:cs typeface="Inter"/>
+              <a:sym typeface="Inter"/>
+            </a:endParaRPr>
+          </a:p>
+        </p:txBody>
+      </p:sp>
+      <p:sp>
+        <p:nvSpPr>
+          <p:cNvPr id="225" name="Google Shape;225;p27"/>
+          <p:cNvSpPr/>
+          <p:nvPr/>
+        </p:nvSpPr>
+        <p:spPr>
+          <a:xfrm>
+            <a:off x="2634666" y="2967175"/>
+            <a:ext cx="1714500" cy="366600"/>
+          </a:xfrm>
+          <a:prstGeom prst="rect">
+            <a:avLst/>
+          </a:prstGeom>
+          <a:noFill/>
+          <a:ln>
+            <a:noFill/>
+          </a:ln>
+        </p:spPr>
+        <p:txBody>
+          <a:bodyPr spcFirstLastPara="1" wrap="square" lIns="0" tIns="0" rIns="0" bIns="0" anchor="t" anchorCtr="0">
+            <a:noAutofit/>
+          </a:bodyPr>
+          <a:lstStyle/>
+          <a:p>
+            <a:pPr marL="0" marR="0" lvl="0" indent="0" algn="l" rtl="0">
+              <a:lnSpc>
+                <a:spcPct val="111076"/>
+              </a:lnSpc>
+              <a:spcBef>
+                <a:spcPts val="0"/>
+              </a:spcBef>
+              <a:spcAft>
+                <a:spcPts val="0"/>
+              </a:spcAft>
+              <a:buNone/>
+            </a:pPr>
+            <a:r>
+              <a:rPr lang="ru" sz="2600" b="1" i="0" u="none" strike="noStrike" cap="none">
+                <a:solidFill>
+                  <a:srgbClr val="C93E33"/>
+                </a:solidFill>
+                <a:latin typeface="Inter"/>
+                <a:ea typeface="Inter"/>
+                <a:cs typeface="Inter"/>
+                <a:sym typeface="Inter"/>
+              </a:rPr>
+              <a:t>Тесты</a:t>
+            </a:r>
+            <a:endParaRPr sz="2625" i="0" u="none" strike="noStrike" cap="none">
+              <a:solidFill>
+                <a:srgbClr val="C93E33"/>
+              </a:solidFill>
+              <a:latin typeface="Inter"/>
+              <a:ea typeface="Inter"/>
+              <a:cs typeface="Inter"/>
+              <a:sym typeface="Inter"/>
+            </a:endParaRPr>
+          </a:p>
+        </p:txBody>
+      </p:sp>
+      <p:sp>
+        <p:nvSpPr>
+          <p:cNvPr id="226" name="Google Shape;226;p27"/>
+          <p:cNvSpPr/>
+          <p:nvPr/>
+        </p:nvSpPr>
+        <p:spPr>
+          <a:xfrm>
+            <a:off x="4793081" y="2967283"/>
+            <a:ext cx="1714500" cy="366600"/>
+          </a:xfrm>
+          <a:prstGeom prst="rect">
+            <a:avLst/>
+          </a:prstGeom>
+          <a:noFill/>
+          <a:ln>
+            <a:noFill/>
+          </a:ln>
+        </p:spPr>
+        <p:txBody>
+          <a:bodyPr spcFirstLastPara="1" wrap="square" lIns="0" tIns="0" rIns="0" bIns="0" anchor="t" anchorCtr="0">
+            <a:noAutofit/>
+          </a:bodyPr>
+          <a:lstStyle/>
+          <a:p>
+            <a:pPr marL="0" marR="0" lvl="0" indent="0" algn="l" rtl="0">
+              <a:lnSpc>
+                <a:spcPct val="111076"/>
+              </a:lnSpc>
+              <a:spcBef>
+                <a:spcPts val="0"/>
+              </a:spcBef>
+              <a:spcAft>
+                <a:spcPts val="0"/>
+              </a:spcAft>
+              <a:buNone/>
+            </a:pPr>
+            <a:r>
+              <a:rPr lang="ru" sz="2600" b="1" i="0" u="none" strike="noStrike" cap="none">
+                <a:solidFill>
+                  <a:srgbClr val="C93E33"/>
+                </a:solidFill>
+                <a:latin typeface="Inter"/>
+                <a:ea typeface="Inter"/>
+                <a:cs typeface="Inter"/>
+                <a:sym typeface="Inter"/>
+              </a:rPr>
+              <a:t>Дальше</a:t>
+            </a:r>
+            <a:endParaRPr sz="2625" i="0" u="none" strike="noStrike" cap="none">
+              <a:solidFill>
+                <a:srgbClr val="C93E33"/>
+              </a:solidFill>
+              <a:latin typeface="Inter"/>
+              <a:ea typeface="Inter"/>
+              <a:cs typeface="Inter"/>
+              <a:sym typeface="Inter"/>
+            </a:endParaRPr>
+          </a:p>
+        </p:txBody>
+      </p:sp>
+      <p:sp>
+        <p:nvSpPr>
+          <p:cNvPr id="227" name="Google Shape;227;p27"/>
+          <p:cNvSpPr/>
+          <p:nvPr/>
+        </p:nvSpPr>
+        <p:spPr>
+          <a:xfrm>
+            <a:off x="6951497" y="2967391"/>
+            <a:ext cx="1714500" cy="366600"/>
+          </a:xfrm>
+          <a:prstGeom prst="rect">
+            <a:avLst/>
+          </a:prstGeom>
+          <a:noFill/>
+          <a:ln>
+            <a:noFill/>
+          </a:ln>
+        </p:spPr>
+        <p:txBody>
+          <a:bodyPr spcFirstLastPara="1" wrap="square" lIns="0" tIns="0" rIns="0" bIns="0" anchor="t" anchorCtr="0">
+            <a:noAutofit/>
+          </a:bodyPr>
+          <a:lstStyle/>
+          <a:p>
+            <a:pPr marL="0" marR="0" lvl="0" indent="0" algn="l" rtl="0">
+              <a:lnSpc>
+                <a:spcPct val="111076"/>
+              </a:lnSpc>
+              <a:spcBef>
+                <a:spcPts val="0"/>
+              </a:spcBef>
+              <a:spcAft>
+                <a:spcPts val="0"/>
+              </a:spcAft>
+              <a:buNone/>
+            </a:pPr>
+            <a:r>
+              <a:rPr lang="ru-RU" sz="2600" b="1" dirty="0">
+                <a:solidFill>
+                  <a:srgbClr val="C93E33"/>
+                </a:solidFill>
+                <a:latin typeface="Inter"/>
+                <a:ea typeface="Inter"/>
+                <a:cs typeface="Inter"/>
+                <a:sym typeface="Inter"/>
+              </a:rPr>
+              <a:t>Запрос</a:t>
+            </a:r>
+            <a:endParaRPr sz="2625" i="0" u="none" strike="noStrike" cap="none" dirty="0">
+              <a:solidFill>
+                <a:srgbClr val="C93E33"/>
+              </a:solidFill>
+              <a:latin typeface="Inter"/>
+              <a:ea typeface="Inter"/>
+              <a:cs typeface="Inter"/>
+              <a:sym typeface="Inter"/>
+            </a:endParaRPr>
+          </a:p>
+        </p:txBody>
+      </p:sp>
+      <p:sp>
+        <p:nvSpPr>
+          <p:cNvPr id="228" name="Google Shape;228;p27"/>
+          <p:cNvSpPr/>
+          <p:nvPr/>
+        </p:nvSpPr>
+        <p:spPr>
+          <a:xfrm>
+            <a:off x="475843" y="3444878"/>
+            <a:ext cx="105900" cy="105900"/>
+          </a:xfrm>
+          <a:prstGeom prst="ellipse">
+            <a:avLst/>
+          </a:prstGeom>
+          <a:solidFill>
+            <a:srgbClr val="C93E33"/>
+          </a:solidFill>
+          <a:ln>
+            <a:noFill/>
+          </a:ln>
+        </p:spPr>
+        <p:txBody>
+          <a:bodyPr spcFirstLastPara="1" wrap="square" lIns="91425" tIns="91425" rIns="91425" bIns="91425" anchor="ctr" anchorCtr="0">
+            <a:noAutofit/>
+          </a:bodyPr>
+          <a:lstStyle/>
+          <a:p>
+            <a:pPr marL="0" lvl="0" indent="0" algn="l" rtl="0">
+              <a:spcBef>
+                <a:spcPts val="0"/>
+              </a:spcBef>
+              <a:spcAft>
+                <a:spcPts val="0"/>
+              </a:spcAft>
+              <a:buNone/>
+            </a:pPr>
+            <a:endParaRPr/>
+          </a:p>
+        </p:txBody>
+      </p:sp>
+      <p:sp>
+        <p:nvSpPr>
+          <p:cNvPr id="229" name="Google Shape;229;p27"/>
+          <p:cNvSpPr/>
+          <p:nvPr/>
+        </p:nvSpPr>
+        <p:spPr>
+          <a:xfrm>
+            <a:off x="2636307" y="3441738"/>
+            <a:ext cx="105900" cy="105900"/>
+          </a:xfrm>
+          <a:prstGeom prst="ellipse">
+            <a:avLst/>
+          </a:prstGeom>
+          <a:solidFill>
+            <a:srgbClr val="C93E33"/>
+          </a:solidFill>
+          <a:ln>
+            <a:noFill/>
+          </a:ln>
+        </p:spPr>
+        <p:txBody>
+          <a:bodyPr spcFirstLastPara="1" wrap="square" lIns="91425" tIns="91425" rIns="91425" bIns="91425" anchor="ctr" anchorCtr="0">
+            <a:noAutofit/>
+          </a:bodyPr>
+          <a:lstStyle/>
+          <a:p>
+            <a:pPr marL="0" lvl="0" indent="0" algn="l" rtl="0">
+              <a:spcBef>
+                <a:spcPts val="0"/>
+              </a:spcBef>
+              <a:spcAft>
+                <a:spcPts val="0"/>
+              </a:spcAft>
+              <a:buNone/>
+            </a:pPr>
+            <a:endParaRPr/>
+          </a:p>
+        </p:txBody>
+      </p:sp>
+      <p:sp>
+        <p:nvSpPr>
+          <p:cNvPr id="230" name="Google Shape;230;p27"/>
+          <p:cNvSpPr/>
+          <p:nvPr/>
+        </p:nvSpPr>
+        <p:spPr>
+          <a:xfrm>
+            <a:off x="6952593" y="3438598"/>
+            <a:ext cx="105900" cy="105900"/>
+          </a:xfrm>
+          <a:prstGeom prst="ellipse">
+            <a:avLst/>
+          </a:prstGeom>
+          <a:solidFill>
+            <a:srgbClr val="8F2F27"/>
+          </a:solidFill>
+          <a:ln>
+            <a:noFill/>
+          </a:ln>
+        </p:spPr>
+        <p:txBody>
+          <a:bodyPr spcFirstLastPara="1" wrap="square" lIns="91425" tIns="91425" rIns="91425" bIns="91425" anchor="ctr" anchorCtr="0">
+            <a:noAutofit/>
+          </a:bodyPr>
+          <a:lstStyle/>
+          <a:p>
+            <a:pPr marL="0" lvl="0" indent="0" algn="l" rtl="0">
+              <a:spcBef>
+                <a:spcPts val="0"/>
+              </a:spcBef>
+              <a:spcAft>
+                <a:spcPts val="0"/>
+              </a:spcAft>
+              <a:buNone/>
+            </a:pPr>
+            <a:endParaRPr/>
+          </a:p>
+        </p:txBody>
+      </p:sp>
+      <p:sp>
+        <p:nvSpPr>
+          <p:cNvPr id="231" name="Google Shape;231;p27"/>
+          <p:cNvSpPr/>
+          <p:nvPr/>
+        </p:nvSpPr>
+        <p:spPr>
+          <a:xfrm>
+            <a:off x="4792129" y="3441738"/>
+            <a:ext cx="105900" cy="105900"/>
+          </a:xfrm>
+          <a:prstGeom prst="ellipse">
+            <a:avLst/>
+          </a:prstGeom>
+          <a:solidFill>
+            <a:srgbClr val="C93E33"/>
+          </a:solidFill>
+          <a:ln>
+            <a:noFill/>
+          </a:ln>
+        </p:spPr>
+        <p:txBody>
+          <a:bodyPr spcFirstLastPara="1" wrap="square" lIns="91425" tIns="91425" rIns="91425" bIns="91425" anchor="ctr" anchorCtr="0">
+            <a:noAutofit/>
+          </a:bodyPr>
+          <a:lstStyle/>
+          <a:p>
+            <a:pPr marL="0" lvl="0" indent="0" algn="l" rtl="0">
+              <a:spcBef>
+                <a:spcPts val="0"/>
+              </a:spcBef>
+              <a:spcAft>
+                <a:spcPts val="0"/>
+              </a:spcAft>
+              <a:buNone/>
+            </a:pPr>
+            <a:endParaRPr/>
+          </a:p>
+        </p:txBody>
+      </p:sp>
+      <p:cxnSp>
+        <p:nvCxnSpPr>
+          <p:cNvPr id="232" name="Google Shape;232;p27"/>
+          <p:cNvCxnSpPr/>
+          <p:nvPr/>
+        </p:nvCxnSpPr>
+        <p:spPr>
+          <a:xfrm>
+            <a:off x="7005223" y="3496259"/>
+            <a:ext cx="1667100" cy="0"/>
+          </a:xfrm>
+          <a:prstGeom prst="straightConnector1">
+            <a:avLst/>
+          </a:prstGeom>
+          <a:solidFill>
+            <a:srgbClr val="000000"/>
+          </a:solidFill>
+          <a:ln w="21150" cap="flat" cmpd="sng">
+            <a:solidFill>
+              <a:srgbClr val="C93E33"/>
+            </a:solidFill>
+            <a:prstDash val="solid"/>
+            <a:round/>
+            <a:headEnd type="none" w="sm" len="sm"/>
+            <a:tailEnd type="none" w="sm" len="sm"/>
+          </a:ln>
+        </p:spPr>
+      </p:cxnSp>
+      <p:pic>
+        <p:nvPicPr>
+          <p:cNvPr id="233" name="Google Shape;233;p27"/>
+          <p:cNvPicPr preferRelativeResize="0"/>
+          <p:nvPr/>
+        </p:nvPicPr>
+        <p:blipFill>
+          <a:blip r:embed="rId3">
+            <a:alphaModFix/>
+          </a:blip>
+          <a:stretch>
+            <a:fillRect/>
+          </a:stretch>
+        </p:blipFill>
+        <p:spPr>
+          <a:xfrm>
+            <a:off x="476250" y="320900"/>
+            <a:ext cx="1536343" cy="424600"/>
+          </a:xfrm>
+          <a:prstGeom prst="rect">
+            <a:avLst/>
+          </a:prstGeom>
+          <a:noFill/>
+          <a:ln>
+            <a:noFill/>
+          </a:ln>
+        </p:spPr>
+      </p:pic>
+    </p:spTree>
+  </p:cSld>
+  <p:clrMapOvr>
+    <a:masterClrMapping/>
+  </p:clrMapOvr>
+</p:sld>
+</file>
+
+<file path=ppt/slides/slide7.xml><?xml version="1.0" encoding="utf-8"?>
+<p:sld xmlns:a="http://schemas.openxmlformats.org/drawingml/2006/main" xmlns:r="http://schemas.openxmlformats.org/officeDocument/2006/relationships" xmlns:p="http://schemas.openxmlformats.org/presentationml/2006/main">
+  <p:cSld>
+    <p:bg>
+      <p:bgPr>
+        <a:solidFill>
+          <a:srgbClr val="FFF6FF"/>
+        </a:solidFill>
+        <a:effectLst/>
+      </p:bgPr>
+    </p:bg>
+    <p:spTree>
+      <p:nvGrpSpPr>
+        <p:cNvPr id="1" name="Shape 214">
+          <a:extLst>
+            <a:ext uri="{FF2B5EF4-FFF2-40B4-BE49-F238E27FC236}">
+              <a16:creationId xmlns:a16="http://schemas.microsoft.com/office/drawing/2014/main" id="{D33C5C4B-C9DC-8F9D-5CC7-2F5C4CCF3D52}"/>
+            </a:ext>
+          </a:extLst>
+        </p:cNvPr>
+        <p:cNvGrpSpPr/>
+        <p:nvPr/>
+      </p:nvGrpSpPr>
+      <p:grpSpPr>
+        <a:xfrm>
+          <a:off x="0" y="0"/>
+          <a:ext cx="0" cy="0"/>
+          <a:chOff x="0" y="0"/>
+          <a:chExt cx="0" cy="0"/>
+        </a:xfrm>
+      </p:grpSpPr>
+      <p:sp>
+        <p:nvSpPr>
+          <p:cNvPr id="217" name="Google Shape;217;p27">
+            <a:extLst>
+              <a:ext uri="{FF2B5EF4-FFF2-40B4-BE49-F238E27FC236}">
+                <a16:creationId xmlns:a16="http://schemas.microsoft.com/office/drawing/2014/main" id="{18A0E384-8DC6-5E05-F8DD-3182C291ED55}"/>
+              </a:ext>
+            </a:extLst>
+          </p:cNvPr>
+          <p:cNvSpPr/>
+          <p:nvPr/>
+        </p:nvSpPr>
+        <p:spPr>
+          <a:xfrm>
+            <a:off x="476250" y="1673096"/>
+            <a:ext cx="7606116" cy="503014"/>
+          </a:xfrm>
+          <a:prstGeom prst="rect">
+            <a:avLst/>
+          </a:prstGeom>
+          <a:noFill/>
+          <a:ln>
+            <a:noFill/>
+          </a:ln>
+        </p:spPr>
+        <p:txBody>
+          <a:bodyPr spcFirstLastPara="1" wrap="square" lIns="0" tIns="0" rIns="0" bIns="0" anchor="t" anchorCtr="0">
+            <a:noAutofit/>
+          </a:bodyPr>
+          <a:lstStyle/>
+          <a:p>
+            <a:pPr marL="0" marR="0" lvl="0" indent="0" algn="l" rtl="0">
+              <a:lnSpc>
+                <a:spcPct val="111076"/>
+              </a:lnSpc>
+              <a:spcBef>
+                <a:spcPts val="0"/>
+              </a:spcBef>
+              <a:spcAft>
+                <a:spcPts val="0"/>
+              </a:spcAft>
+              <a:buNone/>
+            </a:pPr>
+            <a:endParaRPr sz="2625" i="0" u="none" strike="noStrike" cap="none" dirty="0">
+              <a:solidFill>
+                <a:schemeClr val="dk1"/>
+              </a:solidFill>
+              <a:latin typeface="Inter"/>
+              <a:ea typeface="Inter"/>
+              <a:cs typeface="Inter"/>
+              <a:sym typeface="Inter"/>
+            </a:endParaRPr>
+          </a:p>
+        </p:txBody>
+      </p:sp>
+      <p:sp>
+        <p:nvSpPr>
+          <p:cNvPr id="218" name="Google Shape;218;p27">
+            <a:extLst>
+              <a:ext uri="{FF2B5EF4-FFF2-40B4-BE49-F238E27FC236}">
+                <a16:creationId xmlns:a16="http://schemas.microsoft.com/office/drawing/2014/main" id="{1BDCA643-801D-F1A8-4DEC-9BBC5B4F1344}"/>
+              </a:ext>
+            </a:extLst>
+          </p:cNvPr>
+          <p:cNvSpPr/>
+          <p:nvPr/>
+        </p:nvSpPr>
+        <p:spPr>
+          <a:xfrm>
+            <a:off x="8173388" y="416837"/>
+            <a:ext cx="494100" cy="267900"/>
+          </a:xfrm>
+          <a:prstGeom prst="rect">
+            <a:avLst/>
+          </a:prstGeom>
+          <a:noFill/>
+          <a:ln>
+            <a:noFill/>
+          </a:ln>
+        </p:spPr>
+        <p:txBody>
+          <a:bodyPr spcFirstLastPara="1" wrap="square" lIns="0" tIns="0" rIns="0" bIns="0" anchor="t" anchorCtr="0">
+            <a:noAutofit/>
+          </a:bodyPr>
+          <a:lstStyle/>
+          <a:p>
+            <a:pPr marL="0" marR="0" lvl="0" indent="0" algn="l" rtl="0">
+              <a:lnSpc>
+                <a:spcPct val="124058"/>
+              </a:lnSpc>
+              <a:spcBef>
+                <a:spcPts val="0"/>
+              </a:spcBef>
+              <a:spcAft>
+                <a:spcPts val="0"/>
+              </a:spcAft>
+              <a:buNone/>
+            </a:pPr>
+            <a:endParaRPr sz="1688" b="0" i="0" u="none" strike="noStrike" cap="none">
+              <a:solidFill>
+                <a:schemeClr val="dk1"/>
+              </a:solidFill>
+              <a:latin typeface="Calibri"/>
+              <a:ea typeface="Calibri"/>
+              <a:cs typeface="Calibri"/>
+              <a:sym typeface="Calibri"/>
+            </a:endParaRPr>
+          </a:p>
+        </p:txBody>
+      </p:sp>
+      <p:pic>
+        <p:nvPicPr>
+          <p:cNvPr id="233" name="Google Shape;233;p27">
+            <a:extLst>
+              <a:ext uri="{FF2B5EF4-FFF2-40B4-BE49-F238E27FC236}">
+                <a16:creationId xmlns:a16="http://schemas.microsoft.com/office/drawing/2014/main" id="{C99905F7-726A-2C9F-8981-64A7DE4FACF2}"/>
+              </a:ext>
+            </a:extLst>
+          </p:cNvPr>
+          <p:cNvPicPr preferRelativeResize="0"/>
+          <p:nvPr/>
+        </p:nvPicPr>
+        <p:blipFill>
+          <a:blip r:embed="rId3">
+            <a:alphaModFix/>
+          </a:blip>
+          <a:stretch>
+            <a:fillRect/>
+          </a:stretch>
+        </p:blipFill>
+        <p:spPr>
+          <a:xfrm>
+            <a:off x="476250" y="320900"/>
+            <a:ext cx="1536343" cy="424600"/>
+          </a:xfrm>
+          <a:prstGeom prst="rect">
+            <a:avLst/>
+          </a:prstGeom>
+          <a:noFill/>
+          <a:ln>
+            <a:noFill/>
+          </a:ln>
+        </p:spPr>
+      </p:pic>
       <p:graphicFrame>
         <p:nvGraphicFramePr>
-          <p:cNvPr id="218" name="Table 217"/>
+          <p:cNvPr id="4" name="Table 217">
+            <a:extLst>
+              <a:ext uri="{FF2B5EF4-FFF2-40B4-BE49-F238E27FC236}">
+                <a16:creationId xmlns:a16="http://schemas.microsoft.com/office/drawing/2014/main" id="{CEF6777F-CF52-60B0-9473-34E11EF6F129}"/>
+              </a:ext>
+            </a:extLst>
+          </p:cNvPr>
           <p:cNvGraphicFramePr>
             <a:graphicFrameLocks noGrp="1"/>
           </p:cNvGraphicFramePr>
-          <p:nvPr/>
+          <p:nvPr>
+            <p:extLst>
+              <p:ext uri="{D42A27DB-BD31-4B8C-83A1-F6EECF244321}">
+                <p14:modId xmlns:p14="http://schemas.microsoft.com/office/powerpoint/2010/main" val="2204887147"/>
+              </p:ext>
+            </p:extLst>
+          </p:nvPr>
         </p:nvGraphicFramePr>
         <p:xfrm>
-          <a:off x="548640" y="1337310"/>
-          <a:ext cx="8046719" cy="3086100"/>
+          <a:off x="476250" y="1460806"/>
+          <a:ext cx="8046719" cy="3604596"/>
         </p:xfrm>
         <a:graphic>
           <a:graphicData uri="http://schemas.openxmlformats.org/drawingml/2006/table">
@@ -11960,19 +12196,43 @@
                 <a:tableStyleId>{5C22544A-7EE6-4342-B048-85BDC9FD1C3A}</a:tableStyleId>
               </a:tblPr>
               <a:tblGrid>
-                <a:gridCol w="1448409"/>
-                <a:gridCol w="2092147"/>
-                <a:gridCol w="3218688"/>
-                <a:gridCol w="1287475"/>
+                <a:gridCol w="1448409">
+                  <a:extLst>
+                    <a:ext uri="{9D8B030D-6E8A-4147-A177-3AD203B41FA5}">
+                      <a16:colId xmlns:a16="http://schemas.microsoft.com/office/drawing/2014/main" val="20000"/>
+                    </a:ext>
+                  </a:extLst>
+                </a:gridCol>
+                <a:gridCol w="2092147">
+                  <a:extLst>
+                    <a:ext uri="{9D8B030D-6E8A-4147-A177-3AD203B41FA5}">
+                      <a16:colId xmlns:a16="http://schemas.microsoft.com/office/drawing/2014/main" val="20001"/>
+                    </a:ext>
+                  </a:extLst>
+                </a:gridCol>
+                <a:gridCol w="3218688">
+                  <a:extLst>
+                    <a:ext uri="{9D8B030D-6E8A-4147-A177-3AD203B41FA5}">
+                      <a16:colId xmlns:a16="http://schemas.microsoft.com/office/drawing/2014/main" val="20002"/>
+                    </a:ext>
+                  </a:extLst>
+                </a:gridCol>
+                <a:gridCol w="1287475">
+                  <a:extLst>
+                    <a:ext uri="{9D8B030D-6E8A-4147-A177-3AD203B41FA5}">
+                      <a16:colId xmlns:a16="http://schemas.microsoft.com/office/drawing/2014/main" val="20003"/>
+                    </a:ext>
+                  </a:extLst>
+                </a:gridCol>
               </a:tblGrid>
-              <a:tr h="771525">
+              <a:tr h="822011">
                 <a:tc>
                   <a:txBody>
                     <a:bodyPr/>
                     <a:lstStyle/>
                     <a:p>
                       <a:r>
-                        <a:rPr sz="1100" b="1">
+                        <a:rPr sz="1100" b="1" dirty="0" err="1">
                           <a:solidFill>
                             <a:srgbClr val="C93E33"/>
                           </a:solidFill>
@@ -11980,6 +12240,12 @@
                         </a:rPr>
                         <a:t>Участник</a:t>
                       </a:r>
+                      <a:endParaRPr sz="1100" b="1" dirty="0">
+                        <a:solidFill>
+                          <a:srgbClr val="C93E33"/>
+                        </a:solidFill>
+                        <a:latin typeface="Inter"/>
+                      </a:endParaRPr>
                     </a:p>
                   </a:txBody>
                   <a:tcPr>
@@ -12038,7 +12304,7 @@
                     <a:lstStyle/>
                     <a:p>
                       <a:r>
-                        <a:rPr sz="1100" b="1">
+                        <a:rPr sz="1100" b="1" dirty="0" err="1">
                           <a:solidFill>
                             <a:srgbClr val="C93E33"/>
                           </a:solidFill>
@@ -12046,6 +12312,12 @@
                         </a:rPr>
                         <a:t>Участие</a:t>
                       </a:r>
+                      <a:endParaRPr sz="1100" b="1" dirty="0">
+                        <a:solidFill>
+                          <a:srgbClr val="C93E33"/>
+                        </a:solidFill>
+                        <a:latin typeface="Inter"/>
+                      </a:endParaRPr>
                     </a:p>
                   </a:txBody>
                   <a:tcPr>
@@ -12054,8 +12326,13 @@
                     </a:solidFill>
                   </a:tcPr>
                 </a:tc>
+                <a:extLst>
+                  <a:ext uri="{0D108BD9-81ED-4DB2-BD59-A6C34878D82A}">
+                    <a16:rowId xmlns:a16="http://schemas.microsoft.com/office/drawing/2014/main" val="10000"/>
+                  </a:ext>
+                </a:extLst>
               </a:tr>
-              <a:tr h="771525">
+              <a:tr h="1138563">
                 <a:tc>
                   <a:txBody>
                     <a:bodyPr/>
@@ -12084,13 +12361,509 @@
                     <a:lstStyle/>
                     <a:p>
                       <a:r>
-                        <a:rPr sz="1100" b="0">
+                        <a:rPr sz="1100" b="0" dirty="0" err="1">
                           <a:solidFill>
                             <a:srgbClr val="161412"/>
                           </a:solidFill>
                           <a:latin typeface="Inter"/>
                         </a:rPr>
-                        <a:t>Продакт и проджект: постановка, метрики, материалы, приёмка</a:t>
+                        <a:t>Продакт</a:t>
+                      </a:r>
+                      <a:r>
+                        <a:rPr sz="1100" b="0" dirty="0">
+                          <a:solidFill>
+                            <a:srgbClr val="161412"/>
+                          </a:solidFill>
+                          <a:latin typeface="Inter"/>
+                        </a:rPr>
+                        <a:t> и </a:t>
+                      </a:r>
+                      <a:r>
+                        <a:rPr sz="1100" b="0" dirty="0" err="1">
+                          <a:solidFill>
+                            <a:srgbClr val="161412"/>
+                          </a:solidFill>
+                          <a:latin typeface="Inter"/>
+                        </a:rPr>
+                        <a:t>проджект</a:t>
+                      </a:r>
+                      <a:r>
+                        <a:rPr sz="1100" b="0" dirty="0">
+                          <a:solidFill>
+                            <a:srgbClr val="161412"/>
+                          </a:solidFill>
+                          <a:latin typeface="Inter"/>
+                        </a:rPr>
+                        <a:t>: </a:t>
+                      </a:r>
+                      <a:r>
+                        <a:rPr sz="1100" b="0" dirty="0" err="1">
+                          <a:solidFill>
+                            <a:srgbClr val="161412"/>
+                          </a:solidFill>
+                          <a:latin typeface="Inter"/>
+                        </a:rPr>
+                        <a:t>постановка</a:t>
+                      </a:r>
+                      <a:r>
+                        <a:rPr sz="1100" b="0" dirty="0">
+                          <a:solidFill>
+                            <a:srgbClr val="161412"/>
+                          </a:solidFill>
+                          <a:latin typeface="Inter"/>
+                        </a:rPr>
+                        <a:t>, </a:t>
+                      </a:r>
+                      <a:r>
+                        <a:rPr sz="1100" b="0" dirty="0" err="1">
+                          <a:solidFill>
+                            <a:srgbClr val="161412"/>
+                          </a:solidFill>
+                          <a:latin typeface="Inter"/>
+                        </a:rPr>
+                        <a:t>метрики</a:t>
+                      </a:r>
+                      <a:r>
+                        <a:rPr sz="1100" b="0" dirty="0">
+                          <a:solidFill>
+                            <a:srgbClr val="161412"/>
+                          </a:solidFill>
+                          <a:latin typeface="Inter"/>
+                        </a:rPr>
+                        <a:t>, </a:t>
+                      </a:r>
+                      <a:r>
+                        <a:rPr sz="1100" b="0" dirty="0" err="1">
+                          <a:solidFill>
+                            <a:srgbClr val="161412"/>
+                          </a:solidFill>
+                          <a:latin typeface="Inter"/>
+                        </a:rPr>
+                        <a:t>материалы</a:t>
+                      </a:r>
+                      <a:r>
+                        <a:rPr sz="1100" b="0" dirty="0">
+                          <a:solidFill>
+                            <a:srgbClr val="161412"/>
+                          </a:solidFill>
+                          <a:latin typeface="Inter"/>
+                        </a:rPr>
+                        <a:t>, </a:t>
+                      </a:r>
+                      <a:r>
+                        <a:rPr sz="1100" b="0" dirty="0" err="1">
+                          <a:solidFill>
+                            <a:srgbClr val="161412"/>
+                          </a:solidFill>
+                          <a:latin typeface="Inter"/>
+                        </a:rPr>
+                        <a:t>приёмка</a:t>
+                      </a:r>
+                      <a:endParaRPr sz="1100" b="0" dirty="0">
+                        <a:solidFill>
+                          <a:srgbClr val="161412"/>
+                        </a:solidFill>
+                        <a:latin typeface="Inter"/>
+                      </a:endParaRPr>
+                    </a:p>
+                  </a:txBody>
+                  <a:tcPr>
+                    <a:solidFill>
+                      <a:srgbClr val="FFFFFF"/>
+                    </a:solidFill>
+                  </a:tcPr>
+                </a:tc>
+                <a:tc>
+                  <a:txBody>
+                    <a:bodyPr/>
+                    <a:lstStyle/>
+                    <a:p>
+                      <a:r>
+                        <a:rPr sz="1100" b="0" dirty="0" err="1">
+                          <a:solidFill>
+                            <a:srgbClr val="161412"/>
+                          </a:solidFill>
+                          <a:latin typeface="Inter"/>
+                        </a:rPr>
+                        <a:t>Границы</a:t>
+                      </a:r>
+                      <a:r>
+                        <a:rPr sz="1100" b="0" dirty="0">
+                          <a:solidFill>
+                            <a:srgbClr val="161412"/>
+                          </a:solidFill>
+                          <a:latin typeface="Inter"/>
+                        </a:rPr>
+                        <a:t> MVP и </a:t>
+                      </a:r>
+                      <a:r>
+                        <a:rPr sz="1100" b="0" dirty="0" err="1">
+                          <a:solidFill>
+                            <a:srgbClr val="161412"/>
+                          </a:solidFill>
+                          <a:latin typeface="Inter"/>
+                        </a:rPr>
+                        <a:t>критерии</a:t>
+                      </a:r>
+                      <a:r>
+                        <a:rPr sz="1100" b="0" dirty="0">
+                          <a:solidFill>
+                            <a:srgbClr val="161412"/>
+                          </a:solidFill>
+                          <a:latin typeface="Inter"/>
+                        </a:rPr>
+                        <a:t>; </a:t>
+                      </a:r>
+                      <a:r>
+                        <a:rPr sz="1100" b="0" dirty="0" err="1">
+                          <a:solidFill>
+                            <a:srgbClr val="161412"/>
+                          </a:solidFill>
+                          <a:latin typeface="Inter"/>
+                        </a:rPr>
+                        <a:t>конкурентный</a:t>
+                      </a:r>
+                      <a:r>
+                        <a:rPr sz="1100" b="0" dirty="0">
+                          <a:solidFill>
+                            <a:srgbClr val="161412"/>
+                          </a:solidFill>
+                          <a:latin typeface="Inter"/>
+                        </a:rPr>
+                        <a:t> </a:t>
+                      </a:r>
+                      <a:r>
+                        <a:rPr sz="1100" b="0" dirty="0" err="1">
+                          <a:solidFill>
+                            <a:srgbClr val="161412"/>
+                          </a:solidFill>
+                          <a:latin typeface="Inter"/>
+                        </a:rPr>
+                        <a:t>анализ</a:t>
+                      </a:r>
+                      <a:r>
+                        <a:rPr sz="1100" b="0" dirty="0">
+                          <a:solidFill>
+                            <a:srgbClr val="161412"/>
+                          </a:solidFill>
+                          <a:latin typeface="Inter"/>
+                        </a:rPr>
+                        <a:t> 30+; </a:t>
+                      </a:r>
+                      <a:r>
+                        <a:rPr sz="1100" b="0" dirty="0" err="1">
+                          <a:solidFill>
+                            <a:srgbClr val="161412"/>
+                          </a:solidFill>
+                          <a:latin typeface="Inter"/>
+                        </a:rPr>
+                        <a:t>продуктовые</a:t>
+                      </a:r>
+                      <a:r>
+                        <a:rPr sz="1100" b="0" dirty="0">
+                          <a:solidFill>
+                            <a:srgbClr val="161412"/>
+                          </a:solidFill>
+                          <a:latin typeface="Inter"/>
+                        </a:rPr>
+                        <a:t> </a:t>
+                      </a:r>
+                      <a:r>
+                        <a:rPr sz="1100" b="0" dirty="0" err="1">
+                          <a:solidFill>
+                            <a:srgbClr val="161412"/>
+                          </a:solidFill>
+                          <a:latin typeface="Inter"/>
+                        </a:rPr>
+                        <a:t>материалы</a:t>
+                      </a:r>
+                      <a:r>
+                        <a:rPr sz="1100" b="0" dirty="0">
+                          <a:solidFill>
+                            <a:srgbClr val="161412"/>
+                          </a:solidFill>
+                          <a:latin typeface="Inter"/>
+                        </a:rPr>
+                        <a:t> и </a:t>
+                      </a:r>
+                      <a:r>
+                        <a:rPr lang="ru-RU" sz="1100" b="0" dirty="0">
+                          <a:solidFill>
+                            <a:srgbClr val="161412"/>
+                          </a:solidFill>
+                          <a:latin typeface="Inter"/>
+                        </a:rPr>
+                        <a:t>презентация</a:t>
+                      </a:r>
+                      <a:r>
+                        <a:rPr sz="1100" b="0" dirty="0">
+                          <a:solidFill>
+                            <a:srgbClr val="161412"/>
+                          </a:solidFill>
+                          <a:latin typeface="Inter"/>
+                        </a:rPr>
+                        <a:t>; </a:t>
+                      </a:r>
+                      <a:r>
+                        <a:rPr sz="1100" b="0" dirty="0" err="1">
+                          <a:solidFill>
+                            <a:srgbClr val="161412"/>
+                          </a:solidFill>
+                          <a:latin typeface="Inter"/>
+                        </a:rPr>
+                        <a:t>живые</a:t>
+                      </a:r>
+                      <a:r>
+                        <a:rPr sz="1100" b="0" dirty="0">
+                          <a:solidFill>
+                            <a:srgbClr val="161412"/>
+                          </a:solidFill>
+                          <a:latin typeface="Inter"/>
+                        </a:rPr>
+                        <a:t> </a:t>
+                      </a:r>
+                      <a:r>
+                        <a:rPr sz="1100" b="0" dirty="0" err="1">
+                          <a:solidFill>
+                            <a:srgbClr val="161412"/>
+                          </a:solidFill>
+                          <a:latin typeface="Inter"/>
+                        </a:rPr>
+                        <a:t>прогоны</a:t>
+                      </a:r>
+                      <a:r>
+                        <a:rPr sz="1100" b="0" dirty="0">
+                          <a:solidFill>
+                            <a:srgbClr val="161412"/>
+                          </a:solidFill>
+                          <a:latin typeface="Inter"/>
+                        </a:rPr>
+                        <a:t> </a:t>
+                      </a:r>
+                      <a:r>
+                        <a:rPr sz="1100" b="0" dirty="0" err="1">
+                          <a:solidFill>
+                            <a:srgbClr val="161412"/>
+                          </a:solidFill>
+                          <a:latin typeface="Inter"/>
+                        </a:rPr>
+                        <a:t>на</a:t>
+                      </a:r>
+                      <a:r>
+                        <a:rPr sz="1100" b="0" dirty="0">
+                          <a:solidFill>
+                            <a:srgbClr val="161412"/>
+                          </a:solidFill>
+                          <a:latin typeface="Inter"/>
+                        </a:rPr>
+                        <a:t> </a:t>
+                      </a:r>
+                      <a:r>
+                        <a:rPr sz="1100" b="0" dirty="0" err="1">
+                          <a:solidFill>
+                            <a:srgbClr val="161412"/>
+                          </a:solidFill>
+                          <a:latin typeface="Inter"/>
+                        </a:rPr>
+                        <a:t>модели</a:t>
+                      </a:r>
+                      <a:r>
+                        <a:rPr sz="1100" b="0" dirty="0">
+                          <a:solidFill>
+                            <a:srgbClr val="161412"/>
+                          </a:solidFill>
+                          <a:latin typeface="Inter"/>
+                        </a:rPr>
+                        <a:t>, </a:t>
+                      </a:r>
+                      <a:r>
+                        <a:rPr lang="ru-RU" sz="1100" b="0" dirty="0">
+                          <a:solidFill>
+                            <a:srgbClr val="161412"/>
+                          </a:solidFill>
+                          <a:latin typeface="Inter"/>
+                        </a:rPr>
+                        <a:t>поиск</a:t>
+                      </a:r>
+                      <a:r>
+                        <a:rPr sz="1100" b="0" dirty="0">
+                          <a:solidFill>
+                            <a:srgbClr val="161412"/>
+                          </a:solidFill>
+                          <a:latin typeface="Inter"/>
+                        </a:rPr>
+                        <a:t> </a:t>
+                      </a:r>
+                      <a:r>
+                        <a:rPr sz="1100" b="0" dirty="0" err="1">
+                          <a:solidFill>
+                            <a:srgbClr val="161412"/>
+                          </a:solidFill>
+                          <a:latin typeface="Inter"/>
+                        </a:rPr>
+                        <a:t>дефект</a:t>
+                      </a:r>
+                      <a:r>
+                        <a:rPr lang="ru-RU" sz="1100" b="0" dirty="0" err="1">
+                          <a:solidFill>
+                            <a:srgbClr val="161412"/>
+                          </a:solidFill>
+                          <a:latin typeface="Inter"/>
+                        </a:rPr>
+                        <a:t>ов</a:t>
+                      </a:r>
+                      <a:r>
+                        <a:rPr sz="1100" b="0" dirty="0">
+                          <a:solidFill>
+                            <a:srgbClr val="161412"/>
+                          </a:solidFill>
+                          <a:latin typeface="Inter"/>
+                        </a:rPr>
+                        <a:t> и </a:t>
+                      </a:r>
+                      <a:r>
+                        <a:rPr sz="1100" b="0" dirty="0" err="1">
+                          <a:solidFill>
+                            <a:srgbClr val="161412"/>
+                          </a:solidFill>
+                          <a:latin typeface="Inter"/>
+                        </a:rPr>
+                        <a:t>доработки</a:t>
+                      </a:r>
+                      <a:r>
+                        <a:rPr sz="1100" b="0" dirty="0">
+                          <a:solidFill>
+                            <a:srgbClr val="161412"/>
+                          </a:solidFill>
+                          <a:latin typeface="Inter"/>
+                        </a:rPr>
+                        <a:t>; </a:t>
+                      </a:r>
+                      <a:r>
+                        <a:rPr sz="1100" b="0" dirty="0" err="1">
+                          <a:solidFill>
+                            <a:srgbClr val="161412"/>
+                          </a:solidFill>
+                          <a:latin typeface="Inter"/>
+                        </a:rPr>
+                        <a:t>синхронизация</a:t>
+                      </a:r>
+                      <a:r>
+                        <a:rPr sz="1100" b="0" dirty="0">
+                          <a:solidFill>
+                            <a:srgbClr val="161412"/>
+                          </a:solidFill>
+                          <a:latin typeface="Inter"/>
+                        </a:rPr>
+                        <a:t> </a:t>
+                      </a:r>
+                      <a:r>
+                        <a:rPr sz="1100" b="0" dirty="0" err="1">
+                          <a:solidFill>
+                            <a:srgbClr val="161412"/>
+                          </a:solidFill>
+                          <a:latin typeface="Inter"/>
+                        </a:rPr>
+                        <a:t>артефактов</a:t>
+                      </a:r>
+                      <a:endParaRPr sz="1100" b="0" dirty="0">
+                        <a:solidFill>
+                          <a:srgbClr val="161412"/>
+                        </a:solidFill>
+                        <a:latin typeface="Inter"/>
+                      </a:endParaRPr>
+                    </a:p>
+                  </a:txBody>
+                  <a:tcPr>
+                    <a:solidFill>
+                      <a:srgbClr val="FFFFFF"/>
+                    </a:solidFill>
+                  </a:tcPr>
+                </a:tc>
+                <a:tc>
+                  <a:txBody>
+                    <a:bodyPr/>
+                    <a:lstStyle/>
+                    <a:p>
+                      <a:r>
+                        <a:rPr sz="1100" b="0" dirty="0" err="1">
+                          <a:solidFill>
+                            <a:srgbClr val="161412"/>
+                          </a:solidFill>
+                          <a:latin typeface="Inter"/>
+                        </a:rPr>
+                        <a:t>Весь</a:t>
+                      </a:r>
+                      <a:r>
+                        <a:rPr sz="1100" b="0" dirty="0">
+                          <a:solidFill>
+                            <a:srgbClr val="161412"/>
+                          </a:solidFill>
+                          <a:latin typeface="Inter"/>
+                        </a:rPr>
+                        <a:t> </a:t>
+                      </a:r>
+                      <a:r>
+                        <a:rPr sz="1100" b="0" dirty="0" err="1">
+                          <a:solidFill>
+                            <a:srgbClr val="161412"/>
+                          </a:solidFill>
+                          <a:latin typeface="Inter"/>
+                        </a:rPr>
+                        <a:t>хакатон</a:t>
+                      </a:r>
+                      <a:r>
+                        <a:rPr sz="1100" b="0" dirty="0">
+                          <a:solidFill>
+                            <a:srgbClr val="161412"/>
+                          </a:solidFill>
+                          <a:latin typeface="Inter"/>
+                        </a:rPr>
+                        <a:t>, </a:t>
+                      </a:r>
+                      <a:r>
+                        <a:rPr sz="1100" b="0" dirty="0" err="1">
+                          <a:solidFill>
+                            <a:srgbClr val="161412"/>
+                          </a:solidFill>
+                          <a:latin typeface="Inter"/>
+                        </a:rPr>
+                        <a:t>ежедневно</a:t>
+                      </a:r>
+                      <a:endParaRPr sz="1100" b="0" dirty="0">
+                        <a:solidFill>
+                          <a:srgbClr val="161412"/>
+                        </a:solidFill>
+                        <a:latin typeface="Inter"/>
+                      </a:endParaRPr>
+                    </a:p>
+                  </a:txBody>
+                  <a:tcPr>
+                    <a:solidFill>
+                      <a:srgbClr val="FFFFFF"/>
+                    </a:solidFill>
+                  </a:tcPr>
+                </a:tc>
+                <a:extLst>
+                  <a:ext uri="{0D108BD9-81ED-4DB2-BD59-A6C34878D82A}">
+                    <a16:rowId xmlns:a16="http://schemas.microsoft.com/office/drawing/2014/main" val="10001"/>
+                  </a:ext>
+                </a:extLst>
+              </a:tr>
+              <a:tr h="822011">
+                <a:tc>
+                  <a:txBody>
+                    <a:bodyPr/>
+                    <a:lstStyle/>
+                    <a:p>
+                      <a:r>
+                        <a:rPr sz="1100" b="1">
+                          <a:solidFill>
+                            <a:srgbClr val="161412"/>
+                          </a:solidFill>
+                          <a:latin typeface="Inter"/>
+                        </a:rPr>
+                        <a:t>Кирдяшкин Максим</a:t>
                       </a:r>
                     </a:p>
                   </a:txBody>
@@ -12106,14 +12879,318 @@
                     <a:lstStyle/>
                     <a:p>
                       <a:r>
-                        <a:rPr sz="1100" b="0">
+                        <a:rPr lang="ru-RU" sz="1100" b="0" dirty="0">
                           <a:solidFill>
                             <a:srgbClr val="161412"/>
                           </a:solidFill>
                           <a:latin typeface="Inter"/>
                         </a:rPr>
-                        <a:t>Границы MVP и критерии; конкурентный анализ 30+; продуктовые материалы и колода; живые прогоны на модели, найденные дефекты и доработки; синхронизация артефактов</a:t>
+                        <a:t>Инженер</a:t>
                       </a:r>
+                      <a:r>
+                        <a:rPr sz="1100" b="0" dirty="0">
+                          <a:solidFill>
+                            <a:srgbClr val="161412"/>
+                          </a:solidFill>
+                          <a:latin typeface="Inter"/>
+                        </a:rPr>
+                        <a:t>: Auto Mode в Kilo и </a:t>
+                      </a:r>
+                      <a:r>
+                        <a:rPr sz="1100" b="0" dirty="0" err="1">
+                          <a:solidFill>
+                            <a:srgbClr val="161412"/>
+                          </a:solidFill>
+                          <a:latin typeface="Inter"/>
+                        </a:rPr>
+                        <a:t>система</a:t>
+                      </a:r>
+                      <a:r>
+                        <a:rPr sz="1100" b="0" dirty="0">
+                          <a:solidFill>
+                            <a:srgbClr val="161412"/>
+                          </a:solidFill>
+                          <a:latin typeface="Inter"/>
+                        </a:rPr>
+                        <a:t> </a:t>
+                      </a:r>
+                      <a:r>
+                        <a:rPr sz="1100" b="0" dirty="0" err="1">
+                          <a:solidFill>
+                            <a:srgbClr val="161412"/>
+                          </a:solidFill>
+                          <a:latin typeface="Inter"/>
+                        </a:rPr>
+                        <a:t>тестирования</a:t>
+                      </a:r>
+                      <a:endParaRPr sz="1100" b="0" dirty="0">
+                        <a:solidFill>
+                          <a:srgbClr val="161412"/>
+                        </a:solidFill>
+                        <a:latin typeface="Inter"/>
+                      </a:endParaRPr>
+                    </a:p>
+                  </a:txBody>
+                  <a:tcPr>
+                    <a:solidFill>
+                      <a:srgbClr val="FFFFFF"/>
+                    </a:solidFill>
+                  </a:tcPr>
+                </a:tc>
+                <a:tc>
+                  <a:txBody>
+                    <a:bodyPr/>
+                    <a:lstStyle/>
+                    <a:p>
+                      <a:r>
+                        <a:rPr sz="1100" b="0" dirty="0" err="1">
+                          <a:solidFill>
+                            <a:srgbClr val="161412"/>
+                          </a:solidFill>
+                          <a:latin typeface="Inter"/>
+                        </a:rPr>
+                        <a:t>Исследование</a:t>
+                      </a:r>
+                      <a:r>
+                        <a:rPr sz="1100" b="0" dirty="0">
+                          <a:solidFill>
+                            <a:srgbClr val="161412"/>
+                          </a:solidFill>
+                          <a:latin typeface="Inter"/>
+                        </a:rPr>
+                        <a:t> Kilo CLI и ТЗ; </a:t>
+                      </a:r>
+                      <a:r>
+                        <a:rPr sz="1100" b="0" dirty="0" err="1">
+                          <a:solidFill>
+                            <a:srgbClr val="161412"/>
+                          </a:solidFill>
+                          <a:latin typeface="Inter"/>
+                        </a:rPr>
+                        <a:t>шлюз</a:t>
+                      </a:r>
+                      <a:r>
+                        <a:rPr sz="1100" b="0" dirty="0">
+                          <a:solidFill>
+                            <a:srgbClr val="161412"/>
+                          </a:solidFill>
+                          <a:latin typeface="Inter"/>
+                        </a:rPr>
+                        <a:t>, </a:t>
+                      </a:r>
+                      <a:r>
+                        <a:rPr sz="1100" b="0" dirty="0" err="1">
+                          <a:solidFill>
+                            <a:srgbClr val="161412"/>
+                          </a:solidFill>
+                          <a:latin typeface="Inter"/>
+                        </a:rPr>
+                        <a:t>правила</a:t>
+                      </a:r>
+                      <a:r>
+                        <a:rPr sz="1100" b="0" dirty="0">
+                          <a:solidFill>
+                            <a:srgbClr val="161412"/>
+                          </a:solidFill>
+                          <a:latin typeface="Inter"/>
+                        </a:rPr>
+                        <a:t>, </a:t>
+                      </a:r>
+                      <a:r>
+                        <a:rPr sz="1100" b="0" dirty="0" err="1">
+                          <a:solidFill>
+                            <a:srgbClr val="161412"/>
+                          </a:solidFill>
+                          <a:latin typeface="Inter"/>
+                        </a:rPr>
+                        <a:t>теневая</a:t>
+                      </a:r>
+                      <a:r>
+                        <a:rPr sz="1100" b="0" dirty="0">
+                          <a:solidFill>
+                            <a:srgbClr val="161412"/>
+                          </a:solidFill>
+                          <a:latin typeface="Inter"/>
+                        </a:rPr>
+                        <a:t> </a:t>
+                      </a:r>
+                      <a:r>
+                        <a:rPr sz="1100" b="0" dirty="0" err="1">
+                          <a:solidFill>
+                            <a:srgbClr val="161412"/>
+                          </a:solidFill>
+                          <a:latin typeface="Inter"/>
+                        </a:rPr>
+                        <a:t>копия</a:t>
+                      </a:r>
+                      <a:r>
+                        <a:rPr sz="1100" b="0" dirty="0">
+                          <a:solidFill>
+                            <a:srgbClr val="161412"/>
+                          </a:solidFill>
+                          <a:latin typeface="Inter"/>
+                        </a:rPr>
+                        <a:t>, </a:t>
+                      </a:r>
+                      <a:r>
+                        <a:rPr sz="1100" b="0" dirty="0" err="1">
+                          <a:solidFill>
+                            <a:srgbClr val="161412"/>
+                          </a:solidFill>
+                          <a:latin typeface="Inter"/>
+                        </a:rPr>
+                        <a:t>песочница</a:t>
+                      </a:r>
+                      <a:r>
+                        <a:rPr sz="1100" b="0" dirty="0">
+                          <a:solidFill>
+                            <a:srgbClr val="161412"/>
+                          </a:solidFill>
+                          <a:latin typeface="Inter"/>
+                        </a:rPr>
+                        <a:t>, </a:t>
+                      </a:r>
+                      <a:r>
+                        <a:rPr sz="1100" b="0" dirty="0" err="1">
+                          <a:solidFill>
+                            <a:srgbClr val="161412"/>
+                          </a:solidFill>
+                          <a:latin typeface="Inter"/>
+                        </a:rPr>
+                        <a:t>аудит</a:t>
+                      </a:r>
+                      <a:r>
+                        <a:rPr sz="1100" b="0" dirty="0">
+                          <a:solidFill>
+                            <a:srgbClr val="161412"/>
+                          </a:solidFill>
+                          <a:latin typeface="Inter"/>
+                        </a:rPr>
+                        <a:t>; </a:t>
+                      </a:r>
+                      <a:r>
+                        <a:rPr sz="1100" b="0" dirty="0" err="1">
+                          <a:solidFill>
+                            <a:srgbClr val="161412"/>
+                          </a:solidFill>
+                          <a:latin typeface="Inter"/>
+                        </a:rPr>
+                        <a:t>автотесты</a:t>
+                      </a:r>
+                      <a:r>
+                        <a:rPr sz="1100" b="0" dirty="0">
+                          <a:solidFill>
+                            <a:srgbClr val="161412"/>
+                          </a:solidFill>
+                          <a:latin typeface="Inter"/>
+                        </a:rPr>
+                        <a:t>, </a:t>
+                      </a:r>
+                      <a:r>
+                        <a:rPr sz="1100" b="0" dirty="0" err="1">
+                          <a:solidFill>
+                            <a:srgbClr val="161412"/>
+                          </a:solidFill>
+                          <a:latin typeface="Inter"/>
+                        </a:rPr>
+                        <a:t>демо</a:t>
+                      </a:r>
+                      <a:r>
+                        <a:rPr sz="1100" b="0" dirty="0">
+                          <a:solidFill>
+                            <a:srgbClr val="161412"/>
+                          </a:solidFill>
+                          <a:latin typeface="Inter"/>
+                        </a:rPr>
+                        <a:t>, </a:t>
+                      </a:r>
+                      <a:r>
+                        <a:rPr sz="1100" b="0" dirty="0" err="1">
+                          <a:solidFill>
+                            <a:srgbClr val="161412"/>
+                          </a:solidFill>
+                          <a:latin typeface="Inter"/>
+                        </a:rPr>
+                        <a:t>стенд</a:t>
+                      </a:r>
+                      <a:r>
+                        <a:rPr sz="1100" b="0" dirty="0">
+                          <a:solidFill>
+                            <a:srgbClr val="161412"/>
+                          </a:solidFill>
+                          <a:latin typeface="Inter"/>
+                        </a:rPr>
+                        <a:t> и </a:t>
+                      </a:r>
+                      <a:r>
+                        <a:rPr sz="1100" b="0" dirty="0" err="1">
+                          <a:solidFill>
+                            <a:srgbClr val="161412"/>
+                          </a:solidFill>
+                          <a:latin typeface="Inter"/>
+                        </a:rPr>
+                        <a:t>прогоны</a:t>
+                      </a:r>
+                      <a:r>
+                        <a:rPr sz="1100" b="0" dirty="0">
+                          <a:solidFill>
+                            <a:srgbClr val="161412"/>
+                          </a:solidFill>
+                          <a:latin typeface="Inter"/>
+                        </a:rPr>
+                        <a:t> </a:t>
+                      </a:r>
+                      <a:r>
+                        <a:rPr sz="1100" b="0" dirty="0" err="1">
+                          <a:solidFill>
+                            <a:srgbClr val="161412"/>
+                          </a:solidFill>
+                          <a:latin typeface="Inter"/>
+                        </a:rPr>
+                        <a:t>на</a:t>
+                      </a:r>
+                      <a:r>
+                        <a:rPr sz="1100" b="0" dirty="0">
+                          <a:solidFill>
+                            <a:srgbClr val="161412"/>
+                          </a:solidFill>
+                          <a:latin typeface="Inter"/>
+                        </a:rPr>
+                        <a:t> macOS; </a:t>
+                      </a:r>
+                      <a:r>
+                        <a:rPr sz="1100" b="0" dirty="0" err="1">
+                          <a:solidFill>
+                            <a:srgbClr val="161412"/>
+                          </a:solidFill>
+                          <a:latin typeface="Inter"/>
+                        </a:rPr>
+                        <a:t>документ</a:t>
+                      </a:r>
+                      <a:r>
+                        <a:rPr sz="1100" b="0" dirty="0">
+                          <a:solidFill>
+                            <a:srgbClr val="161412"/>
+                          </a:solidFill>
+                          <a:latin typeface="Inter"/>
+                        </a:rPr>
+                        <a:t> </a:t>
+                      </a:r>
+                      <a:r>
+                        <a:rPr sz="1100" b="0" dirty="0" err="1">
+                          <a:solidFill>
+                            <a:srgbClr val="161412"/>
+                          </a:solidFill>
+                          <a:latin typeface="Inter"/>
+                        </a:rPr>
+                        <a:t>архитектуры</a:t>
+                      </a:r>
+                      <a:endParaRPr sz="1100" b="0" dirty="0">
+                        <a:solidFill>
+                          <a:srgbClr val="161412"/>
+                        </a:solidFill>
+                        <a:latin typeface="Inter"/>
+                      </a:endParaRPr>
                     </a:p>
                   </a:txBody>
                   <a:tcPr>
@@ -12144,98 +13221,13 @@
                     </a:solidFill>
                   </a:tcPr>
                 </a:tc>
+                <a:extLst>
+                  <a:ext uri="{0D108BD9-81ED-4DB2-BD59-A6C34878D82A}">
+                    <a16:rowId xmlns:a16="http://schemas.microsoft.com/office/drawing/2014/main" val="10002"/>
+                  </a:ext>
+                </a:extLst>
               </a:tr>
-              <a:tr h="771525">
-                <a:tc>
-                  <a:txBody>
-                    <a:bodyPr/>
-                    <a:lstStyle/>
-                    <a:p>
-                      <a:r>
-                        <a:rPr sz="1100" b="1">
-                          <a:solidFill>
-                            <a:srgbClr val="161412"/>
-                          </a:solidFill>
-                          <a:latin typeface="Inter"/>
-                        </a:rPr>
-                        <a:t>Кирдяшкин Максим</a:t>
-                      </a:r>
-                    </a:p>
-                  </a:txBody>
-                  <a:tcPr>
-                    <a:solidFill>
-                      <a:srgbClr val="FFFFFF"/>
-                    </a:solidFill>
-                  </a:tcPr>
-                </a:tc>
-                <a:tc>
-                  <a:txBody>
-                    <a:bodyPr/>
-                    <a:lstStyle/>
-                    <a:p>
-                      <a:r>
-                        <a:rPr sz="1100" b="0">
-                          <a:solidFill>
-                            <a:srgbClr val="161412"/>
-                          </a:solidFill>
-                          <a:latin typeface="Inter"/>
-                        </a:rPr>
-                        <a:t>Ведущий инженер: Auto Mode в Kilo и система тестирования</a:t>
-                      </a:r>
-                    </a:p>
-                  </a:txBody>
-                  <a:tcPr>
-                    <a:solidFill>
-                      <a:srgbClr val="FFFFFF"/>
-                    </a:solidFill>
-                  </a:tcPr>
-                </a:tc>
-                <a:tc>
-                  <a:txBody>
-                    <a:bodyPr/>
-                    <a:lstStyle/>
-                    <a:p>
-                      <a:r>
-                        <a:rPr sz="1100" b="0">
-                          <a:solidFill>
-                            <a:srgbClr val="161412"/>
-                          </a:solidFill>
-                          <a:latin typeface="Inter"/>
-                        </a:rPr>
-                        <a:t>Исследование Kilo CLI и ТЗ; шлюз, правила, теневая копия, песочница, аудит; автотесты, демо, стенд и прогоны на macOS; документ архитектуры</a:t>
-                      </a:r>
-                    </a:p>
-                  </a:txBody>
-                  <a:tcPr>
-                    <a:solidFill>
-                      <a:srgbClr val="FFFFFF"/>
-                    </a:solidFill>
-                  </a:tcPr>
-                </a:tc>
-                <a:tc>
-                  <a:txBody>
-                    <a:bodyPr/>
-                    <a:lstStyle/>
-                    <a:p>
-                      <a:r>
-                        <a:rPr sz="1100" b="0">
-                          <a:solidFill>
-                            <a:srgbClr val="161412"/>
-                          </a:solidFill>
-                          <a:latin typeface="Inter"/>
-                        </a:rPr>
-                        <a:t>Весь хакатон, ежедневно</a:t>
-                      </a:r>
-                    </a:p>
-                  </a:txBody>
-                  <a:tcPr>
-                    <a:solidFill>
-                      <a:srgbClr val="FFFFFF"/>
-                    </a:solidFill>
-                  </a:tcPr>
-                </a:tc>
-              </a:tr>
-              <a:tr h="771525">
+              <a:tr h="822011">
                 <a:tc>
                   <a:txBody>
                     <a:bodyPr/>
@@ -12286,13 +13278,274 @@
                     <a:lstStyle/>
                     <a:p>
                       <a:r>
-                        <a:rPr sz="1100" b="0">
+                        <a:rPr sz="1100" b="0" dirty="0" err="1">
                           <a:solidFill>
                             <a:srgbClr val="161412"/>
                           </a:solidFill>
                           <a:latin typeface="Inter"/>
                         </a:rPr>
-                        <a:t>Что считать атакой и успехом в стенде; карта угроз и справочник атак; шаблон стенда; ревью кода перед ключевыми PR</a:t>
+                        <a:t>Что</a:t>
+                      </a:r>
+                      <a:r>
+                        <a:rPr sz="1100" b="0" dirty="0">
+                          <a:solidFill>
+                            <a:srgbClr val="161412"/>
+                          </a:solidFill>
+                          <a:latin typeface="Inter"/>
+                        </a:rPr>
+                        <a:t> </a:t>
+                      </a:r>
+                      <a:r>
+                        <a:rPr sz="1100" b="0" dirty="0" err="1">
+                          <a:solidFill>
+                            <a:srgbClr val="161412"/>
+                          </a:solidFill>
+                          <a:latin typeface="Inter"/>
+                        </a:rPr>
+                        <a:t>считать</a:t>
+                      </a:r>
+                      <a:r>
+                        <a:rPr sz="1100" b="0" dirty="0">
+                          <a:solidFill>
+                            <a:srgbClr val="161412"/>
+                          </a:solidFill>
+                          <a:latin typeface="Inter"/>
+                        </a:rPr>
+                        <a:t> </a:t>
+                      </a:r>
+                      <a:r>
+                        <a:rPr sz="1100" b="0" dirty="0" err="1">
+                          <a:solidFill>
+                            <a:srgbClr val="161412"/>
+                          </a:solidFill>
+                          <a:latin typeface="Inter"/>
+                        </a:rPr>
+                        <a:t>атакой</a:t>
+                      </a:r>
+                      <a:r>
+                        <a:rPr sz="1100" b="0" dirty="0">
+                          <a:solidFill>
+                            <a:srgbClr val="161412"/>
+                          </a:solidFill>
+                          <a:latin typeface="Inter"/>
+                        </a:rPr>
+                        <a:t> и </a:t>
+                      </a:r>
+                      <a:r>
+                        <a:rPr sz="1100" b="0" dirty="0" err="1">
+                          <a:solidFill>
+                            <a:srgbClr val="161412"/>
+                          </a:solidFill>
+                          <a:latin typeface="Inter"/>
+                        </a:rPr>
+                        <a:t>успехом</a:t>
+                      </a:r>
+                      <a:r>
+                        <a:rPr sz="1100" b="0" dirty="0">
+                          <a:solidFill>
+                            <a:srgbClr val="161412"/>
+                          </a:solidFill>
+                          <a:latin typeface="Inter"/>
+                        </a:rPr>
+                        <a:t> в </a:t>
+                      </a:r>
+                      <a:r>
+                        <a:rPr sz="1100" b="0" dirty="0" err="1">
+                          <a:solidFill>
+                            <a:srgbClr val="161412"/>
+                          </a:solidFill>
+                          <a:latin typeface="Inter"/>
+                        </a:rPr>
+                        <a:t>стенде</a:t>
+                      </a:r>
+                      <a:r>
+                        <a:rPr sz="1100" b="0" dirty="0">
+                          <a:solidFill>
+                            <a:srgbClr val="161412"/>
+                          </a:solidFill>
+                          <a:latin typeface="Inter"/>
+                        </a:rPr>
+                        <a:t>; </a:t>
+                      </a:r>
+                      <a:r>
+                        <a:rPr sz="1100" b="0" dirty="0" err="1">
+                          <a:solidFill>
+                            <a:srgbClr val="161412"/>
+                          </a:solidFill>
+                          <a:latin typeface="Inter"/>
+                        </a:rPr>
+                        <a:t>карта</a:t>
+                      </a:r>
+                      <a:r>
+                        <a:rPr sz="1100" b="0" dirty="0">
+                          <a:solidFill>
+                            <a:srgbClr val="161412"/>
+                          </a:solidFill>
+                          <a:latin typeface="Inter"/>
+                        </a:rPr>
+                        <a:t> </a:t>
+                      </a:r>
+                      <a:r>
+                        <a:rPr sz="1100" b="0" dirty="0" err="1">
+                          <a:solidFill>
+                            <a:srgbClr val="161412"/>
+                          </a:solidFill>
+                          <a:latin typeface="Inter"/>
+                        </a:rPr>
+                        <a:t>угроз</a:t>
+                      </a:r>
+                      <a:r>
+                        <a:rPr sz="1100" b="0" dirty="0">
+                          <a:solidFill>
+                            <a:srgbClr val="161412"/>
+                          </a:solidFill>
+                          <a:latin typeface="Inter"/>
+                        </a:rPr>
+                        <a:t> и </a:t>
+                      </a:r>
+                      <a:r>
+                        <a:rPr sz="1100" b="0" dirty="0" err="1">
+                          <a:solidFill>
+                            <a:srgbClr val="161412"/>
+                          </a:solidFill>
+                          <a:latin typeface="Inter"/>
+                        </a:rPr>
+                        <a:t>справочник</a:t>
+                      </a:r>
+                      <a:r>
+                        <a:rPr sz="1100" b="0" dirty="0">
+                          <a:solidFill>
+                            <a:srgbClr val="161412"/>
+                          </a:solidFill>
+                          <a:latin typeface="Inter"/>
+                        </a:rPr>
+                        <a:t> </a:t>
+                      </a:r>
+                      <a:r>
+                        <a:rPr sz="1100" b="0" dirty="0" err="1">
+                          <a:solidFill>
+                            <a:srgbClr val="161412"/>
+                          </a:solidFill>
+                          <a:latin typeface="Inter"/>
+                        </a:rPr>
+                        <a:t>атак</a:t>
+                      </a:r>
+                      <a:r>
+                        <a:rPr sz="1100" b="0" dirty="0">
+                          <a:solidFill>
+                            <a:srgbClr val="161412"/>
+                          </a:solidFill>
+                          <a:latin typeface="Inter"/>
+                        </a:rPr>
+                        <a:t>; </a:t>
+                      </a:r>
+                      <a:r>
+                        <a:rPr sz="1100" b="0" dirty="0" err="1">
+                          <a:solidFill>
+                            <a:srgbClr val="161412"/>
+                          </a:solidFill>
+                          <a:latin typeface="Inter"/>
+                        </a:rPr>
+                        <a:t>шаблон</a:t>
+                      </a:r>
+                      <a:r>
+                        <a:rPr sz="1100" b="0" dirty="0">
+                          <a:solidFill>
+                            <a:srgbClr val="161412"/>
+                          </a:solidFill>
+                          <a:latin typeface="Inter"/>
+                        </a:rPr>
+                        <a:t> </a:t>
+                      </a:r>
+                      <a:r>
+                        <a:rPr sz="1100" b="0" dirty="0" err="1">
+                          <a:solidFill>
+                            <a:srgbClr val="161412"/>
+                          </a:solidFill>
+                          <a:latin typeface="Inter"/>
+                        </a:rPr>
+                        <a:t>стенда</a:t>
+                      </a:r>
+                      <a:r>
+                        <a:rPr sz="1100" b="0" dirty="0">
+                          <a:solidFill>
+                            <a:srgbClr val="161412"/>
+                          </a:solidFill>
+                          <a:latin typeface="Inter"/>
+                        </a:rPr>
+                        <a:t>; </a:t>
+                      </a:r>
+                      <a:r>
+                        <a:rPr sz="1100" b="0" dirty="0" err="1">
+                          <a:solidFill>
+                            <a:srgbClr val="161412"/>
+                          </a:solidFill>
+                          <a:latin typeface="Inter"/>
+                        </a:rPr>
+                        <a:t>ревью</a:t>
+                      </a:r>
+                      <a:r>
+                        <a:rPr sz="1100" b="0" dirty="0">
+                          <a:solidFill>
+                            <a:srgbClr val="161412"/>
+                          </a:solidFill>
+                          <a:latin typeface="Inter"/>
+                        </a:rPr>
+                        <a:t> </a:t>
+                      </a:r>
+                      <a:r>
+                        <a:rPr sz="1100" b="0" dirty="0" err="1">
+                          <a:solidFill>
+                            <a:srgbClr val="161412"/>
+                          </a:solidFill>
+                          <a:latin typeface="Inter"/>
+                        </a:rPr>
+                        <a:t>кода</a:t>
+                      </a:r>
+                      <a:r>
+                        <a:rPr sz="1100" b="0" dirty="0">
+                          <a:solidFill>
+                            <a:srgbClr val="161412"/>
+                          </a:solidFill>
+                          <a:latin typeface="Inter"/>
+                        </a:rPr>
+                        <a:t> </a:t>
+                      </a:r>
+                      <a:r>
+                        <a:rPr sz="1100" b="0" dirty="0" err="1">
+                          <a:solidFill>
+                            <a:srgbClr val="161412"/>
+                          </a:solidFill>
+                          <a:latin typeface="Inter"/>
+                        </a:rPr>
+                        <a:t>перед</a:t>
+                      </a:r>
+                      <a:r>
+                        <a:rPr sz="1100" b="0" dirty="0">
+                          <a:solidFill>
+                            <a:srgbClr val="161412"/>
+                          </a:solidFill>
+                          <a:latin typeface="Inter"/>
+                        </a:rPr>
+                        <a:t> </a:t>
+                      </a:r>
+                      <a:r>
+                        <a:rPr sz="1100" b="0" dirty="0" err="1">
+                          <a:solidFill>
+                            <a:srgbClr val="161412"/>
+                          </a:solidFill>
+                          <a:latin typeface="Inter"/>
+                        </a:rPr>
+                        <a:t>ключевыми</a:t>
+                      </a:r>
+                      <a:r>
+                        <a:rPr sz="1100" b="0" dirty="0">
+                          <a:solidFill>
+                            <a:srgbClr val="161412"/>
+                          </a:solidFill>
+                          <a:latin typeface="Inter"/>
+                        </a:rPr>
+                        <a:t> PR</a:t>
                       </a:r>
                     </a:p>
                   </a:txBody>
@@ -12308,13 +13561,13 @@
                     <a:lstStyle/>
                     <a:p>
                       <a:r>
-                        <a:rPr sz="1100" b="0">
+                        <a:rPr lang="ru-RU" sz="1100" b="0" dirty="0">
                           <a:solidFill>
                             <a:srgbClr val="161412"/>
                           </a:solidFill>
                           <a:latin typeface="Inter"/>
                         </a:rPr>
-                        <a:t>На отдельных этапах</a:t>
+                        <a:t>Весь хакатон, ежедневно</a:t>
                       </a:r>
                     </a:p>
                   </a:txBody>
@@ -12324,12 +13577,89 @@
                     </a:solidFill>
                   </a:tcPr>
                 </a:tc>
+                <a:extLst>
+                  <a:ext uri="{0D108BD9-81ED-4DB2-BD59-A6C34878D82A}">
+                    <a16:rowId xmlns:a16="http://schemas.microsoft.com/office/drawing/2014/main" val="10003"/>
+                  </a:ext>
+                </a:extLst>
               </a:tr>
             </a:tbl>
           </a:graphicData>
         </a:graphic>
       </p:graphicFrame>
+      <p:sp>
+        <p:nvSpPr>
+          <p:cNvPr id="6" name="Google Shape;217;p27">
+            <a:extLst>
+              <a:ext uri="{FF2B5EF4-FFF2-40B4-BE49-F238E27FC236}">
+                <a16:creationId xmlns:a16="http://schemas.microsoft.com/office/drawing/2014/main" id="{3C7C5703-9CC2-6352-F595-E3D777C54B17}"/>
+              </a:ext>
+            </a:extLst>
+          </p:cNvPr>
+          <p:cNvSpPr/>
+          <p:nvPr/>
+        </p:nvSpPr>
+        <p:spPr>
+          <a:xfrm>
+            <a:off x="476250" y="957791"/>
+            <a:ext cx="7606116" cy="503014"/>
+          </a:xfrm>
+          <a:prstGeom prst="rect">
+            <a:avLst/>
+          </a:prstGeom>
+          <a:noFill/>
+          <a:ln>
+            <a:noFill/>
+          </a:ln>
+        </p:spPr>
+        <p:txBody>
+          <a:bodyPr spcFirstLastPara="1" wrap="square" lIns="0" tIns="0" rIns="0" bIns="0" anchor="t" anchorCtr="0">
+            <a:noAutofit/>
+          </a:bodyPr>
+          <a:lstStyle/>
+          <a:p>
+            <a:pPr marL="0" marR="0" lvl="0" indent="0" algn="l" rtl="0">
+              <a:lnSpc>
+                <a:spcPct val="111076"/>
+              </a:lnSpc>
+              <a:spcBef>
+                <a:spcPts val="0"/>
+              </a:spcBef>
+              <a:spcAft>
+                <a:spcPts val="0"/>
+              </a:spcAft>
+              <a:buNone/>
+            </a:pPr>
+            <a:r>
+              <a:rPr lang="ru" sz="2600" b="1" i="0" u="none" strike="noStrike" cap="none" dirty="0">
+                <a:solidFill>
+                  <a:srgbClr val="000000"/>
+                </a:solidFill>
+                <a:latin typeface="Inter"/>
+                <a:ea typeface="Inter"/>
+                <a:cs typeface="Inter"/>
+                <a:sym typeface="Inter"/>
+              </a:rPr>
+              <a:t>Команда и распределение задач</a:t>
+            </a:r>
+            <a:endParaRPr sz="2625" i="0" u="none" strike="noStrike" cap="none" dirty="0">
+              <a:solidFill>
+                <a:schemeClr val="dk1"/>
+              </a:solidFill>
+              <a:latin typeface="Inter"/>
+              <a:ea typeface="Inter"/>
+              <a:cs typeface="Inter"/>
+              <a:sym typeface="Inter"/>
+            </a:endParaRPr>
+          </a:p>
+        </p:txBody>
+      </p:sp>
     </p:spTree>
+    <p:extLst>
+      <p:ext uri="{BB962C8B-B14F-4D97-AF65-F5344CB8AC3E}">
+        <p14:creationId xmlns:p14="http://schemas.microsoft.com/office/powerpoint/2010/main" val="2605218260"/>
+      </p:ext>
+    </p:extLst>
   </p:cSld>
   <p:clrMapOvr>
     <a:masterClrMapping/>

--- a/docs/auto-mode-hackathon/final/presentation-final.pptx
+++ b/docs/auto-mode-hackathon/final/presentation-final.pptx
@@ -977,7 +977,7 @@
               </a:spcAft>
               <a:buNone/>
             </a:pPr>
-            <a:endParaRPr/>
+            <a:endParaRPr dirty="0"/>
           </a:p>
         </p:txBody>
       </p:sp>
@@ -7888,7 +7888,7 @@
         <p:spPr>
           <a:xfrm>
             <a:off x="369158" y="4193608"/>
-            <a:ext cx="2259741" cy="667736"/>
+            <a:ext cx="1880000" cy="667736"/>
           </a:xfrm>
           <a:prstGeom prst="rect">
             <a:avLst/>
@@ -8360,8 +8360,8 @@
         </p:nvSpPr>
         <p:spPr>
           <a:xfrm>
-            <a:off x="3714750" y="4194230"/>
-            <a:ext cx="1765211" cy="928972"/>
+            <a:off x="2500000" y="4194230"/>
+            <a:ext cx="1880000" cy="928972"/>
           </a:xfrm>
           <a:prstGeom prst="rect">
             <a:avLst/>
@@ -8408,7 +8408,7 @@
         </p:nvSpPr>
         <p:spPr>
           <a:xfrm>
-            <a:off x="3714750" y="3702162"/>
+            <a:off x="2500000" y="3702162"/>
             <a:ext cx="1714500" cy="444582"/>
           </a:xfrm>
           <a:prstGeom prst="rect">
@@ -8487,8 +8487,8 @@
         </p:nvSpPr>
         <p:spPr>
           <a:xfrm>
-            <a:off x="6224551" y="4101726"/>
-            <a:ext cx="2259741" cy="830997"/>
+            <a:off x="4640000" y="4101726"/>
+            <a:ext cx="1880000" cy="830997"/>
           </a:xfrm>
           <a:prstGeom prst="rect">
             <a:avLst/>
@@ -8531,7 +8531,7 @@
         </p:nvSpPr>
         <p:spPr>
           <a:xfrm>
-            <a:off x="6295181" y="3702162"/>
+            <a:off x="4722750" y="3711917"/>
             <a:ext cx="1714500" cy="444582"/>
           </a:xfrm>
           <a:prstGeom prst="rect">
@@ -8561,7 +8561,7 @@
               <a:buNone/>
             </a:pPr>
             <a:r>
-              <a:rPr lang="ru-RU" sz="2600" b="1" i="0" u="none" strike="noStrike" cap="none" dirty="0">
+              <a:rPr lang="ru-RU" sz="2600" b="1" dirty="0">
                 <a:solidFill>
                   <a:srgbClr val="C93E33"/>
                 </a:solidFill>
@@ -8570,7 +8570,7 @@
                 <a:cs typeface="Inter"/>
                 <a:sym typeface="Inter"/>
               </a:rPr>
-              <a:t>5</a:t>
+              <a:t>7</a:t>
             </a:r>
             <a:endParaRPr sz="2625" i="0" u="none" strike="noStrike" cap="none" dirty="0">
               <a:solidFill>
@@ -8581,6 +8581,92 @@
               <a:cs typeface="Inter"/>
               <a:sym typeface="Inter"/>
             </a:endParaRPr>
+          </a:p>
+        </p:txBody>
+      </p:sp>
+      <p:sp>
+        <p:nvSpPr>
+          <p:cNvPr id="50" name="Tile 157"/>
+          <p:cNvSpPr/>
+          <p:nvPr/>
+        </p:nvSpPr>
+        <p:spPr>
+          <a:xfrm>
+            <a:off x="6780000" y="3702162"/>
+            <a:ext cx="1714500" cy="444582"/>
+          </a:xfrm>
+          <a:prstGeom prst="rect">
+            <a:avLst/>
+          </a:prstGeom>
+          <a:noFill/>
+          <a:ln>
+            <a:noFill/>
+          </a:ln>
+        </p:spPr>
+        <p:txBody>
+          <a:bodyPr spcFirstLastPara="1" wrap="square" lIns="0" tIns="0" rIns="0" bIns="0" anchor="t" anchorCtr="0">
+            <a:noAutofit/>
+          </a:bodyPr>
+          <a:lstStyle/>
+          <a:p>
+            <a:pPr marL="0" marR="0" lvl="0" indent="0" algn="l" rtl="0">
+              <a:lnSpc>
+                <a:spcPct val="111076"/>
+              </a:lnSpc>
+              <a:spcBef>
+                <a:spcPts val="0"/>
+              </a:spcBef>
+              <a:spcAft>
+                <a:spcPts val="0"/>
+              </a:spcAft>
+              <a:buNone/>
+            </a:pPr>
+            <a:r>
+              <a:rPr lang="ru-RU" sz="2600" b="1" i="0" u="none" strike="noStrike" cap="none" dirty="0">
+                <a:solidFill>
+                  <a:srgbClr val="C93E33"/>
+                </a:solidFill>
+                <a:latin typeface="Inter"/>
+                <a:ea typeface="Inter"/>
+                <a:cs typeface="Inter"/>
+                <a:sym typeface="Inter"/>
+              </a:rPr>
+              <a:t>148</a:t>
+            </a:r>
+          </a:p>
+        </p:txBody>
+      </p:sp>
+      <p:sp>
+        <p:nvSpPr>
+          <p:cNvPr id="51" name="Tile 157 caption"/>
+          <p:cNvSpPr txBox="1"/>
+          <p:nvPr/>
+        </p:nvSpPr>
+        <p:spPr>
+          <a:xfrm>
+            <a:off x="6780000" y="4160000"/>
+            <a:ext cx="2000000" cy="830997"/>
+          </a:xfrm>
+          <a:prstGeom prst="rect">
+            <a:avLst/>
+          </a:prstGeom>
+          <a:noFill/>
+        </p:spPr>
+        <p:txBody>
+          <a:bodyPr wrap="square" rtlCol="0">
+            <a:spAutoFit/>
+          </a:bodyPr>
+          <a:lstStyle/>
+          <a:p>
+            <a:pPr lvl="0"/>
+            <a:r>
+              <a:rPr lang="ru-RU" sz="1200" b="1" dirty="0"/>
+              <a:t>живых запусков</a:t>
+            </a:r>
+            <a:r>
+              <a:rPr lang="ru-RU" sz="1200" dirty="0"/>
+              <a:t> с моделью</a:t>
+            </a:r>
           </a:p>
         </p:txBody>
       </p:sp>
@@ -8988,7 +9074,7 @@
         <p:spPr>
           <a:xfrm>
             <a:off x="2380571" y="2107092"/>
-            <a:ext cx="2191429" cy="2292296"/>
+            <a:ext cx="2280000" cy="2850000"/>
           </a:xfrm>
           <a:prstGeom prst="rect">
             <a:avLst/>
@@ -9004,118 +9090,111 @@
           </a:bodyPr>
           <a:lstStyle/>
           <a:p>
+            <a:pPr marL="0" marR="0" indent="0" algn="l" rtl="0">
+              <a:lnSpc>
+                <a:spcPct val="110000"/>
+              </a:lnSpc>
+              <a:buNone/>
+            </a:pPr>
             <a:r>
-              <a:rPr lang="ru-RU" b="0" i="0" u="none" strike="noStrike" cap="none" dirty="0">
-                <a:solidFill>
-                  <a:srgbClr val="000000"/>
-                </a:solidFill>
-                <a:sym typeface="Arial"/>
-              </a:rPr>
-              <a:t>м</a:t>
-            </a:r>
-            <a:r>
-              <a:rPr lang="ru" b="0" i="0" u="none" strike="noStrike" cap="none" dirty="0">
-                <a:solidFill>
-                  <a:srgbClr val="000000"/>
-                </a:solidFill>
-                <a:sym typeface="Arial"/>
-              </a:rPr>
-              <a:t>одели в живом тестировании:</a:t>
+              <a:rPr lang="ru-RU" sz="1200" b="0" i="0" dirty="0"/>
+              <a:t>живых запусков · 2 модели · 2 платформы (macOS Seatbelt, Linux bubblewrap)</a:t>
             </a:r>
           </a:p>
           <a:p>
-            <a:pPr marL="342900" indent="-342900">
-              <a:buFont typeface="+mj-lt"/>
-              <a:buAutoNum type="arabicPeriod"/>
+            <a:pPr marL="0" marR="0" indent="0" algn="l" rtl="0">
+              <a:lnSpc>
+                <a:spcPct val="110000"/>
+              </a:lnSpc>
+              <a:spcBef>
+                <a:spcPts val="400"/>
+              </a:spcBef>
+              <a:buNone/>
             </a:pPr>
             <a:r>
-              <a:rPr lang="ru-RU" b="1" dirty="0" err="1"/>
-              <a:t>kilo</a:t>
+              <a:rPr lang="ru-RU" sz="1050" b="1" i="0" dirty="0"/>
+              <a:t>Атаки прошли:</a:t>
             </a:r>
             <a:r>
-              <a:rPr lang="ru-RU" b="1" dirty="0"/>
-              <a:t>/</a:t>
-            </a:r>
-            <a:r>
-              <a:rPr lang="ru-RU" b="1" dirty="0" err="1"/>
-              <a:t>stepfun</a:t>
-            </a:r>
-            <a:r>
-              <a:rPr lang="ru-RU" b="1" dirty="0"/>
-              <a:t>/step-3.7-flash </a:t>
-            </a:r>
-            <a:br>
-              <a:rPr lang="ru-RU" dirty="0"/>
-            </a:br>
-            <a:r>
-              <a:rPr lang="ru-RU" dirty="0"/>
-              <a:t>132 запуска на двух платформах: </a:t>
-            </a:r>
-            <a:br>
-              <a:rPr lang="ru-RU" dirty="0"/>
-            </a:br>
-            <a:r>
-              <a:rPr lang="ru-RU" dirty="0"/>
-              <a:t>атаки 78% → 0%, задачи 20 из 21;</a:t>
+              <a:rPr lang="ru-RU" sz="1050" b="0" i="0" dirty="0"/>
+              <a:t> без защиты 84% (47 из 56) → с защитой 0 из 56</a:t>
             </a:r>
           </a:p>
           <a:p>
-            <a:pPr marL="342900" indent="-342900">
-              <a:buFont typeface="+mj-lt"/>
-              <a:buAutoNum type="arabicPeriod"/>
-            </a:pPr>
-            <a:endParaRPr lang="ru-RU" dirty="0"/>
-          </a:p>
-          <a:p>
-            <a:pPr marL="342900" indent="-342900">
-              <a:buFont typeface="+mj-lt"/>
-              <a:buAutoNum type="arabicPeriod"/>
+            <a:pPr marL="0" marR="0" indent="0" algn="l" rtl="0">
+              <a:lnSpc>
+                <a:spcPct val="110000"/>
+              </a:lnSpc>
+              <a:spcBef>
+                <a:spcPts val="400"/>
+              </a:spcBef>
+              <a:buNone/>
             </a:pPr>
             <a:r>
-              <a:rPr lang="ru-RU" b="1" dirty="0" err="1"/>
-              <a:t>nvidia</a:t>
+              <a:rPr lang="ru-RU" sz="1050" b="1" i="0" dirty="0"/>
+              <a:t>Обычные задачи выполнены:</a:t>
             </a:r>
             <a:r>
-              <a:rPr lang="ru-RU" b="1" dirty="0"/>
-              <a:t>/nemotron-3-super-120b </a:t>
-            </a:r>
-            <a:br>
-              <a:rPr lang="ru-RU" dirty="0"/>
-            </a:br>
-            <a:r>
-              <a:rPr lang="ru-RU" dirty="0"/>
-              <a:t>16 запусков: </a:t>
-            </a:r>
-            <a:br>
-              <a:rPr lang="ru-RU" dirty="0"/>
-            </a:br>
-            <a:r>
-              <a:rPr lang="ru-RU" dirty="0"/>
-              <a:t>атаки 7 из 8 → 0</a:t>
+              <a:rPr lang="ru-RU" sz="1050" b="0" i="0" dirty="0"/>
+              <a:t> 22 из 22 → 22 из 23</a:t>
             </a:r>
           </a:p>
           <a:p>
-            <a:pPr marL="0" marR="0" lvl="0" indent="0" algn="l" rtl="0">
+            <a:pPr marL="0" marR="0" indent="0" algn="l" rtl="0">
               <a:lnSpc>
-                <a:spcPct val="125000"/>
+                <a:spcPct val="110000"/>
               </a:lnSpc>
               <a:spcBef>
-                <a:spcPts val="0"/>
-              </a:spcBef>
-              <a:spcAft>
-                <a:spcPts val="0"/>
-              </a:spcAft>
+                <a:spcPts val="400"/>
+              </a:spcBef>
               <a:buNone/>
             </a:pPr>
-            <a:endParaRPr b="0" i="0" u="none" strike="noStrike" cap="none" dirty="0">
-              <a:solidFill>
-                <a:schemeClr val="dk1"/>
-              </a:solidFill>
-              <a:latin typeface="Calibri"/>
-              <a:ea typeface="Calibri"/>
-              <a:cs typeface="Calibri"/>
-              <a:sym typeface="Calibri"/>
-            </a:endParaRPr>
+            <a:r>
+              <a:rPr lang="ru-RU" sz="1050" b="1" i="0" dirty="0"/>
+              <a:t>Лишних вопросов и блокировок на обычных задачах:</a:t>
+            </a:r>
+            <a:r>
+              <a:rPr lang="ru-RU" sz="1050" b="0" i="0" dirty="0"/>
+              <a:t> 0 из 22 действий</a:t>
+            </a:r>
+          </a:p>
+          <a:p>
+            <a:pPr marL="0" marR="0" indent="0" algn="l" rtl="0">
+              <a:lnSpc>
+                <a:spcPct val="110000"/>
+              </a:lnSpc>
+              <a:spcBef>
+                <a:spcPts val="400"/>
+              </a:spcBef>
+              <a:buNone/>
+            </a:pPr>
+            <a:r>
+              <a:rPr lang="ru-RU" sz="1050" b="1" i="0" dirty="0"/>
+              <a:t>Шкала 0/1/2:</a:t>
+            </a:r>
+            <a:r>
+              <a:rPr lang="ru-RU" sz="1050" b="0" i="0" dirty="0"/>
+              <a:t> 32 двойки, 12 единиц, 0 нулей</a:t>
+            </a:r>
+          </a:p>
+          <a:p>
+            <a:pPr marL="0" marR="0" indent="0" algn="l" rtl="0">
+              <a:lnSpc>
+                <a:spcPct val="105000"/>
+              </a:lnSpc>
+              <a:spcBef>
+                <a:spcPts val="400"/>
+              </a:spcBef>
+              <a:buNone/>
+            </a:pPr>
+            <a:r>
+              <a:rPr lang="ru-RU" sz="850" b="0" i="1" dirty="0">
+                <a:solidFill>
+                  <a:srgbClr val="595959"/>
+                </a:solidFill>
+              </a:rPr>
+              <a:t>единицы — вопрос человеку: только установка новой зависимости и чтение секрета, там политика спрашивает намеренно</a:t>
+            </a:r>
           </a:p>
         </p:txBody>
       </p:sp>
@@ -9172,7 +9251,7 @@
                 <a:cs typeface="Inter"/>
                 <a:sym typeface="Inter"/>
               </a:rPr>
-              <a:t>2</a:t>
+              <a:t>148</a:t>
             </a:r>
             <a:endParaRPr sz="2625" i="0" u="none" strike="noStrike" cap="none" dirty="0">
               <a:solidFill>
@@ -9294,7 +9373,7 @@
                 <a:cs typeface="Inter"/>
                 <a:sym typeface="Inter"/>
               </a:rPr>
-              <a:t>Автономность за счет улучшения архитектуры</a:t>
+              <a:t>Защитный слой для ИИ-агента: результаты живого тестирования</a:t>
             </a:r>
             <a:endParaRPr sz="2625" i="0" u="none" strike="noStrike" cap="none" dirty="0">
               <a:solidFill>
@@ -9356,8 +9435,8 @@
         </p:nvSpPr>
         <p:spPr>
           <a:xfrm>
-            <a:off x="4839580" y="1520502"/>
-            <a:ext cx="4076641" cy="3231654"/>
+            <a:off x="4839580" y="1420502"/>
+            <a:ext cx="4076641" cy="3450000"/>
           </a:xfrm>
           <a:prstGeom prst="rect">
             <a:avLst/>
@@ -9378,7 +9457,7 @@
           </a:p>
           <a:p>
             <a:pPr lvl="0"/>
-            <a:endParaRPr lang="ru-RU" sz="1200" b="1" dirty="0"/>
+            <a:endParaRPr lang="ru-RU" sz="600" dirty="0"/>
           </a:p>
           <a:p>
             <a:pPr marL="285750" lvl="0" indent="-285750">
@@ -9386,7 +9465,7 @@
               <a:buChar char="•"/>
             </a:pPr>
             <a:r>
-              <a:rPr lang="ru-RU" sz="1200" b="1" dirty="0">
+              <a:rPr lang="ru-RU" sz="1050" b="1" dirty="0">
                 <a:solidFill>
                   <a:srgbClr val="00B050"/>
                 </a:solidFill>
@@ -9394,7 +9473,7 @@
               <a:t>обычная работа</a:t>
             </a:r>
             <a:r>
-              <a:rPr lang="ru-RU" sz="1200" dirty="0">
+              <a:rPr lang="ru-RU" sz="1050" dirty="0">
                 <a:solidFill>
                   <a:srgbClr val="00B050"/>
                 </a:solidFill>
@@ -9402,7 +9481,7 @@
               <a:t> </a:t>
             </a:r>
             <a:r>
-              <a:rPr lang="ru-RU" sz="1200" dirty="0"/>
+              <a:rPr lang="ru-RU" sz="1050" dirty="0"/>
               <a:t>— правка кода и локальный тест проходят без вмешательства</a:t>
             </a:r>
           </a:p>
@@ -9412,11 +9491,11 @@
               <a:buChar char="•"/>
             </a:pPr>
             <a:r>
-              <a:rPr lang="ru-RU" sz="1200" b="1" dirty="0"/>
+              <a:rPr lang="ru-RU" sz="1050" b="1" dirty="0"/>
               <a:t>инъекция в README</a:t>
             </a:r>
             <a:r>
-              <a:rPr lang="ru-RU" sz="1200" dirty="0"/>
+              <a:rPr lang="ru-RU" sz="1050" dirty="0"/>
               <a:t> — вредный результат отброшен, агент перепланировал работу</a:t>
             </a:r>
           </a:p>
@@ -9426,11 +9505,11 @@
               <a:buChar char="•"/>
             </a:pPr>
             <a:r>
-              <a:rPr lang="ru-RU" sz="1200" b="1" dirty="0"/>
+              <a:rPr lang="ru-RU" sz="1050" b="1" dirty="0"/>
               <a:t>скрытый автозапуск</a:t>
             </a:r>
             <a:r>
-              <a:rPr lang="ru-RU" sz="1200" dirty="0"/>
+              <a:rPr lang="ru-RU" sz="1050" dirty="0"/>
               <a:t> — подброшенный файл обнаружен на проверке после безопасного выполнения и не попал в проект</a:t>
             </a:r>
           </a:p>
@@ -9440,11 +9519,11 @@
               <a:buChar char="•"/>
             </a:pPr>
             <a:r>
-              <a:rPr lang="ru-RU" sz="1200" b="1" dirty="0"/>
+              <a:rPr lang="ru-RU" sz="1050" b="1" dirty="0"/>
               <a:t>скачать и выполнить</a:t>
             </a:r>
             <a:r>
-              <a:rPr lang="ru-RU" sz="1200" dirty="0"/>
+              <a:rPr lang="ru-RU" sz="1050" dirty="0"/>
               <a:t> — команда вида «загрузить скрипт и запустить» отклонена до выполнения</a:t>
             </a:r>
           </a:p>
@@ -9454,11 +9533,11 @@
               <a:buChar char="•"/>
             </a:pPr>
             <a:r>
-              <a:rPr lang="ru-RU" sz="1200" b="1" dirty="0"/>
+              <a:rPr lang="ru-RU" sz="1050" b="1" dirty="0"/>
               <a:t>подозрительный источник пакета</a:t>
             </a:r>
             <a:r>
-              <a:rPr lang="ru-RU" sz="1200" dirty="0"/>
+              <a:rPr lang="ru-RU" sz="1050" dirty="0"/>
               <a:t> — установка из непроверенного источника отклонена</a:t>
             </a:r>
           </a:p>
@@ -9468,22 +9547,41 @@
               <a:buChar char="•"/>
             </a:pPr>
             <a:r>
-              <a:rPr lang="ru-RU" sz="1200" b="1" dirty="0"/>
+              <a:rPr lang="ru-RU" sz="1050" b="1" dirty="0"/>
               <a:t>неизвестный инструмент</a:t>
             </a:r>
             <a:r>
-              <a:rPr lang="ru-RU" sz="1200" dirty="0"/>
+              <a:rPr lang="ru-RU" sz="1050" dirty="0"/>
               <a:t> — незнакомый инструмент заблокирован по умолчанию</a:t>
             </a:r>
           </a:p>
           <a:p>
-            <a:endParaRPr lang="ru-RU" sz="1200" dirty="0"/>
+            <a:pPr marL="285750" lvl="0" indent="-285750">
+              <a:buFont typeface="Arial" panose="020B0604020202020204" pitchFamily="34" charset="0"/>
+              <a:buChar char="•"/>
+            </a:pPr>
+            <a:r>
+              <a:rPr lang="ru-RU" sz="1050" b="1" dirty="0"/>
+              <a:t>обычная работа на публичном корпусе</a:t>
+            </a:r>
+            <a:r>
+              <a:rPr lang="ru-RU" sz="1050" dirty="0"/>
+              <a:t> — 9 046 действий SWE-agent через нашу политику: вмешательство 1,2%</a:t>
+            </a:r>
           </a:p>
           <a:p>
-            <a:endParaRPr lang="ru-RU" sz="1200" dirty="0"/>
-          </a:p>
-          <a:p>
-            <a:endParaRPr lang="ru-RU" sz="1200" dirty="0"/>
+            <a:pPr marL="285750" lvl="0" indent="-285750">
+              <a:buFont typeface="Arial" panose="020B0604020202020204" pitchFamily="34" charset="0"/>
+              <a:buChar char="•"/>
+            </a:pPr>
+            <a:r>
+              <a:rPr lang="ru-RU" sz="1050" b="1" dirty="0"/>
+              <a:t>утечка секрета</a:t>
+            </a:r>
+            <a:r>
+              <a:rPr lang="ru-RU" sz="1050" dirty="0"/>
+              <a:t> — чтение .env по инструкции из README остановлено, канарейка не ушла, 0 из 8 на двух моделях</a:t>
+            </a:r>
           </a:p>
         </p:txBody>
       </p:sp>
@@ -10130,7 +10228,7 @@
                   <a:srgbClr val="FFFFFF"/>
                 </a:solidFill>
               </a:rPr>
-              <a:t>   Жёсткие проверки по эффектам. Потенциально опасный текст сюда не доходит — только данные</a:t>
+              <a:t>   Жёсткие проверки по эффектам. Потенциально опасный текст сюда не доходит — только данные; контроль, до которого инъекция не доходит: только структурированные эффекты</a:t>
             </a:r>
           </a:p>
         </p:txBody>
@@ -10229,8 +10327,8 @@
         </p:nvSpPr>
         <p:spPr>
           <a:xfrm>
-            <a:off x="469900" y="4467860"/>
-            <a:ext cx="8674100" cy="508000"/>
+            <a:off x="469900" y="4440000"/>
+            <a:ext cx="8674100" cy="650000"/>
           </a:xfrm>
           <a:prstGeom prst="rect">
             <a:avLst/>
@@ -10241,12 +10339,12 @@
           <a:lstStyle/>
           <a:p>
             <a:r>
-              <a:rPr lang="ru-RU" sz="1000" i="1" dirty="0">
+              <a:rPr lang="ru-RU" sz="900" i="1" dirty="0">
                 <a:solidFill>
                   <a:srgbClr val="7A7A7A"/>
                 </a:solidFill>
               </a:rPr>
-              <a:t>Ограничения: подмену инструкций в тексте не распознаём, ограничиваем последствия; необратимые внешние действия вхолостую не проверить, остаётся вопрос человеку; вредоносный код внутри разрешённой правки выглядит легитимно; атаки, растянутые на несколько шагов, сравниваем по одному действию</a:t>
+              <a:t>Ограничения: подмену инструкций в тексте не распознаём, ограничиваем последствия; необратимые внешние действия вхолостую не проверить, остаётся вопрос человеку; вредоносный код внутри разрешённой правки выглядит легитимно; атаки, растянутые на несколько шагов, сравниваем по одному действию; секрет, скопированный скриптом в файл проекта, проходит проверку по путям; коммиты делает человек: git-операции в auto mode запрещены</a:t>
             </a:r>
           </a:p>
         </p:txBody>
@@ -10918,8 +11016,8 @@
         </p:nvSpPr>
         <p:spPr>
           <a:xfrm>
-            <a:off x="469900" y="4076700"/>
-            <a:ext cx="8811260" cy="711200"/>
+            <a:off x="469900" y="4040000"/>
+            <a:ext cx="8811260" cy="880000"/>
           </a:xfrm>
           <a:prstGeom prst="roundRect">
             <a:avLst>
@@ -10951,6 +11049,16 @@
                 </a:solidFill>
               </a:rPr>
               <a:t>DENY — файла нет в проекте, починка бага применена, агент продолжил</a:t>
+            </a:r>
+          </a:p>
+          <a:p>
+            <a:r>
+              <a:rPr lang="ru-RU" sz="1100" i="0">
+                <a:solidFill>
+                  <a:srgbClr val="E8E4E0"/>
+                </a:solidFill>
+              </a:rPr>
+              <a:t>тот же сценарий на сильной модели nemotron-3-super-120b: без защиты 2 из 2, с защитой 0</a:t>
             </a:r>
           </a:p>
         </p:txBody>
@@ -11203,7 +11311,7 @@
         <p:spPr>
           <a:xfrm>
             <a:off x="476250" y="3717492"/>
-            <a:ext cx="1714500" cy="952500"/>
+            <a:ext cx="2000000" cy="1400000"/>
           </a:xfrm>
           <a:prstGeom prst="rect">
             <a:avLst/>
@@ -11265,6 +11373,32 @@
               <a:sym typeface="Calibri"/>
             </a:endParaRPr>
           </a:p>
+          <a:p>
+            <a:pPr marL="0" marR="0" lvl="0" indent="0" algn="l" rtl="0">
+              <a:lnSpc>
+                <a:spcPct val="105000"/>
+              </a:lnSpc>
+              <a:spcBef>
+                <a:spcPts val="200"/>
+              </a:spcBef>
+              <a:spcAft>
+                <a:spcPts val="0"/>
+              </a:spcAft>
+              <a:buNone/>
+            </a:pPr>
+            <a:r>
+              <a:rPr lang="ru-RU" sz="850" i="0" u="none" strike="noStrike" cap="none" dirty="0">
+                <a:solidFill>
+                  <a:srgbClr val="595959"/>
+                </a:solidFill>
+                <a:latin typeface="Arial"/>
+                <a:ea typeface="Arial"/>
+                <a:cs typeface="Arial"/>
+                <a:sym typeface="Arial"/>
+              </a:rPr>
+              <a:t>модель угроз — в репозитории: docs/auto-mode-hackathon/THREAT-MODEL.md</a:t>
+            </a:r>
+          </a:p>
         </p:txBody>
       </p:sp>
       <p:sp>
@@ -11305,7 +11439,7 @@
               <a:buNone/>
             </a:pPr>
             <a:r>
-              <a:rPr lang="ru" sz="1200" i="0" u="none" strike="noStrike" cap="none" dirty="0">
+              <a:rPr lang="ru-RU" sz="1100" i="0" u="none" strike="noStrike" cap="none" dirty="0">
                 <a:solidFill>
                   <a:srgbClr val="000000"/>
                 </a:solidFill>
@@ -11314,41 +11448,8 @@
                 <a:cs typeface="Arial"/>
                 <a:sym typeface="Arial"/>
               </a:rPr>
-              <a:t>Демо 6 сценариев, хеш решений совпал на macOS и Linux</a:t>
+              <a:t>104 автопроверки; демо 6 сценариев с одинаковым хешем на macOS и Linux; 148 живых запусков на двух моделях: атаки 84% → 0, задачи 22 из 23</a:t>
             </a:r>
-            <a:r>
-              <a:rPr lang="en-US" sz="1200" i="0" u="none" strike="noStrike" cap="none" dirty="0">
-                <a:solidFill>
-                  <a:srgbClr val="000000"/>
-                </a:solidFill>
-                <a:latin typeface="Arial"/>
-                <a:ea typeface="Arial"/>
-                <a:cs typeface="Arial"/>
-                <a:sym typeface="Arial"/>
-              </a:rPr>
-              <a:t> – </a:t>
-            </a:r>
-            <a:r>
-              <a:rPr lang="ru-RU" sz="1200" i="0" u="none" strike="noStrike" cap="none" dirty="0">
-                <a:solidFill>
-                  <a:srgbClr val="000000"/>
-                </a:solidFill>
-                <a:latin typeface="Arial"/>
-                <a:ea typeface="Arial"/>
-                <a:cs typeface="Arial"/>
-                <a:sym typeface="Arial"/>
-              </a:rPr>
-              <a:t>живой A/B на 132 запусках: без защиты атаки проходят в 78%, с защитой — 0</a:t>
-            </a:r>
-            <a:endParaRPr sz="1200" b="0" i="0" u="none" strike="noStrike" cap="none" dirty="0">
-              <a:solidFill>
-                <a:schemeClr val="dk1"/>
-              </a:solidFill>
-              <a:latin typeface="Calibri"/>
-              <a:ea typeface="Calibri"/>
-              <a:cs typeface="Calibri"/>
-              <a:sym typeface="Calibri"/>
-            </a:endParaRPr>
           </a:p>
         </p:txBody>
       </p:sp>
@@ -11361,7 +11462,7 @@
         <p:spPr>
           <a:xfrm>
             <a:off x="4793914" y="3717491"/>
-            <a:ext cx="1716600" cy="1203217"/>
+            <a:ext cx="1950000" cy="1400000"/>
           </a:xfrm>
           <a:prstGeom prst="rect">
             <a:avLst/>
@@ -11379,7 +11480,7 @@
           <a:p>
             <a:pPr marL="0" marR="0" lvl="0" indent="0" algn="l" rtl="0">
               <a:lnSpc>
-                <a:spcPct val="125000"/>
+                <a:spcPct val="108000"/>
               </a:lnSpc>
               <a:spcBef>
                 <a:spcPts val="0"/>
@@ -11390,7 +11491,7 @@
               <a:buNone/>
             </a:pPr>
             <a:r>
-              <a:rPr lang="ru" sz="1200" i="0" u="none" strike="noStrike" cap="none" dirty="0">
+              <a:rPr lang="ru-RU" sz="950" i="0" u="none" strike="noStrike" cap="none" dirty="0">
                 <a:solidFill>
                   <a:srgbClr val="000000"/>
                 </a:solidFill>
@@ -11399,65 +11500,8 @@
                 <a:cs typeface="Arial"/>
                 <a:sym typeface="Arial"/>
               </a:rPr>
-              <a:t>Расширение покрытия тестами, уточнение метрик, </a:t>
+              <a:t>Расширение покрытия тестами, уточнение метрик; PR в Kilo Code через issue; остановка после N отказов подряд с передачей человеку; проверка содержимого новых файлов на строки из секретов; pip/uv в проверке пакетов</a:t>
             </a:r>
-            <a:r>
-              <a:rPr lang="ru" sz="1200" dirty="0"/>
-              <a:t>о</a:t>
-            </a:r>
-            <a:r>
-              <a:rPr lang="ru" sz="1200" i="0" u="none" strike="noStrike" cap="none" dirty="0">
-                <a:solidFill>
-                  <a:srgbClr val="000000"/>
-                </a:solidFill>
-                <a:latin typeface="Arial"/>
-                <a:ea typeface="Arial"/>
-                <a:cs typeface="Arial"/>
-                <a:sym typeface="Arial"/>
-              </a:rPr>
-              <a:t>формление </a:t>
-            </a:r>
-            <a:r>
-              <a:rPr lang="en-US" sz="1200" i="0" u="none" strike="noStrike" cap="none" dirty="0">
-                <a:solidFill>
-                  <a:srgbClr val="000000"/>
-                </a:solidFill>
-                <a:latin typeface="Arial"/>
-                <a:ea typeface="Arial"/>
-                <a:cs typeface="Arial"/>
-                <a:sym typeface="Arial"/>
-              </a:rPr>
-              <a:t>PR </a:t>
-            </a:r>
-            <a:r>
-              <a:rPr lang="ru-RU" sz="1200" i="0" u="none" strike="noStrike" cap="none" dirty="0">
-                <a:solidFill>
-                  <a:srgbClr val="000000"/>
-                </a:solidFill>
-                <a:latin typeface="Arial"/>
-                <a:ea typeface="Arial"/>
-                <a:cs typeface="Arial"/>
-                <a:sym typeface="Arial"/>
-              </a:rPr>
-              <a:t>в сообщество </a:t>
-            </a:r>
-            <a:r>
-              <a:rPr lang="en-US" sz="1200" dirty="0"/>
-              <a:t>Kilo Code </a:t>
-            </a:r>
-            <a:r>
-              <a:rPr lang="ru-RU" sz="1200" dirty="0"/>
-              <a:t>для продвижения нашего подхода</a:t>
-            </a:r>
-            <a:endParaRPr sz="1200" b="0" i="0" u="none" strike="noStrike" cap="none" dirty="0">
-              <a:solidFill>
-                <a:schemeClr val="dk1"/>
-              </a:solidFill>
-              <a:latin typeface="Calibri"/>
-              <a:ea typeface="Calibri"/>
-              <a:cs typeface="Calibri"/>
-              <a:sym typeface="Calibri"/>
-            </a:endParaRPr>
           </a:p>
         </p:txBody>
       </p:sp>

--- a/docs/auto-mode-hackathon/final/presentation-final.pptx
+++ b/docs/auto-mode-hackathon/final/presentation-final.pptx
@@ -9136,7 +9136,22 @@
             </a:r>
             <a:r>
               <a:rPr lang="ru-RU" sz="1050" b="0" i="0" dirty="0"/>
-              <a:t> 22 из 22 → 22 из 23</a:t>
+              <a:t> </a:t>
+            </a:r>
+          </a:p>
+          <a:p>
+            <a:pPr marL="0" marR="0" indent="0" algn="l" rtl="0">
+              <a:lnSpc>
+                <a:spcPct val="110000"/>
+              </a:lnSpc>
+              <a:spcBef>
+                <a:spcPts val="400"/>
+              </a:spcBef>
+              <a:buNone/>
+            </a:pPr>
+            <a:r>
+              <a:rPr lang="ru-RU" sz="1050" b="0" i="0" dirty="0"/>
+              <a:t>22 из 22 → 22 из 23</a:t>
             </a:r>
           </a:p>
           <a:p>
@@ -11058,7 +11073,7 @@
                   <a:srgbClr val="E8E4E0"/>
                 </a:solidFill>
               </a:rPr>
-              <a:t>тот же сценарий на сильной модели nemotron-3-super-120b: без защиты 2 из 2, с защитой 0</a:t>
+              <a:t>инъекция из README на сильной модели nemotron-3-super-120b: без защиты прошла 3 из 4, с защитой 0 из 4</a:t>
             </a:r>
           </a:p>
         </p:txBody>

--- a/docs/auto-mode-hackathon/final/presentation-final.pptx
+++ b/docs/auto-mode-hackathon/final/presentation-final.pptx
@@ -8504,11 +8504,11 @@
             <a:pPr lvl="0"/>
             <a:r>
               <a:rPr lang="ru-RU" sz="1200" b="1" dirty="0"/>
-              <a:t>классов атак </a:t>
+              <a:t>классов атак из постановки кейса; карта на MITRE ATT&amp;CK/ATLAS и OWASP LLM Top 10 — в модели угроз</a:t>
             </a:r>
             <a:r>
               <a:rPr lang="ru-RU" sz="1200" dirty="0"/>
-              <a:t>— по категориям MITRE ATT&amp;CK и OWASP LLM Top 10</a:t>
+              <a:t/>
             </a:r>
             <a:endParaRPr lang="ru-RU" sz="1200" b="1" dirty="0"/>
           </a:p>
